--- a/decks/Day 2/Day2-Section5-AI-Testing-CICD.pptx
+++ b/decks/Day 2/Day2-Section5-AI-Testing-CICD.pptx
@@ -17,10 +17,7 @@
     <p:sldId id="265" r:id="rId11"/>
     <p:sldId id="266" r:id="rId12"/>
   </p:sldIdLst>
-  <p:notesMasterIdLst>
-    <p:notesMasterId r:id="rId13"/>
-  </p:notesMasterIdLst>
-  <p:sldSz cx="9144000" cy="5143500"/>
+  <p:sldSz cx="9144000" cy="5143500" type="screen16x9"/>
   <p:notesSz cx="5143500" cy="9144000"/>
   <p:defaultTextStyle>
     <a:lvl1pPr marL="0" algn="l" defTabSz="914400" rtl="0" eaLnBrk="1" latinLnBrk="0" hangingPunct="1">
@@ -114,356 +111,12 @@
       </a:defRPr>
     </a:lvl9pPr>
   </p:defaultTextStyle>
+  <p:extLst>
+    <p:ext uri="{EFAFB233-063F-42B5-8137-9DF3F51BA10A}">
+      <p15:sldGuideLst xmlns:p15="http://schemas.microsoft.com/office/powerpoint/2012/main"/>
+    </p:ext>
+  </p:extLst>
 </p:presentation>
-</file>
-
-<file path=ppt/notesMasters/notesMaster1.xml><?xml version="1.0" encoding="utf-8"?>
-<p:notesMaster xmlns:a="http://schemas.openxmlformats.org/drawingml/2006/main" xmlns:r="http://schemas.openxmlformats.org/officeDocument/2006/relationships" xmlns:p="http://schemas.openxmlformats.org/presentationml/2006/main">
-  <p:cSld>
-    <p:bg>
-      <p:bgRef idx="1001">
-        <a:schemeClr val="bg1"/>
-      </p:bgRef>
-    </p:bg>
-    <p:spTree>
-      <p:nvGrpSpPr>
-        <p:cNvPr id="1" name=""/>
-        <p:cNvGrpSpPr/>
-        <p:nvPr/>
-      </p:nvGrpSpPr>
-      <p:grpSpPr>
-        <a:xfrm>
-          <a:off x="0" y="0"/>
-          <a:ext cx="0" cy="0"/>
-          <a:chOff x="0" y="0"/>
-          <a:chExt cx="0" cy="0"/>
-        </a:xfrm>
-      </p:grpSpPr>
-      <p:sp>
-        <p:nvSpPr>
-          <p:cNvPr id="2" name="Header Placeholder 1"/>
-          <p:cNvSpPr>
-            <a:spLocks noGrp="1"/>
-          </p:cNvSpPr>
-          <p:nvPr>
-            <p:ph type="hdr" sz="quarter"/>
-          </p:nvPr>
-        </p:nvSpPr>
-        <p:spPr>
-          <a:xfrm>
-            <a:off x="0" y="0"/>
-            <a:ext cx="2971800" cy="458788"/>
-          </a:xfrm>
-          <a:prstGeom prst="rect">
-            <a:avLst/>
-          </a:prstGeom>
-        </p:spPr>
-        <p:txBody>
-          <a:bodyPr vert="horz" lIns="91440" tIns="45720" rIns="91440" bIns="45720" rtlCol="0"/>
-          <a:lstStyle>
-            <a:lvl1pPr algn="l">
-              <a:defRPr sz="1200"/>
-            </a:lvl1pPr>
-          </a:lstStyle>
-          <a:p>
-            <a:endParaRPr lang="en-US"/>
-          </a:p>
-        </p:txBody>
-      </p:sp>
-      <p:sp>
-        <p:nvSpPr>
-          <p:cNvPr id="3" name="Date Placeholder 2"/>
-          <p:cNvSpPr>
-            <a:spLocks noGrp="1"/>
-          </p:cNvSpPr>
-          <p:nvPr>
-            <p:ph type="dt" idx="1"/>
-          </p:nvPr>
-        </p:nvSpPr>
-        <p:spPr>
-          <a:xfrm>
-            <a:off x="3884613" y="0"/>
-            <a:ext cx="2971800" cy="458788"/>
-          </a:xfrm>
-          <a:prstGeom prst="rect">
-            <a:avLst/>
-          </a:prstGeom>
-        </p:spPr>
-        <p:txBody>
-          <a:bodyPr vert="horz" lIns="91440" tIns="45720" rIns="91440" bIns="45720" rtlCol="0"/>
-          <a:lstStyle>
-            <a:lvl1pPr algn="r">
-              <a:defRPr sz="1200"/>
-            </a:lvl1pPr>
-          </a:lstStyle>
-          <a:p>
-            <a:fld id="{5282F153-3F37-0F45-9E97-73ACFA13230C}" type="datetimeFigureOut">
-              <a:rPr lang="en-US"/>
-              <a:t>7/23/19</a:t>
-            </a:fld>
-            <a:endParaRPr lang="en-US"/>
-          </a:p>
-        </p:txBody>
-      </p:sp>
-      <p:sp>
-        <p:nvSpPr>
-          <p:cNvPr id="4" name="Slide Image Placeholder 3"/>
-          <p:cNvSpPr>
-            <a:spLocks noGrp="1" noRot="1" noChangeAspect="1"/>
-          </p:cNvSpPr>
-          <p:nvPr>
-            <p:ph type="sldImg" idx="2"/>
-          </p:nvPr>
-        </p:nvSpPr>
-        <p:spPr>
-          <a:xfrm>
-            <a:off x="685800" y="1143000"/>
-            <a:ext cx="5486400" cy="3086100"/>
-          </a:xfrm>
-          <a:prstGeom prst="rect">
-            <a:avLst/>
-          </a:prstGeom>
-          <a:noFill/>
-          <a:ln w="12700">
-            <a:solidFill>
-              <a:prstClr val="black"/>
-            </a:solidFill>
-          </a:ln>
-        </p:spPr>
-        <p:txBody>
-          <a:bodyPr vert="horz" lIns="91440" tIns="45720" rIns="91440" bIns="45720" rtlCol="0" anchor="ctr"/>
-          <a:lstStyle/>
-          <a:p>
-            <a:endParaRPr lang="en-US"/>
-          </a:p>
-        </p:txBody>
-      </p:sp>
-      <p:sp>
-        <p:nvSpPr>
-          <p:cNvPr id="5" name="Notes Placeholder 4"/>
-          <p:cNvSpPr>
-            <a:spLocks noGrp="1"/>
-          </p:cNvSpPr>
-          <p:nvPr>
-            <p:ph type="body" sz="quarter" idx="3"/>
-          </p:nvPr>
-        </p:nvSpPr>
-        <p:spPr>
-          <a:xfrm>
-            <a:off x="685800" y="4400550"/>
-            <a:ext cx="5486400" cy="3600450"/>
-          </a:xfrm>
-          <a:prstGeom prst="rect">
-            <a:avLst/>
-          </a:prstGeom>
-        </p:spPr>
-        <p:txBody>
-          <a:bodyPr vert="horz" lIns="91440" tIns="45720" rIns="91440" bIns="45720" rtlCol="0"/>
-          <a:lstStyle/>
-          <a:p>
-            <a:pPr lvl="0"/>
-            <a:r>
-              <a:rPr lang="en-US"/>
-              <a:t>Click to edit Master text styles</a:t>
-            </a:r>
-          </a:p>
-          <a:p>
-            <a:pPr lvl="1"/>
-            <a:r>
-              <a:rPr lang="en-US"/>
-              <a:t>Second level</a:t>
-            </a:r>
-          </a:p>
-          <a:p>
-            <a:pPr lvl="2"/>
-            <a:r>
-              <a:rPr lang="en-US"/>
-              <a:t>Third level</a:t>
-            </a:r>
-          </a:p>
-          <a:p>
-            <a:pPr lvl="3"/>
-            <a:r>
-              <a:rPr lang="en-US"/>
-              <a:t>Fourth level</a:t>
-            </a:r>
-          </a:p>
-          <a:p>
-            <a:pPr lvl="4"/>
-            <a:r>
-              <a:rPr lang="en-US"/>
-              <a:t>Fifth level</a:t>
-            </a:r>
-          </a:p>
-        </p:txBody>
-      </p:sp>
-      <p:sp>
-        <p:nvSpPr>
-          <p:cNvPr id="6" name="Footer Placeholder 5"/>
-          <p:cNvSpPr>
-            <a:spLocks noGrp="1"/>
-          </p:cNvSpPr>
-          <p:nvPr>
-            <p:ph type="ftr" sz="quarter" idx="4"/>
-          </p:nvPr>
-        </p:nvSpPr>
-        <p:spPr>
-          <a:xfrm>
-            <a:off x="0" y="8685213"/>
-            <a:ext cx="2971800" cy="458787"/>
-          </a:xfrm>
-          <a:prstGeom prst="rect">
-            <a:avLst/>
-          </a:prstGeom>
-        </p:spPr>
-        <p:txBody>
-          <a:bodyPr vert="horz" lIns="91440" tIns="45720" rIns="91440" bIns="45720" rtlCol="0" anchor="b"/>
-          <a:lstStyle>
-            <a:lvl1pPr algn="l">
-              <a:defRPr sz="1200"/>
-            </a:lvl1pPr>
-          </a:lstStyle>
-          <a:p>
-            <a:endParaRPr lang="en-US"/>
-          </a:p>
-        </p:txBody>
-      </p:sp>
-      <p:sp>
-        <p:nvSpPr>
-          <p:cNvPr id="7" name="Slide Number Placeholder 6"/>
-          <p:cNvSpPr>
-            <a:spLocks noGrp="1"/>
-          </p:cNvSpPr>
-          <p:nvPr>
-            <p:ph type="sldNum" sz="quarter" idx="5"/>
-          </p:nvPr>
-        </p:nvSpPr>
-        <p:spPr>
-          <a:xfrm>
-            <a:off x="3884613" y="8685213"/>
-            <a:ext cx="2971800" cy="458787"/>
-          </a:xfrm>
-          <a:prstGeom prst="rect">
-            <a:avLst/>
-          </a:prstGeom>
-        </p:spPr>
-        <p:txBody>
-          <a:bodyPr vert="horz" lIns="91440" tIns="45720" rIns="91440" bIns="45720" rtlCol="0" anchor="b"/>
-          <a:lstStyle>
-            <a:lvl1pPr algn="r">
-              <a:defRPr sz="1200"/>
-            </a:lvl1pPr>
-          </a:lstStyle>
-          <a:p>
-            <a:fld id="{CE5E9CC1-C706-0F49-92D6-E571CC5EEA8F}" type="slidenum">
-              <a:rPr lang="en-US"/>
-              <a:t>‹#›</a:t>
-            </a:fld>
-            <a:endParaRPr lang="en-US"/>
-          </a:p>
-        </p:txBody>
-      </p:sp>
-    </p:spTree>
-    <p:extLst>
-      <p:ext uri="{BB962C8B-B14F-4D97-AF65-F5344CB8AC3E}">
-        <p14:creationId xmlns:p14="http://schemas.microsoft.com/office/powerpoint/2010/main" val="1024086991"/>
-      </p:ext>
-    </p:extLst>
-  </p:cSld>
-  <p:clrMap bg1="lt1" tx1="dk1" bg2="lt2" tx2="dk2" accent1="accent1" accent2="accent2" accent3="accent3" accent4="accent4" accent5="accent5" accent6="accent6" hlink="hlink" folHlink="folHlink"/>
-  <p:notesStyle>
-    <a:lvl1pPr marL="0" algn="l" defTabSz="914400" rtl="0" eaLnBrk="1" latinLnBrk="0" hangingPunct="1">
-      <a:defRPr sz="1200" kern="1200">
-        <a:solidFill>
-          <a:schemeClr val="tx1"/>
-        </a:solidFill>
-        <a:latin typeface="+mn-lt"/>
-        <a:ea typeface="+mn-ea"/>
-        <a:cs typeface="+mn-cs"/>
-      </a:defRPr>
-    </a:lvl1pPr>
-    <a:lvl2pPr marL="457200" algn="l" defTabSz="914400" rtl="0" eaLnBrk="1" latinLnBrk="0" hangingPunct="1">
-      <a:defRPr sz="1200" kern="1200">
-        <a:solidFill>
-          <a:schemeClr val="tx1"/>
-        </a:solidFill>
-        <a:latin typeface="+mn-lt"/>
-        <a:ea typeface="+mn-ea"/>
-        <a:cs typeface="+mn-cs"/>
-      </a:defRPr>
-    </a:lvl2pPr>
-    <a:lvl3pPr marL="914400" algn="l" defTabSz="914400" rtl="0" eaLnBrk="1" latinLnBrk="0" hangingPunct="1">
-      <a:defRPr sz="1200" kern="1200">
-        <a:solidFill>
-          <a:schemeClr val="tx1"/>
-        </a:solidFill>
-        <a:latin typeface="+mn-lt"/>
-        <a:ea typeface="+mn-ea"/>
-        <a:cs typeface="+mn-cs"/>
-      </a:defRPr>
-    </a:lvl3pPr>
-    <a:lvl4pPr marL="1371600" algn="l" defTabSz="914400" rtl="0" eaLnBrk="1" latinLnBrk="0" hangingPunct="1">
-      <a:defRPr sz="1200" kern="1200">
-        <a:solidFill>
-          <a:schemeClr val="tx1"/>
-        </a:solidFill>
-        <a:latin typeface="+mn-lt"/>
-        <a:ea typeface="+mn-ea"/>
-        <a:cs typeface="+mn-cs"/>
-      </a:defRPr>
-    </a:lvl4pPr>
-    <a:lvl5pPr marL="1828800" algn="l" defTabSz="914400" rtl="0" eaLnBrk="1" latinLnBrk="0" hangingPunct="1">
-      <a:defRPr sz="1200" kern="1200">
-        <a:solidFill>
-          <a:schemeClr val="tx1"/>
-        </a:solidFill>
-        <a:latin typeface="+mn-lt"/>
-        <a:ea typeface="+mn-ea"/>
-        <a:cs typeface="+mn-cs"/>
-      </a:defRPr>
-    </a:lvl5pPr>
-    <a:lvl6pPr marL="2286000" algn="l" defTabSz="914400" rtl="0" eaLnBrk="1" latinLnBrk="0" hangingPunct="1">
-      <a:defRPr sz="1200" kern="1200">
-        <a:solidFill>
-          <a:schemeClr val="tx1"/>
-        </a:solidFill>
-        <a:latin typeface="+mn-lt"/>
-        <a:ea typeface="+mn-ea"/>
-        <a:cs typeface="+mn-cs"/>
-      </a:defRPr>
-    </a:lvl6pPr>
-    <a:lvl7pPr marL="2743200" algn="l" defTabSz="914400" rtl="0" eaLnBrk="1" latinLnBrk="0" hangingPunct="1">
-      <a:defRPr sz="1200" kern="1200">
-        <a:solidFill>
-          <a:schemeClr val="tx1"/>
-        </a:solidFill>
-        <a:latin typeface="+mn-lt"/>
-        <a:ea typeface="+mn-ea"/>
-        <a:cs typeface="+mn-cs"/>
-      </a:defRPr>
-    </a:lvl7pPr>
-    <a:lvl8pPr marL="3200400" algn="l" defTabSz="914400" rtl="0" eaLnBrk="1" latinLnBrk="0" hangingPunct="1">
-      <a:defRPr sz="1200" kern="1200">
-        <a:solidFill>
-          <a:schemeClr val="tx1"/>
-        </a:solidFill>
-        <a:latin typeface="+mn-lt"/>
-        <a:ea typeface="+mn-ea"/>
-        <a:cs typeface="+mn-cs"/>
-      </a:defRPr>
-    </a:lvl8pPr>
-    <a:lvl9pPr marL="3657600" algn="l" defTabSz="914400" rtl="0" eaLnBrk="1" latinLnBrk="0" hangingPunct="1">
-      <a:defRPr sz="1200" kern="1200">
-        <a:solidFill>
-          <a:schemeClr val="tx1"/>
-        </a:solidFill>
-        <a:latin typeface="+mn-lt"/>
-        <a:ea typeface="+mn-ea"/>
-        <a:cs typeface="+mn-cs"/>
-      </a:defRPr>
-    </a:lvl9pPr>
-  </p:notesStyle>
-</p:notesMaster>
 </file>
 
 <file path=ppt/slideLayouts/slideLayout1.xml><?xml version="1.0" encoding="utf-8"?>
@@ -499,6 +152,11 @@
 <file path=ppt/slideMasters/slideMaster1.xml><?xml version="1.0" encoding="utf-8"?>
 <p:sldMaster xmlns:a="http://schemas.openxmlformats.org/drawingml/2006/main" xmlns:r="http://schemas.openxmlformats.org/officeDocument/2006/relationships" xmlns:p="http://schemas.openxmlformats.org/presentationml/2006/main">
   <p:cSld>
+    <p:bg>
+      <p:bgRef idx="1001">
+        <a:schemeClr val="bg1"/>
+      </p:bgRef>
+    </p:bg>
     <p:spTree>
       <p:nvGrpSpPr>
         <p:cNvPr id="1" name=""/>
@@ -781,6 +439,7 @@
         <a:solidFill>
           <a:srgbClr val="F0EEE6"/>
         </a:solidFill>
+        <a:effectLst/>
       </p:bgPr>
     </p:bg>
     <p:spTree>
@@ -816,6 +475,13 @@
           </a:solidFill>
           <a:ln/>
         </p:spPr>
+        <p:txBody>
+          <a:bodyPr/>
+          <a:lstStyle/>
+          <a:p>
+            <a:endParaRPr lang="en-US"/>
+          </a:p>
+        </p:txBody>
       </p:sp>
       <p:sp>
         <p:nvSpPr>
@@ -836,17 +502,24 @@
           </a:solidFill>
           <a:ln/>
         </p:spPr>
+        <p:txBody>
+          <a:bodyPr/>
+          <a:lstStyle/>
+          <a:p>
+            <a:endParaRPr lang="en-US"/>
+          </a:p>
+        </p:txBody>
       </p:sp>
       <p:pic>
         <p:nvPicPr>
-          <p:cNvPr id="4" name="Image 0" descr="preencoded.png">    </p:cNvPr>
+          <p:cNvPr id="4" name="Image 0" descr="preencoded.png"/>
           <p:cNvPicPr>
             <a:picLocks noChangeAspect="1"/>
           </p:cNvPicPr>
           <p:nvPr/>
         </p:nvPicPr>
         <p:blipFill>
-          <a:blip r:embed="rId1"/>
+          <a:blip r:embed="rId2"/>
           <a:stretch>
             <a:fillRect/>
           </a:stretch>
@@ -882,11 +555,11 @@
           <a:bodyPr wrap="square" lIns="0" tIns="0" rIns="0" bIns="0" rtlCol="0" anchor="ctr"/>
           <a:lstStyle/>
           <a:p>
-            <a:pPr indent="0" marL="0">
-              <a:buNone/>
-            </a:pPr>
-            <a:r>
-              <a:rPr lang="en-US" sz="1400" b="1" spc="300" kern="0" dirty="0">
+            <a:pPr marL="0" indent="0">
+              <a:buNone/>
+            </a:pPr>
+            <a:r>
+              <a:rPr lang="en-US" sz="1400" b="1" kern="0" spc="300" dirty="0">
                 <a:solidFill>
                   <a:srgbClr val="C25E40"/>
                 </a:solidFill>
@@ -921,7 +594,7 @@
           <a:bodyPr wrap="square" lIns="0" tIns="0" rIns="0" bIns="0" rtlCol="0" anchor="ctr"/>
           <a:lstStyle/>
           <a:p>
-            <a:pPr indent="0" marL="0">
+            <a:pPr marL="0" indent="0">
               <a:lnSpc>
                 <a:spcPct val="100000"/>
               </a:lnSpc>
@@ -941,7 +614,7 @@
             <a:endParaRPr lang="en-US" sz="4100" dirty="0"/>
           </a:p>
           <a:p>
-            <a:pPr indent="0" marL="0">
+            <a:pPr marL="0" indent="0">
               <a:lnSpc>
                 <a:spcPct val="100000"/>
               </a:lnSpc>
@@ -984,6 +657,13 @@
             <a:prstDash val="solid"/>
           </a:ln>
         </p:spPr>
+        <p:txBody>
+          <a:bodyPr/>
+          <a:lstStyle/>
+          <a:p>
+            <a:endParaRPr lang="en-US"/>
+          </a:p>
+        </p:txBody>
       </p:sp>
       <p:sp>
         <p:nvSpPr>
@@ -1006,7 +686,7 @@
           <a:bodyPr wrap="square" lIns="0" tIns="0" rIns="0" bIns="0" rtlCol="0" anchor="ctr"/>
           <a:lstStyle/>
           <a:p>
-            <a:pPr indent="0" marL="0">
+            <a:pPr marL="0" indent="0">
               <a:buNone/>
             </a:pPr>
             <a:r>
@@ -1021,45 +701,6 @@
               <a:t>45 min  ·  20 lecture / demo  +  25 lab</a:t>
             </a:r>
             <a:endParaRPr lang="en-US" sz="1600" dirty="0"/>
-          </a:p>
-        </p:txBody>
-      </p:sp>
-      <p:sp>
-        <p:nvSpPr>
-          <p:cNvPr id="9" name="Text 6"/>
-          <p:cNvSpPr/>
-          <p:nvPr/>
-        </p:nvSpPr>
-        <p:spPr>
-          <a:xfrm>
-            <a:off x="640080" y="4462272"/>
-            <a:ext cx="8046720" cy="292608"/>
-          </a:xfrm>
-          <a:prstGeom prst="rect">
-            <a:avLst/>
-          </a:prstGeom>
-          <a:noFill/>
-          <a:ln/>
-        </p:spPr>
-        <p:txBody>
-          <a:bodyPr wrap="square" lIns="0" tIns="0" rIns="0" bIns="0" rtlCol="0" anchor="ctr"/>
-          <a:lstStyle/>
-          <a:p>
-            <a:pPr indent="0" marL="0">
-              <a:buNone/>
-            </a:pPr>
-            <a:r>
-              <a:rPr lang="en-US" sz="1000" i="1" dirty="0">
-                <a:solidFill>
-                  <a:srgbClr val="615C52"/>
-                </a:solidFill>
-                <a:latin typeface="Inter" pitchFamily="34" charset="0"/>
-                <a:ea typeface="Inter" pitchFamily="34" charset="-122"/>
-                <a:cs typeface="Inter" pitchFamily="34" charset="-120"/>
-              </a:rPr>
-              <a:t>dotnetclaude.com  ·  .NET AI with Claude Workshop</a:t>
-            </a:r>
-            <a:endParaRPr lang="en-US" sz="1000" dirty="0"/>
           </a:p>
         </p:txBody>
       </p:sp>
@@ -1079,6 +720,7 @@
         <a:solidFill>
           <a:srgbClr val="F0EEE6"/>
         </a:solidFill>
+        <a:effectLst/>
       </p:bgPr>
     </p:bg>
     <p:spTree>
@@ -1097,60 +739,7 @@
       </p:grpSpPr>
       <p:pic>
         <p:nvPicPr>
-          <p:cNvPr id="2" name="Image 0" descr="preencoded.png">    </p:cNvPr>
-          <p:cNvPicPr>
-            <a:picLocks noChangeAspect="1"/>
-          </p:cNvPicPr>
-          <p:nvPr/>
-        </p:nvPicPr>
-        <p:blipFill>
-          <a:blip r:embed="rId1"/>
-          <a:stretch>
-            <a:fillRect/>
-          </a:stretch>
-        </p:blipFill>
-        <p:spPr>
-          <a:xfrm>
-            <a:off x="8321040" y="411480"/>
-            <a:ext cx="347472" cy="292608"/>
-          </a:xfrm>
-          <a:prstGeom prst="rect">
-            <a:avLst/>
-          </a:prstGeom>
-        </p:spPr>
-      </p:pic>
-      <p:sp>
-        <p:nvSpPr>
-          <p:cNvPr id="3" name="Shape 0"/>
-          <p:cNvSpPr/>
-          <p:nvPr/>
-        </p:nvSpPr>
-        <p:spPr>
-          <a:xfrm>
-            <a:off x="548640" y="822960"/>
-            <a:ext cx="3154680" cy="3429000"/>
-          </a:xfrm>
-          <a:prstGeom prst="roundRect">
-            <a:avLst>
-              <a:gd name="adj" fmla="val 3478"/>
-            </a:avLst>
-          </a:prstGeom>
-          <a:solidFill>
-            <a:srgbClr val="D97757"/>
-          </a:solidFill>
-          <a:ln/>
-          <a:effectLst>
-            <a:outerShdw sx="100000" sy="100000" kx="0" ky="0" algn="bl" rotWithShape="0" blurRad="88900" dist="38100" dir="5400000">
-              <a:srgbClr val="000000">
-                <a:alpha val="10000"/>
-              </a:srgbClr>
-            </a:outerShdw>
-          </a:effectLst>
-        </p:spPr>
-      </p:sp>
-      <p:pic>
-        <p:nvPicPr>
-          <p:cNvPr id="4" name="Image 1" descr="preencoded.png">    </p:cNvPr>
+          <p:cNvPr id="2" name="Image 0" descr="preencoded.png"/>
           <p:cNvPicPr>
             <a:picLocks noChangeAspect="1"/>
           </p:cNvPicPr>
@@ -1164,8 +753,8 @@
         </p:blipFill>
         <p:spPr>
           <a:xfrm>
-            <a:off x="868680" y="1133856"/>
-            <a:ext cx="548640" cy="548640"/>
+            <a:off x="8321040" y="411480"/>
+            <a:ext cx="347472" cy="292608"/>
           </a:xfrm>
           <a:prstGeom prst="rect">
             <a:avLst/>
@@ -1174,659 +763,43 @@
       </p:pic>
       <p:sp>
         <p:nvSpPr>
-          <p:cNvPr id="5" name="Text 1"/>
-          <p:cNvSpPr/>
-          <p:nvPr/>
-        </p:nvSpPr>
-        <p:spPr>
-          <a:xfrm>
-            <a:off x="868680" y="1755648"/>
-            <a:ext cx="2514600" cy="548640"/>
-          </a:xfrm>
-          <a:prstGeom prst="rect">
-            <a:avLst/>
-          </a:prstGeom>
-          <a:noFill/>
-          <a:ln/>
-        </p:spPr>
-        <p:txBody>
-          <a:bodyPr wrap="square" lIns="0" tIns="0" rIns="0" bIns="0" rtlCol="0" anchor="ctr"/>
-          <a:lstStyle/>
-          <a:p>
-            <a:pPr indent="0" marL="0">
-              <a:buNone/>
-            </a:pPr>
-            <a:r>
-              <a:rPr lang="en-US" sz="3800" b="1" dirty="0">
-                <a:solidFill>
-                  <a:srgbClr val="FFFFFF"/>
-                </a:solidFill>
-                <a:latin typeface="Georgia" pitchFamily="34" charset="0"/>
-                <a:ea typeface="Georgia" pitchFamily="34" charset="-122"/>
-                <a:cs typeface="Georgia" pitchFamily="34" charset="-120"/>
-              </a:rPr>
-              <a:t>LAB 5</a:t>
-            </a:r>
-            <a:endParaRPr lang="en-US" sz="3800" dirty="0"/>
-          </a:p>
-        </p:txBody>
-      </p:sp>
-      <p:sp>
-        <p:nvSpPr>
-          <p:cNvPr id="6" name="Text 2"/>
-          <p:cNvSpPr/>
-          <p:nvPr/>
-        </p:nvSpPr>
-        <p:spPr>
-          <a:xfrm>
-            <a:off x="868680" y="2340864"/>
-            <a:ext cx="2514600" cy="320040"/>
-          </a:xfrm>
-          <a:prstGeom prst="rect">
-            <a:avLst/>
-          </a:prstGeom>
-          <a:noFill/>
-          <a:ln/>
-        </p:spPr>
-        <p:txBody>
-          <a:bodyPr wrap="square" lIns="0" tIns="0" rIns="0" bIns="0" rtlCol="0" anchor="ctr"/>
-          <a:lstStyle/>
-          <a:p>
-            <a:pPr indent="0" marL="0">
-              <a:buNone/>
-            </a:pPr>
-            <a:r>
-              <a:rPr lang="en-US" sz="1400" dirty="0">
-                <a:solidFill>
-                  <a:srgbClr val="FBE9E2"/>
-                </a:solidFill>
-                <a:latin typeface="Inter" pitchFamily="34" charset="0"/>
-                <a:ea typeface="Inter" pitchFamily="34" charset="-122"/>
-                <a:cs typeface="Inter" pitchFamily="34" charset="-120"/>
-              </a:rPr>
-              <a:t>25 min  ·  hands-on</a:t>
-            </a:r>
-            <a:endParaRPr lang="en-US" sz="1400" dirty="0"/>
-          </a:p>
-        </p:txBody>
-      </p:sp>
-      <p:sp>
-        <p:nvSpPr>
-          <p:cNvPr id="7" name="Shape 3"/>
-          <p:cNvSpPr/>
-          <p:nvPr/>
-        </p:nvSpPr>
-        <p:spPr>
-          <a:xfrm>
-            <a:off x="886968" y="2724912"/>
-            <a:ext cx="1691640" cy="0"/>
-          </a:xfrm>
-          <a:prstGeom prst="line">
-            <a:avLst/>
-          </a:prstGeom>
-          <a:noFill/>
-          <a:ln w="19050">
-            <a:solidFill>
-              <a:srgbClr val="F2C9BC"/>
-            </a:solidFill>
-            <a:prstDash val="solid"/>
-          </a:ln>
-        </p:spPr>
-      </p:sp>
-      <p:sp>
-        <p:nvSpPr>
-          <p:cNvPr id="8" name="Text 4"/>
-          <p:cNvSpPr/>
-          <p:nvPr/>
-        </p:nvSpPr>
-        <p:spPr>
-          <a:xfrm>
-            <a:off x="868680" y="2852928"/>
-            <a:ext cx="2514600" cy="228600"/>
-          </a:xfrm>
-          <a:prstGeom prst="rect">
-            <a:avLst/>
-          </a:prstGeom>
-          <a:noFill/>
-          <a:ln/>
-        </p:spPr>
-        <p:txBody>
-          <a:bodyPr wrap="square" lIns="0" tIns="0" rIns="0" bIns="0" rtlCol="0" anchor="ctr"/>
-          <a:lstStyle/>
-          <a:p>
-            <a:pPr indent="0" marL="0">
-              <a:buNone/>
-            </a:pPr>
-            <a:r>
-              <a:rPr lang="en-US" sz="1100" b="1" spc="100" kern="0" dirty="0">
-                <a:solidFill>
-                  <a:srgbClr val="FBE9E2"/>
-                </a:solidFill>
-                <a:latin typeface="Inter" pitchFamily="34" charset="0"/>
-                <a:ea typeface="Inter" pitchFamily="34" charset="-122"/>
-                <a:cs typeface="Inter" pitchFamily="34" charset="-120"/>
-              </a:rPr>
-              <a:t>DELIVERABLE</a:t>
-            </a:r>
-            <a:endParaRPr lang="en-US" sz="1100" dirty="0"/>
-          </a:p>
-        </p:txBody>
-      </p:sp>
-      <p:sp>
-        <p:nvSpPr>
-          <p:cNvPr id="9" name="Text 5"/>
-          <p:cNvSpPr/>
-          <p:nvPr/>
-        </p:nvSpPr>
-        <p:spPr>
-          <a:xfrm>
-            <a:off x="868680" y="3090672"/>
-            <a:ext cx="2606040" cy="1005840"/>
-          </a:xfrm>
-          <a:prstGeom prst="rect">
-            <a:avLst/>
-          </a:prstGeom>
-          <a:noFill/>
-          <a:ln/>
-        </p:spPr>
-        <p:txBody>
-          <a:bodyPr wrap="square" lIns="0" tIns="0" rIns="0" bIns="0" rtlCol="0" anchor="ctr"/>
-          <a:lstStyle/>
-          <a:p>
-            <a:pPr indent="0" marL="0">
-              <a:buNone/>
-            </a:pPr>
-            <a:r>
-              <a:rPr lang="en-US" sz="1300" b="1" dirty="0">
-                <a:solidFill>
-                  <a:srgbClr val="FFFFFF"/>
-                </a:solidFill>
-                <a:latin typeface="Inter" pitchFamily="34" charset="0"/>
-                <a:ea typeface="Inter" pitchFamily="34" charset="-122"/>
-                <a:cs typeface="Inter" pitchFamily="34" charset="-120"/>
-              </a:rPr>
-              <a:t>AI tests passing + Actions AI review + release-notes job, committed</a:t>
-            </a:r>
-            <a:endParaRPr lang="en-US" sz="1300" dirty="0"/>
-          </a:p>
-        </p:txBody>
-      </p:sp>
-      <p:sp>
-        <p:nvSpPr>
-          <p:cNvPr id="10" name="Text 6"/>
-          <p:cNvSpPr/>
-          <p:nvPr/>
-        </p:nvSpPr>
-        <p:spPr>
-          <a:xfrm>
-            <a:off x="4069080" y="841248"/>
-            <a:ext cx="4572000" cy="274320"/>
-          </a:xfrm>
-          <a:prstGeom prst="rect">
-            <a:avLst/>
-          </a:prstGeom>
-          <a:noFill/>
-          <a:ln/>
-        </p:spPr>
-        <p:txBody>
-          <a:bodyPr wrap="square" lIns="0" tIns="0" rIns="0" bIns="0" rtlCol="0" anchor="ctr"/>
-          <a:lstStyle/>
-          <a:p>
-            <a:pPr indent="0" marL="0">
-              <a:buNone/>
-            </a:pPr>
-            <a:r>
-              <a:rPr lang="en-US" sz="1100" b="1" spc="200" kern="0" dirty="0">
-                <a:solidFill>
-                  <a:srgbClr val="C25E40"/>
-                </a:solidFill>
-                <a:latin typeface="Inter" pitchFamily="34" charset="0"/>
-                <a:ea typeface="Inter" pitchFamily="34" charset="-122"/>
-                <a:cs typeface="Inter" pitchFamily="34" charset="-120"/>
-              </a:rPr>
-              <a:t>FOUR PARTS</a:t>
-            </a:r>
-            <a:endParaRPr lang="en-US" sz="1100" dirty="0"/>
-          </a:p>
-        </p:txBody>
-      </p:sp>
-      <p:sp>
-        <p:nvSpPr>
-          <p:cNvPr id="11" name="Shape 7"/>
-          <p:cNvSpPr/>
-          <p:nvPr/>
-        </p:nvSpPr>
-        <p:spPr>
-          <a:xfrm>
-            <a:off x="4069080" y="1197864"/>
-            <a:ext cx="329184" cy="329184"/>
-          </a:xfrm>
-          <a:prstGeom prst="ellipse">
-            <a:avLst/>
-          </a:prstGeom>
-          <a:solidFill>
-            <a:srgbClr val="F4E4DC"/>
-          </a:solidFill>
-          <a:ln/>
-        </p:spPr>
-      </p:sp>
-      <p:sp>
-        <p:nvSpPr>
-          <p:cNvPr id="12" name="Text 8"/>
-          <p:cNvSpPr/>
-          <p:nvPr/>
-        </p:nvSpPr>
-        <p:spPr>
-          <a:xfrm>
-            <a:off x="4069080" y="1197864"/>
-            <a:ext cx="329184" cy="329184"/>
-          </a:xfrm>
-          <a:prstGeom prst="rect">
-            <a:avLst/>
-          </a:prstGeom>
-          <a:noFill/>
-          <a:ln/>
-        </p:spPr>
-        <p:txBody>
-          <a:bodyPr wrap="square" lIns="0" tIns="0" rIns="0" bIns="0" rtlCol="0" anchor="ctr"/>
-          <a:lstStyle/>
-          <a:p>
-            <a:pPr algn="ctr" indent="0" marL="0">
-              <a:buNone/>
-            </a:pPr>
-            <a:r>
-              <a:rPr lang="en-US" sz="1400" b="1" dirty="0">
-                <a:solidFill>
-                  <a:srgbClr val="C25E40"/>
-                </a:solidFill>
-                <a:latin typeface="Inter" pitchFamily="34" charset="0"/>
-                <a:ea typeface="Inter" pitchFamily="34" charset="-122"/>
-                <a:cs typeface="Inter" pitchFamily="34" charset="-120"/>
-              </a:rPr>
-              <a:t>A</a:t>
-            </a:r>
-            <a:endParaRPr lang="en-US" sz="1400" dirty="0"/>
-          </a:p>
-        </p:txBody>
-      </p:sp>
-      <p:sp>
-        <p:nvSpPr>
-          <p:cNvPr id="13" name="Text 9"/>
-          <p:cNvSpPr/>
-          <p:nvPr/>
-        </p:nvSpPr>
-        <p:spPr>
-          <a:xfrm>
-            <a:off x="4526280" y="1188720"/>
-            <a:ext cx="4572000" cy="347472"/>
-          </a:xfrm>
-          <a:prstGeom prst="rect">
-            <a:avLst/>
-          </a:prstGeom>
-          <a:noFill/>
-          <a:ln/>
-        </p:spPr>
-        <p:txBody>
-          <a:bodyPr wrap="square" lIns="0" tIns="0" rIns="0" bIns="0" rtlCol="0" anchor="ctr"/>
-          <a:lstStyle/>
-          <a:p>
-            <a:pPr indent="0" marL="0">
-              <a:buNone/>
-            </a:pPr>
-            <a:r>
-              <a:rPr lang="en-US" sz="1450" dirty="0">
-                <a:solidFill>
-                  <a:srgbClr val="141413"/>
-                </a:solidFill>
-                <a:latin typeface="Inter" pitchFamily="34" charset="0"/>
-                <a:ea typeface="Inter" pitchFamily="34" charset="-122"/>
-                <a:cs typeface="Inter" pitchFamily="34" charset="-120"/>
-              </a:rPr>
-              <a:t>Generate the xUnit test suite</a:t>
-            </a:r>
-            <a:endParaRPr lang="en-US" sz="1450" dirty="0"/>
-          </a:p>
-        </p:txBody>
-      </p:sp>
-      <p:sp>
-        <p:nvSpPr>
-          <p:cNvPr id="14" name="Shape 10"/>
-          <p:cNvSpPr/>
-          <p:nvPr/>
-        </p:nvSpPr>
-        <p:spPr>
-          <a:xfrm>
-            <a:off x="4069080" y="1655064"/>
-            <a:ext cx="329184" cy="329184"/>
-          </a:xfrm>
-          <a:prstGeom prst="ellipse">
-            <a:avLst/>
-          </a:prstGeom>
-          <a:solidFill>
-            <a:srgbClr val="F4E4DC"/>
-          </a:solidFill>
-          <a:ln/>
-        </p:spPr>
-      </p:sp>
-      <p:sp>
-        <p:nvSpPr>
-          <p:cNvPr id="15" name="Text 11"/>
-          <p:cNvSpPr/>
-          <p:nvPr/>
-        </p:nvSpPr>
-        <p:spPr>
-          <a:xfrm>
-            <a:off x="4069080" y="1655064"/>
-            <a:ext cx="329184" cy="329184"/>
-          </a:xfrm>
-          <a:prstGeom prst="rect">
-            <a:avLst/>
-          </a:prstGeom>
-          <a:noFill/>
-          <a:ln/>
-        </p:spPr>
-        <p:txBody>
-          <a:bodyPr wrap="square" lIns="0" tIns="0" rIns="0" bIns="0" rtlCol="0" anchor="ctr"/>
-          <a:lstStyle/>
-          <a:p>
-            <a:pPr algn="ctr" indent="0" marL="0">
-              <a:buNone/>
-            </a:pPr>
-            <a:r>
-              <a:rPr lang="en-US" sz="1400" b="1" dirty="0">
-                <a:solidFill>
-                  <a:srgbClr val="C25E40"/>
-                </a:solidFill>
-                <a:latin typeface="Inter" pitchFamily="34" charset="0"/>
-                <a:ea typeface="Inter" pitchFamily="34" charset="-122"/>
-                <a:cs typeface="Inter" pitchFamily="34" charset="-120"/>
-              </a:rPr>
-              <a:t>B</a:t>
-            </a:r>
-            <a:endParaRPr lang="en-US" sz="1400" dirty="0"/>
-          </a:p>
-        </p:txBody>
-      </p:sp>
-      <p:sp>
-        <p:nvSpPr>
-          <p:cNvPr id="16" name="Text 12"/>
-          <p:cNvSpPr/>
-          <p:nvPr/>
-        </p:nvSpPr>
-        <p:spPr>
-          <a:xfrm>
-            <a:off x="4526280" y="1645920"/>
-            <a:ext cx="4572000" cy="347472"/>
-          </a:xfrm>
-          <a:prstGeom prst="rect">
-            <a:avLst/>
-          </a:prstGeom>
-          <a:noFill/>
-          <a:ln/>
-        </p:spPr>
-        <p:txBody>
-          <a:bodyPr wrap="square" lIns="0" tIns="0" rIns="0" bIns="0" rtlCol="0" anchor="ctr"/>
-          <a:lstStyle/>
-          <a:p>
-            <a:pPr indent="0" marL="0">
-              <a:buNone/>
-            </a:pPr>
-            <a:r>
-              <a:rPr lang="en-US" sz="1450" dirty="0">
-                <a:solidFill>
-                  <a:srgbClr val="141413"/>
-                </a:solidFill>
-                <a:latin typeface="Inter" pitchFamily="34" charset="0"/>
-                <a:ea typeface="Inter" pitchFamily="34" charset="-122"/>
-                <a:cs typeface="Inter" pitchFamily="34" charset="-120"/>
-              </a:rPr>
-              <a:t>TestContainers test (stretch)</a:t>
-            </a:r>
-            <a:endParaRPr lang="en-US" sz="1450" dirty="0"/>
-          </a:p>
-        </p:txBody>
-      </p:sp>
-      <p:sp>
-        <p:nvSpPr>
-          <p:cNvPr id="17" name="Shape 13"/>
-          <p:cNvSpPr/>
-          <p:nvPr/>
-        </p:nvSpPr>
-        <p:spPr>
-          <a:xfrm>
-            <a:off x="4069080" y="2112264"/>
-            <a:ext cx="329184" cy="329184"/>
-          </a:xfrm>
-          <a:prstGeom prst="ellipse">
-            <a:avLst/>
-          </a:prstGeom>
-          <a:solidFill>
-            <a:srgbClr val="F4E4DC"/>
-          </a:solidFill>
-          <a:ln/>
-        </p:spPr>
-      </p:sp>
-      <p:sp>
-        <p:nvSpPr>
-          <p:cNvPr id="18" name="Text 14"/>
-          <p:cNvSpPr/>
-          <p:nvPr/>
-        </p:nvSpPr>
-        <p:spPr>
-          <a:xfrm>
-            <a:off x="4069080" y="2112264"/>
-            <a:ext cx="329184" cy="329184"/>
-          </a:xfrm>
-          <a:prstGeom prst="rect">
-            <a:avLst/>
-          </a:prstGeom>
-          <a:noFill/>
-          <a:ln/>
-        </p:spPr>
-        <p:txBody>
-          <a:bodyPr wrap="square" lIns="0" tIns="0" rIns="0" bIns="0" rtlCol="0" anchor="ctr"/>
-          <a:lstStyle/>
-          <a:p>
-            <a:pPr algn="ctr" indent="0" marL="0">
-              <a:buNone/>
-            </a:pPr>
-            <a:r>
-              <a:rPr lang="en-US" sz="1400" b="1" dirty="0">
-                <a:solidFill>
-                  <a:srgbClr val="C25E40"/>
-                </a:solidFill>
-                <a:latin typeface="Inter" pitchFamily="34" charset="0"/>
-                <a:ea typeface="Inter" pitchFamily="34" charset="-122"/>
-                <a:cs typeface="Inter" pitchFamily="34" charset="-120"/>
-              </a:rPr>
-              <a:t>C</a:t>
-            </a:r>
-            <a:endParaRPr lang="en-US" sz="1400" dirty="0"/>
-          </a:p>
-        </p:txBody>
-      </p:sp>
-      <p:sp>
-        <p:nvSpPr>
-          <p:cNvPr id="19" name="Text 15"/>
-          <p:cNvSpPr/>
-          <p:nvPr/>
-        </p:nvSpPr>
-        <p:spPr>
-          <a:xfrm>
-            <a:off x="4526280" y="2103120"/>
-            <a:ext cx="4572000" cy="347472"/>
-          </a:xfrm>
-          <a:prstGeom prst="rect">
-            <a:avLst/>
-          </a:prstGeom>
-          <a:noFill/>
-          <a:ln/>
-        </p:spPr>
-        <p:txBody>
-          <a:bodyPr wrap="square" lIns="0" tIns="0" rIns="0" bIns="0" rtlCol="0" anchor="ctr"/>
-          <a:lstStyle/>
-          <a:p>
-            <a:pPr indent="0" marL="0">
-              <a:buNone/>
-            </a:pPr>
-            <a:r>
-              <a:rPr lang="en-US" sz="1450" dirty="0">
-                <a:solidFill>
-                  <a:srgbClr val="141413"/>
-                </a:solidFill>
-                <a:latin typeface="Inter" pitchFamily="34" charset="0"/>
-                <a:ea typeface="Inter" pitchFamily="34" charset="-122"/>
-                <a:cs typeface="Inter" pitchFamily="34" charset="-120"/>
-              </a:rPr>
-              <a:t>Wire AI code review in Actions</a:t>
-            </a:r>
-            <a:endParaRPr lang="en-US" sz="1450" dirty="0"/>
-          </a:p>
-        </p:txBody>
-      </p:sp>
-      <p:sp>
-        <p:nvSpPr>
-          <p:cNvPr id="20" name="Shape 16"/>
-          <p:cNvSpPr/>
-          <p:nvPr/>
-        </p:nvSpPr>
-        <p:spPr>
-          <a:xfrm>
-            <a:off x="4069080" y="2569464"/>
-            <a:ext cx="329184" cy="329184"/>
-          </a:xfrm>
-          <a:prstGeom prst="ellipse">
-            <a:avLst/>
-          </a:prstGeom>
-          <a:solidFill>
-            <a:srgbClr val="F4E4DC"/>
-          </a:solidFill>
-          <a:ln/>
-        </p:spPr>
-      </p:sp>
-      <p:sp>
-        <p:nvSpPr>
-          <p:cNvPr id="21" name="Text 17"/>
-          <p:cNvSpPr/>
-          <p:nvPr/>
-        </p:nvSpPr>
-        <p:spPr>
-          <a:xfrm>
-            <a:off x="4069080" y="2569464"/>
-            <a:ext cx="329184" cy="329184"/>
-          </a:xfrm>
-          <a:prstGeom prst="rect">
-            <a:avLst/>
-          </a:prstGeom>
-          <a:noFill/>
-          <a:ln/>
-        </p:spPr>
-        <p:txBody>
-          <a:bodyPr wrap="square" lIns="0" tIns="0" rIns="0" bIns="0" rtlCol="0" anchor="ctr"/>
-          <a:lstStyle/>
-          <a:p>
-            <a:pPr algn="ctr" indent="0" marL="0">
-              <a:buNone/>
-            </a:pPr>
-            <a:r>
-              <a:rPr lang="en-US" sz="1400" b="1" dirty="0">
-                <a:solidFill>
-                  <a:srgbClr val="C25E40"/>
-                </a:solidFill>
-                <a:latin typeface="Inter" pitchFamily="34" charset="0"/>
-                <a:ea typeface="Inter" pitchFamily="34" charset="-122"/>
-                <a:cs typeface="Inter" pitchFamily="34" charset="-120"/>
-              </a:rPr>
-              <a:t>D</a:t>
-            </a:r>
-            <a:endParaRPr lang="en-US" sz="1400" dirty="0"/>
-          </a:p>
-        </p:txBody>
-      </p:sp>
-      <p:sp>
-        <p:nvSpPr>
-          <p:cNvPr id="22" name="Text 18"/>
-          <p:cNvSpPr/>
-          <p:nvPr/>
-        </p:nvSpPr>
-        <p:spPr>
-          <a:xfrm>
-            <a:off x="4526280" y="2560320"/>
-            <a:ext cx="4572000" cy="347472"/>
-          </a:xfrm>
-          <a:prstGeom prst="rect">
-            <a:avLst/>
-          </a:prstGeom>
-          <a:noFill/>
-          <a:ln/>
-        </p:spPr>
-        <p:txBody>
-          <a:bodyPr wrap="square" lIns="0" tIns="0" rIns="0" bIns="0" rtlCol="0" anchor="ctr"/>
-          <a:lstStyle/>
-          <a:p>
-            <a:pPr indent="0" marL="0">
-              <a:buNone/>
-            </a:pPr>
-            <a:r>
-              <a:rPr lang="en-US" sz="1450" dirty="0">
-                <a:solidFill>
-                  <a:srgbClr val="141413"/>
-                </a:solidFill>
-                <a:latin typeface="Inter" pitchFamily="34" charset="0"/>
-                <a:ea typeface="Inter" pitchFamily="34" charset="-122"/>
-                <a:cs typeface="Inter" pitchFamily="34" charset="-120"/>
-              </a:rPr>
-              <a:t>Add the release-notes job</a:t>
-            </a:r>
-            <a:endParaRPr lang="en-US" sz="1450" dirty="0"/>
-          </a:p>
-        </p:txBody>
-      </p:sp>
-      <p:sp>
-        <p:nvSpPr>
-          <p:cNvPr id="23" name="Shape 19"/>
-          <p:cNvSpPr/>
-          <p:nvPr/>
-        </p:nvSpPr>
-        <p:spPr>
-          <a:xfrm>
-            <a:off x="4069080" y="3127248"/>
-            <a:ext cx="4572000" cy="1051560"/>
+          <p:cNvPr id="3" name="Shape 0"/>
+          <p:cNvSpPr/>
+          <p:nvPr/>
+        </p:nvSpPr>
+        <p:spPr>
+          <a:xfrm>
+            <a:off x="548640" y="822960"/>
+            <a:ext cx="3154680" cy="3429000"/>
           </a:xfrm>
           <a:prstGeom prst="roundRect">
             <a:avLst>
-              <a:gd name="adj" fmla="val 6957"/>
+              <a:gd name="adj" fmla="val 3478"/>
             </a:avLst>
           </a:prstGeom>
           <a:solidFill>
-            <a:srgbClr val="F4E4DC"/>
-          </a:solidFill>
-          <a:ln/>
-        </p:spPr>
-      </p:sp>
-      <p:sp>
-        <p:nvSpPr>
-          <p:cNvPr id="24" name="Shape 20"/>
-          <p:cNvSpPr/>
-          <p:nvPr/>
-        </p:nvSpPr>
-        <p:spPr>
-          <a:xfrm>
-            <a:off x="4297680" y="3346704"/>
-            <a:ext cx="420624" cy="420624"/>
-          </a:xfrm>
-          <a:prstGeom prst="ellipse">
-            <a:avLst/>
-          </a:prstGeom>
-          <a:solidFill>
             <a:srgbClr val="D97757"/>
           </a:solidFill>
           <a:ln/>
-        </p:spPr>
+          <a:effectLst>
+            <a:outerShdw blurRad="88900" dist="38100" dir="5400000" algn="bl" rotWithShape="0">
+              <a:srgbClr val="000000">
+                <a:alpha val="10000"/>
+              </a:srgbClr>
+            </a:outerShdw>
+          </a:effectLst>
+        </p:spPr>
+        <p:txBody>
+          <a:bodyPr/>
+          <a:lstStyle/>
+          <a:p>
+            <a:endParaRPr lang="en-US"/>
+          </a:p>
+        </p:txBody>
       </p:sp>
       <p:pic>
         <p:nvPicPr>
-          <p:cNvPr id="25" name="Image 2" descr="preencoded.png">    </p:cNvPr>
+          <p:cNvPr id="4" name="Image 1" descr="preencoded.png"/>
           <p:cNvPicPr>
             <a:picLocks noChangeAspect="1"/>
           </p:cNvPicPr>
@@ -1840,6 +813,731 @@
         </p:blipFill>
         <p:spPr>
           <a:xfrm>
+            <a:off x="868680" y="1133856"/>
+            <a:ext cx="548640" cy="548640"/>
+          </a:xfrm>
+          <a:prstGeom prst="rect">
+            <a:avLst/>
+          </a:prstGeom>
+        </p:spPr>
+      </p:pic>
+      <p:sp>
+        <p:nvSpPr>
+          <p:cNvPr id="5" name="Text 1"/>
+          <p:cNvSpPr/>
+          <p:nvPr/>
+        </p:nvSpPr>
+        <p:spPr>
+          <a:xfrm>
+            <a:off x="868680" y="1755648"/>
+            <a:ext cx="2514600" cy="548640"/>
+          </a:xfrm>
+          <a:prstGeom prst="rect">
+            <a:avLst/>
+          </a:prstGeom>
+          <a:noFill/>
+          <a:ln/>
+        </p:spPr>
+        <p:txBody>
+          <a:bodyPr wrap="square" lIns="0" tIns="0" rIns="0" bIns="0" rtlCol="0" anchor="ctr"/>
+          <a:lstStyle/>
+          <a:p>
+            <a:pPr marL="0" indent="0">
+              <a:buNone/>
+            </a:pPr>
+            <a:r>
+              <a:rPr lang="en-US" sz="3800" b="1" dirty="0">
+                <a:solidFill>
+                  <a:srgbClr val="FFFFFF"/>
+                </a:solidFill>
+                <a:latin typeface="Georgia" pitchFamily="34" charset="0"/>
+                <a:ea typeface="Georgia" pitchFamily="34" charset="-122"/>
+                <a:cs typeface="Georgia" pitchFamily="34" charset="-120"/>
+              </a:rPr>
+              <a:t>LAB 5</a:t>
+            </a:r>
+            <a:endParaRPr lang="en-US" sz="3800" dirty="0"/>
+          </a:p>
+        </p:txBody>
+      </p:sp>
+      <p:sp>
+        <p:nvSpPr>
+          <p:cNvPr id="6" name="Text 2"/>
+          <p:cNvSpPr/>
+          <p:nvPr/>
+        </p:nvSpPr>
+        <p:spPr>
+          <a:xfrm>
+            <a:off x="868680" y="2340864"/>
+            <a:ext cx="2514600" cy="320040"/>
+          </a:xfrm>
+          <a:prstGeom prst="rect">
+            <a:avLst/>
+          </a:prstGeom>
+          <a:noFill/>
+          <a:ln/>
+        </p:spPr>
+        <p:txBody>
+          <a:bodyPr wrap="square" lIns="0" tIns="0" rIns="0" bIns="0" rtlCol="0" anchor="ctr"/>
+          <a:lstStyle/>
+          <a:p>
+            <a:pPr marL="0" indent="0">
+              <a:buNone/>
+            </a:pPr>
+            <a:r>
+              <a:rPr lang="en-US" sz="1400" dirty="0">
+                <a:solidFill>
+                  <a:srgbClr val="FBE9E2"/>
+                </a:solidFill>
+                <a:latin typeface="Inter" pitchFamily="34" charset="0"/>
+                <a:ea typeface="Inter" pitchFamily="34" charset="-122"/>
+                <a:cs typeface="Inter" pitchFamily="34" charset="-120"/>
+              </a:rPr>
+              <a:t>25 min  ·  hands-on</a:t>
+            </a:r>
+            <a:endParaRPr lang="en-US" sz="1400" dirty="0"/>
+          </a:p>
+        </p:txBody>
+      </p:sp>
+      <p:sp>
+        <p:nvSpPr>
+          <p:cNvPr id="7" name="Shape 3"/>
+          <p:cNvSpPr/>
+          <p:nvPr/>
+        </p:nvSpPr>
+        <p:spPr>
+          <a:xfrm>
+            <a:off x="886968" y="2724912"/>
+            <a:ext cx="1691640" cy="0"/>
+          </a:xfrm>
+          <a:prstGeom prst="line">
+            <a:avLst/>
+          </a:prstGeom>
+          <a:noFill/>
+          <a:ln w="19050">
+            <a:solidFill>
+              <a:srgbClr val="F2C9BC"/>
+            </a:solidFill>
+            <a:prstDash val="solid"/>
+          </a:ln>
+        </p:spPr>
+        <p:txBody>
+          <a:bodyPr/>
+          <a:lstStyle/>
+          <a:p>
+            <a:endParaRPr lang="en-US"/>
+          </a:p>
+        </p:txBody>
+      </p:sp>
+      <p:sp>
+        <p:nvSpPr>
+          <p:cNvPr id="8" name="Text 4"/>
+          <p:cNvSpPr/>
+          <p:nvPr/>
+        </p:nvSpPr>
+        <p:spPr>
+          <a:xfrm>
+            <a:off x="868680" y="2852928"/>
+            <a:ext cx="2514600" cy="228600"/>
+          </a:xfrm>
+          <a:prstGeom prst="rect">
+            <a:avLst/>
+          </a:prstGeom>
+          <a:noFill/>
+          <a:ln/>
+        </p:spPr>
+        <p:txBody>
+          <a:bodyPr wrap="square" lIns="0" tIns="0" rIns="0" bIns="0" rtlCol="0" anchor="ctr"/>
+          <a:lstStyle/>
+          <a:p>
+            <a:pPr marL="0" indent="0">
+              <a:buNone/>
+            </a:pPr>
+            <a:r>
+              <a:rPr lang="en-US" sz="1100" b="1" kern="0" spc="100" dirty="0">
+                <a:solidFill>
+                  <a:srgbClr val="FBE9E2"/>
+                </a:solidFill>
+                <a:latin typeface="Inter" pitchFamily="34" charset="0"/>
+                <a:ea typeface="Inter" pitchFamily="34" charset="-122"/>
+                <a:cs typeface="Inter" pitchFamily="34" charset="-120"/>
+              </a:rPr>
+              <a:t>DELIVERABLE</a:t>
+            </a:r>
+            <a:endParaRPr lang="en-US" sz="1100" dirty="0"/>
+          </a:p>
+        </p:txBody>
+      </p:sp>
+      <p:sp>
+        <p:nvSpPr>
+          <p:cNvPr id="9" name="Text 5"/>
+          <p:cNvSpPr/>
+          <p:nvPr/>
+        </p:nvSpPr>
+        <p:spPr>
+          <a:xfrm>
+            <a:off x="868680" y="3090672"/>
+            <a:ext cx="2606040" cy="1005840"/>
+          </a:xfrm>
+          <a:prstGeom prst="rect">
+            <a:avLst/>
+          </a:prstGeom>
+          <a:noFill/>
+          <a:ln/>
+        </p:spPr>
+        <p:txBody>
+          <a:bodyPr wrap="square" lIns="0" tIns="0" rIns="0" bIns="0" rtlCol="0" anchor="ctr"/>
+          <a:lstStyle/>
+          <a:p>
+            <a:pPr marL="0" indent="0">
+              <a:buNone/>
+            </a:pPr>
+            <a:r>
+              <a:rPr lang="en-US" sz="1300" b="1" dirty="0">
+                <a:solidFill>
+                  <a:srgbClr val="FFFFFF"/>
+                </a:solidFill>
+                <a:latin typeface="Inter" pitchFamily="34" charset="0"/>
+                <a:ea typeface="Inter" pitchFamily="34" charset="-122"/>
+                <a:cs typeface="Inter" pitchFamily="34" charset="-120"/>
+              </a:rPr>
+              <a:t>AI tests passing + Actions AI review + release-notes job, committed</a:t>
+            </a:r>
+            <a:endParaRPr lang="en-US" sz="1300" dirty="0"/>
+          </a:p>
+        </p:txBody>
+      </p:sp>
+      <p:sp>
+        <p:nvSpPr>
+          <p:cNvPr id="10" name="Text 6"/>
+          <p:cNvSpPr/>
+          <p:nvPr/>
+        </p:nvSpPr>
+        <p:spPr>
+          <a:xfrm>
+            <a:off x="4069080" y="841248"/>
+            <a:ext cx="4572000" cy="274320"/>
+          </a:xfrm>
+          <a:prstGeom prst="rect">
+            <a:avLst/>
+          </a:prstGeom>
+          <a:noFill/>
+          <a:ln/>
+        </p:spPr>
+        <p:txBody>
+          <a:bodyPr wrap="square" lIns="0" tIns="0" rIns="0" bIns="0" rtlCol="0" anchor="ctr"/>
+          <a:lstStyle/>
+          <a:p>
+            <a:pPr marL="0" indent="0">
+              <a:buNone/>
+            </a:pPr>
+            <a:r>
+              <a:rPr lang="en-US" sz="1100" b="1" kern="0" spc="200" dirty="0">
+                <a:solidFill>
+                  <a:srgbClr val="C25E40"/>
+                </a:solidFill>
+                <a:latin typeface="Inter" pitchFamily="34" charset="0"/>
+                <a:ea typeface="Inter" pitchFamily="34" charset="-122"/>
+                <a:cs typeface="Inter" pitchFamily="34" charset="-120"/>
+              </a:rPr>
+              <a:t>FOUR PARTS</a:t>
+            </a:r>
+            <a:endParaRPr lang="en-US" sz="1100" dirty="0"/>
+          </a:p>
+        </p:txBody>
+      </p:sp>
+      <p:sp>
+        <p:nvSpPr>
+          <p:cNvPr id="11" name="Shape 7"/>
+          <p:cNvSpPr/>
+          <p:nvPr/>
+        </p:nvSpPr>
+        <p:spPr>
+          <a:xfrm>
+            <a:off x="4069080" y="1197864"/>
+            <a:ext cx="329184" cy="329184"/>
+          </a:xfrm>
+          <a:prstGeom prst="ellipse">
+            <a:avLst/>
+          </a:prstGeom>
+          <a:solidFill>
+            <a:srgbClr val="F4E4DC"/>
+          </a:solidFill>
+          <a:ln/>
+        </p:spPr>
+        <p:txBody>
+          <a:bodyPr/>
+          <a:lstStyle/>
+          <a:p>
+            <a:endParaRPr lang="en-US"/>
+          </a:p>
+        </p:txBody>
+      </p:sp>
+      <p:sp>
+        <p:nvSpPr>
+          <p:cNvPr id="12" name="Text 8"/>
+          <p:cNvSpPr/>
+          <p:nvPr/>
+        </p:nvSpPr>
+        <p:spPr>
+          <a:xfrm>
+            <a:off x="4069080" y="1197864"/>
+            <a:ext cx="329184" cy="329184"/>
+          </a:xfrm>
+          <a:prstGeom prst="rect">
+            <a:avLst/>
+          </a:prstGeom>
+          <a:noFill/>
+          <a:ln/>
+        </p:spPr>
+        <p:txBody>
+          <a:bodyPr wrap="square" lIns="0" tIns="0" rIns="0" bIns="0" rtlCol="0" anchor="ctr"/>
+          <a:lstStyle/>
+          <a:p>
+            <a:pPr marL="0" indent="0" algn="ctr">
+              <a:buNone/>
+            </a:pPr>
+            <a:r>
+              <a:rPr lang="en-US" sz="1400" b="1" dirty="0">
+                <a:solidFill>
+                  <a:srgbClr val="C25E40"/>
+                </a:solidFill>
+                <a:latin typeface="Inter" pitchFamily="34" charset="0"/>
+                <a:ea typeface="Inter" pitchFamily="34" charset="-122"/>
+                <a:cs typeface="Inter" pitchFamily="34" charset="-120"/>
+              </a:rPr>
+              <a:t>A</a:t>
+            </a:r>
+            <a:endParaRPr lang="en-US" sz="1400" dirty="0"/>
+          </a:p>
+        </p:txBody>
+      </p:sp>
+      <p:sp>
+        <p:nvSpPr>
+          <p:cNvPr id="13" name="Text 9"/>
+          <p:cNvSpPr/>
+          <p:nvPr/>
+        </p:nvSpPr>
+        <p:spPr>
+          <a:xfrm>
+            <a:off x="4526280" y="1188720"/>
+            <a:ext cx="4572000" cy="347472"/>
+          </a:xfrm>
+          <a:prstGeom prst="rect">
+            <a:avLst/>
+          </a:prstGeom>
+          <a:noFill/>
+          <a:ln/>
+        </p:spPr>
+        <p:txBody>
+          <a:bodyPr wrap="square" lIns="0" tIns="0" rIns="0" bIns="0" rtlCol="0" anchor="ctr"/>
+          <a:lstStyle/>
+          <a:p>
+            <a:pPr marL="0" indent="0">
+              <a:buNone/>
+            </a:pPr>
+            <a:r>
+              <a:rPr lang="en-US" sz="1450" dirty="0">
+                <a:solidFill>
+                  <a:srgbClr val="141413"/>
+                </a:solidFill>
+                <a:latin typeface="Inter" pitchFamily="34" charset="0"/>
+                <a:ea typeface="Inter" pitchFamily="34" charset="-122"/>
+                <a:cs typeface="Inter" pitchFamily="34" charset="-120"/>
+              </a:rPr>
+              <a:t>Generate the xUnit test suite</a:t>
+            </a:r>
+            <a:endParaRPr lang="en-US" sz="1450" dirty="0"/>
+          </a:p>
+        </p:txBody>
+      </p:sp>
+      <p:sp>
+        <p:nvSpPr>
+          <p:cNvPr id="14" name="Shape 10"/>
+          <p:cNvSpPr/>
+          <p:nvPr/>
+        </p:nvSpPr>
+        <p:spPr>
+          <a:xfrm>
+            <a:off x="4069080" y="1655064"/>
+            <a:ext cx="329184" cy="329184"/>
+          </a:xfrm>
+          <a:prstGeom prst="ellipse">
+            <a:avLst/>
+          </a:prstGeom>
+          <a:solidFill>
+            <a:srgbClr val="F4E4DC"/>
+          </a:solidFill>
+          <a:ln/>
+        </p:spPr>
+        <p:txBody>
+          <a:bodyPr/>
+          <a:lstStyle/>
+          <a:p>
+            <a:endParaRPr lang="en-US"/>
+          </a:p>
+        </p:txBody>
+      </p:sp>
+      <p:sp>
+        <p:nvSpPr>
+          <p:cNvPr id="15" name="Text 11"/>
+          <p:cNvSpPr/>
+          <p:nvPr/>
+        </p:nvSpPr>
+        <p:spPr>
+          <a:xfrm>
+            <a:off x="4069080" y="1655064"/>
+            <a:ext cx="329184" cy="329184"/>
+          </a:xfrm>
+          <a:prstGeom prst="rect">
+            <a:avLst/>
+          </a:prstGeom>
+          <a:noFill/>
+          <a:ln/>
+        </p:spPr>
+        <p:txBody>
+          <a:bodyPr wrap="square" lIns="0" tIns="0" rIns="0" bIns="0" rtlCol="0" anchor="ctr"/>
+          <a:lstStyle/>
+          <a:p>
+            <a:pPr marL="0" indent="0" algn="ctr">
+              <a:buNone/>
+            </a:pPr>
+            <a:r>
+              <a:rPr lang="en-US" sz="1400" b="1" dirty="0">
+                <a:solidFill>
+                  <a:srgbClr val="C25E40"/>
+                </a:solidFill>
+                <a:latin typeface="Inter" pitchFamily="34" charset="0"/>
+                <a:ea typeface="Inter" pitchFamily="34" charset="-122"/>
+                <a:cs typeface="Inter" pitchFamily="34" charset="-120"/>
+              </a:rPr>
+              <a:t>B</a:t>
+            </a:r>
+            <a:endParaRPr lang="en-US" sz="1400" dirty="0"/>
+          </a:p>
+        </p:txBody>
+      </p:sp>
+      <p:sp>
+        <p:nvSpPr>
+          <p:cNvPr id="16" name="Text 12"/>
+          <p:cNvSpPr/>
+          <p:nvPr/>
+        </p:nvSpPr>
+        <p:spPr>
+          <a:xfrm>
+            <a:off x="4526280" y="1645920"/>
+            <a:ext cx="4572000" cy="347472"/>
+          </a:xfrm>
+          <a:prstGeom prst="rect">
+            <a:avLst/>
+          </a:prstGeom>
+          <a:noFill/>
+          <a:ln/>
+        </p:spPr>
+        <p:txBody>
+          <a:bodyPr wrap="square" lIns="0" tIns="0" rIns="0" bIns="0" rtlCol="0" anchor="ctr"/>
+          <a:lstStyle/>
+          <a:p>
+            <a:pPr marL="0" indent="0">
+              <a:buNone/>
+            </a:pPr>
+            <a:r>
+              <a:rPr lang="en-US" sz="1450" dirty="0">
+                <a:solidFill>
+                  <a:srgbClr val="141413"/>
+                </a:solidFill>
+                <a:latin typeface="Inter" pitchFamily="34" charset="0"/>
+                <a:ea typeface="Inter" pitchFamily="34" charset="-122"/>
+                <a:cs typeface="Inter" pitchFamily="34" charset="-120"/>
+              </a:rPr>
+              <a:t>TestContainers test (stretch)</a:t>
+            </a:r>
+            <a:endParaRPr lang="en-US" sz="1450" dirty="0"/>
+          </a:p>
+        </p:txBody>
+      </p:sp>
+      <p:sp>
+        <p:nvSpPr>
+          <p:cNvPr id="17" name="Shape 13"/>
+          <p:cNvSpPr/>
+          <p:nvPr/>
+        </p:nvSpPr>
+        <p:spPr>
+          <a:xfrm>
+            <a:off x="4069080" y="2112264"/>
+            <a:ext cx="329184" cy="329184"/>
+          </a:xfrm>
+          <a:prstGeom prst="ellipse">
+            <a:avLst/>
+          </a:prstGeom>
+          <a:solidFill>
+            <a:srgbClr val="F4E4DC"/>
+          </a:solidFill>
+          <a:ln/>
+        </p:spPr>
+        <p:txBody>
+          <a:bodyPr/>
+          <a:lstStyle/>
+          <a:p>
+            <a:endParaRPr lang="en-US"/>
+          </a:p>
+        </p:txBody>
+      </p:sp>
+      <p:sp>
+        <p:nvSpPr>
+          <p:cNvPr id="18" name="Text 14"/>
+          <p:cNvSpPr/>
+          <p:nvPr/>
+        </p:nvSpPr>
+        <p:spPr>
+          <a:xfrm>
+            <a:off x="4069080" y="2112264"/>
+            <a:ext cx="329184" cy="329184"/>
+          </a:xfrm>
+          <a:prstGeom prst="rect">
+            <a:avLst/>
+          </a:prstGeom>
+          <a:noFill/>
+          <a:ln/>
+        </p:spPr>
+        <p:txBody>
+          <a:bodyPr wrap="square" lIns="0" tIns="0" rIns="0" bIns="0" rtlCol="0" anchor="ctr"/>
+          <a:lstStyle/>
+          <a:p>
+            <a:pPr marL="0" indent="0" algn="ctr">
+              <a:buNone/>
+            </a:pPr>
+            <a:r>
+              <a:rPr lang="en-US" sz="1400" b="1" dirty="0">
+                <a:solidFill>
+                  <a:srgbClr val="C25E40"/>
+                </a:solidFill>
+                <a:latin typeface="Inter" pitchFamily="34" charset="0"/>
+                <a:ea typeface="Inter" pitchFamily="34" charset="-122"/>
+                <a:cs typeface="Inter" pitchFamily="34" charset="-120"/>
+              </a:rPr>
+              <a:t>C</a:t>
+            </a:r>
+            <a:endParaRPr lang="en-US" sz="1400" dirty="0"/>
+          </a:p>
+        </p:txBody>
+      </p:sp>
+      <p:sp>
+        <p:nvSpPr>
+          <p:cNvPr id="19" name="Text 15"/>
+          <p:cNvSpPr/>
+          <p:nvPr/>
+        </p:nvSpPr>
+        <p:spPr>
+          <a:xfrm>
+            <a:off x="4526280" y="2103120"/>
+            <a:ext cx="4572000" cy="347472"/>
+          </a:xfrm>
+          <a:prstGeom prst="rect">
+            <a:avLst/>
+          </a:prstGeom>
+          <a:noFill/>
+          <a:ln/>
+        </p:spPr>
+        <p:txBody>
+          <a:bodyPr wrap="square" lIns="0" tIns="0" rIns="0" bIns="0" rtlCol="0" anchor="ctr"/>
+          <a:lstStyle/>
+          <a:p>
+            <a:pPr marL="0" indent="0">
+              <a:buNone/>
+            </a:pPr>
+            <a:r>
+              <a:rPr lang="en-US" sz="1450" dirty="0">
+                <a:solidFill>
+                  <a:srgbClr val="141413"/>
+                </a:solidFill>
+                <a:latin typeface="Inter" pitchFamily="34" charset="0"/>
+                <a:ea typeface="Inter" pitchFamily="34" charset="-122"/>
+                <a:cs typeface="Inter" pitchFamily="34" charset="-120"/>
+              </a:rPr>
+              <a:t>Wire AI code review in Actions</a:t>
+            </a:r>
+            <a:endParaRPr lang="en-US" sz="1450" dirty="0"/>
+          </a:p>
+        </p:txBody>
+      </p:sp>
+      <p:sp>
+        <p:nvSpPr>
+          <p:cNvPr id="20" name="Shape 16"/>
+          <p:cNvSpPr/>
+          <p:nvPr/>
+        </p:nvSpPr>
+        <p:spPr>
+          <a:xfrm>
+            <a:off x="4069080" y="2569464"/>
+            <a:ext cx="329184" cy="329184"/>
+          </a:xfrm>
+          <a:prstGeom prst="ellipse">
+            <a:avLst/>
+          </a:prstGeom>
+          <a:solidFill>
+            <a:srgbClr val="F4E4DC"/>
+          </a:solidFill>
+          <a:ln/>
+        </p:spPr>
+        <p:txBody>
+          <a:bodyPr/>
+          <a:lstStyle/>
+          <a:p>
+            <a:endParaRPr lang="en-US"/>
+          </a:p>
+        </p:txBody>
+      </p:sp>
+      <p:sp>
+        <p:nvSpPr>
+          <p:cNvPr id="21" name="Text 17"/>
+          <p:cNvSpPr/>
+          <p:nvPr/>
+        </p:nvSpPr>
+        <p:spPr>
+          <a:xfrm>
+            <a:off x="4069080" y="2569464"/>
+            <a:ext cx="329184" cy="329184"/>
+          </a:xfrm>
+          <a:prstGeom prst="rect">
+            <a:avLst/>
+          </a:prstGeom>
+          <a:noFill/>
+          <a:ln/>
+        </p:spPr>
+        <p:txBody>
+          <a:bodyPr wrap="square" lIns="0" tIns="0" rIns="0" bIns="0" rtlCol="0" anchor="ctr"/>
+          <a:lstStyle/>
+          <a:p>
+            <a:pPr marL="0" indent="0" algn="ctr">
+              <a:buNone/>
+            </a:pPr>
+            <a:r>
+              <a:rPr lang="en-US" sz="1400" b="1" dirty="0">
+                <a:solidFill>
+                  <a:srgbClr val="C25E40"/>
+                </a:solidFill>
+                <a:latin typeface="Inter" pitchFamily="34" charset="0"/>
+                <a:ea typeface="Inter" pitchFamily="34" charset="-122"/>
+                <a:cs typeface="Inter" pitchFamily="34" charset="-120"/>
+              </a:rPr>
+              <a:t>D</a:t>
+            </a:r>
+            <a:endParaRPr lang="en-US" sz="1400" dirty="0"/>
+          </a:p>
+        </p:txBody>
+      </p:sp>
+      <p:sp>
+        <p:nvSpPr>
+          <p:cNvPr id="22" name="Text 18"/>
+          <p:cNvSpPr/>
+          <p:nvPr/>
+        </p:nvSpPr>
+        <p:spPr>
+          <a:xfrm>
+            <a:off x="4526280" y="2560320"/>
+            <a:ext cx="4572000" cy="347472"/>
+          </a:xfrm>
+          <a:prstGeom prst="rect">
+            <a:avLst/>
+          </a:prstGeom>
+          <a:noFill/>
+          <a:ln/>
+        </p:spPr>
+        <p:txBody>
+          <a:bodyPr wrap="square" lIns="0" tIns="0" rIns="0" bIns="0" rtlCol="0" anchor="ctr"/>
+          <a:lstStyle/>
+          <a:p>
+            <a:pPr marL="0" indent="0">
+              <a:buNone/>
+            </a:pPr>
+            <a:r>
+              <a:rPr lang="en-US" sz="1450" dirty="0">
+                <a:solidFill>
+                  <a:srgbClr val="141413"/>
+                </a:solidFill>
+                <a:latin typeface="Inter" pitchFamily="34" charset="0"/>
+                <a:ea typeface="Inter" pitchFamily="34" charset="-122"/>
+                <a:cs typeface="Inter" pitchFamily="34" charset="-120"/>
+              </a:rPr>
+              <a:t>Add the release-notes job</a:t>
+            </a:r>
+            <a:endParaRPr lang="en-US" sz="1450" dirty="0"/>
+          </a:p>
+        </p:txBody>
+      </p:sp>
+      <p:sp>
+        <p:nvSpPr>
+          <p:cNvPr id="23" name="Shape 19"/>
+          <p:cNvSpPr/>
+          <p:nvPr/>
+        </p:nvSpPr>
+        <p:spPr>
+          <a:xfrm>
+            <a:off x="4069080" y="3127248"/>
+            <a:ext cx="4572000" cy="1051560"/>
+          </a:xfrm>
+          <a:prstGeom prst="roundRect">
+            <a:avLst>
+              <a:gd name="adj" fmla="val 6957"/>
+            </a:avLst>
+          </a:prstGeom>
+          <a:solidFill>
+            <a:srgbClr val="F4E4DC"/>
+          </a:solidFill>
+          <a:ln/>
+        </p:spPr>
+        <p:txBody>
+          <a:bodyPr/>
+          <a:lstStyle/>
+          <a:p>
+            <a:endParaRPr lang="en-US"/>
+          </a:p>
+        </p:txBody>
+      </p:sp>
+      <p:sp>
+        <p:nvSpPr>
+          <p:cNvPr id="24" name="Shape 20"/>
+          <p:cNvSpPr/>
+          <p:nvPr/>
+        </p:nvSpPr>
+        <p:spPr>
+          <a:xfrm>
+            <a:off x="4297680" y="3346704"/>
+            <a:ext cx="420624" cy="420624"/>
+          </a:xfrm>
+          <a:prstGeom prst="ellipse">
+            <a:avLst/>
+          </a:prstGeom>
+          <a:solidFill>
+            <a:srgbClr val="D97757"/>
+          </a:solidFill>
+          <a:ln/>
+        </p:spPr>
+        <p:txBody>
+          <a:bodyPr/>
+          <a:lstStyle/>
+          <a:p>
+            <a:endParaRPr lang="en-US"/>
+          </a:p>
+        </p:txBody>
+      </p:sp>
+      <p:pic>
+        <p:nvPicPr>
+          <p:cNvPr id="25" name="Image 2" descr="preencoded.png"/>
+          <p:cNvPicPr>
+            <a:picLocks noChangeAspect="1"/>
+          </p:cNvPicPr>
+          <p:nvPr/>
+        </p:nvPicPr>
+        <p:blipFill>
+          <a:blip r:embed="rId4"/>
+          <a:stretch>
+            <a:fillRect/>
+          </a:stretch>
+        </p:blipFill>
+        <p:spPr>
+          <a:xfrm>
             <a:off x="4407042" y="3456066"/>
             <a:ext cx="201900" cy="201900"/>
           </a:xfrm>
@@ -1869,7 +1567,7 @@
           <a:bodyPr wrap="square" lIns="0" tIns="0" rIns="0" bIns="0" rtlCol="0" anchor="ctr"/>
           <a:lstStyle/>
           <a:p>
-            <a:pPr indent="0" marL="0">
+            <a:pPr marL="0" indent="0">
               <a:buNone/>
             </a:pPr>
             <a:r>
@@ -1883,13 +1581,10 @@
               </a:rPr>
               <a:t>Full checkpoint on the next slide</a:t>
             </a:r>
-            <a:pPr indent="0" marL="0">
-              <a:buNone/>
-            </a:pPr>
             <a:endParaRPr lang="en-US" sz="1300" dirty="0"/>
           </a:p>
           <a:p>
-            <a:pPr indent="0" marL="0">
+            <a:pPr marL="0" indent="0">
               <a:buNone/>
             </a:pPr>
             <a:r>
@@ -1928,7 +1623,7 @@
           <a:bodyPr wrap="square" rtlCol="0" anchor="ctr"/>
           <a:lstStyle/>
           <a:p>
-            <a:pPr indent="0" marL="0">
+            <a:pPr marL="0" indent="0">
               <a:buNone/>
             </a:pPr>
             <a:r>
@@ -1967,7 +1662,7 @@
           <a:bodyPr wrap="square" rtlCol="0" anchor="ctr"/>
           <a:lstStyle/>
           <a:p>
-            <a:pPr algn="r" indent="0" marL="0">
+            <a:pPr marL="0" indent="0" algn="r">
               <a:buNone/>
             </a:pPr>
             <a:r>
@@ -1982,45 +1677,6 @@
               <a:t>Day 2 · Section 5  ·  10/11</a:t>
             </a:r>
             <a:endParaRPr lang="en-US" sz="900" dirty="0"/>
-          </a:p>
-        </p:txBody>
-      </p:sp>
-      <p:sp>
-        <p:nvSpPr>
-          <p:cNvPr id="29" name="Text 24"/>
-          <p:cNvSpPr/>
-          <p:nvPr/>
-        </p:nvSpPr>
-        <p:spPr>
-          <a:xfrm>
-            <a:off x="548640" y="4462272"/>
-            <a:ext cx="8046720" cy="274320"/>
-          </a:xfrm>
-          <a:prstGeom prst="rect">
-            <a:avLst/>
-          </a:prstGeom>
-          <a:noFill/>
-          <a:ln/>
-        </p:spPr>
-        <p:txBody>
-          <a:bodyPr wrap="square" lIns="0" tIns="0" rIns="0" bIns="0" rtlCol="0" anchor="ctr"/>
-          <a:lstStyle/>
-          <a:p>
-            <a:pPr indent="0" marL="0">
-              <a:buNone/>
-            </a:pPr>
-            <a:r>
-              <a:rPr lang="en-US" sz="1000" i="1" dirty="0">
-                <a:solidFill>
-                  <a:srgbClr val="615C52"/>
-                </a:solidFill>
-                <a:latin typeface="Inter" pitchFamily="34" charset="0"/>
-                <a:ea typeface="Inter" pitchFamily="34" charset="-122"/>
-                <a:cs typeface="Inter" pitchFamily="34" charset="-120"/>
-              </a:rPr>
-              <a:t>▸ Four parts — C and D are the CI pieces; B is the optional stretch.</a:t>
-            </a:r>
-            <a:endParaRPr lang="en-US" sz="1000" dirty="0"/>
           </a:p>
         </p:txBody>
       </p:sp>
@@ -2040,6 +1696,7 @@
         <a:solidFill>
           <a:srgbClr val="F0EEE6"/>
         </a:solidFill>
+        <a:effectLst/>
       </p:bgPr>
     </p:bg>
     <p:spTree>
@@ -2077,11 +1734,11 @@
           <a:bodyPr wrap="square" lIns="0" tIns="0" rIns="0" bIns="0" rtlCol="0" anchor="ctr"/>
           <a:lstStyle/>
           <a:p>
-            <a:pPr indent="0" marL="0">
-              <a:buNone/>
-            </a:pPr>
-            <a:r>
-              <a:rPr lang="en-US" sz="1100" b="1" spc="200" kern="0" dirty="0">
+            <a:pPr marL="0" indent="0">
+              <a:buNone/>
+            </a:pPr>
+            <a:r>
+              <a:rPr lang="en-US" sz="1100" b="1" kern="0" spc="200" dirty="0">
                 <a:solidFill>
                   <a:srgbClr val="C25E40"/>
                 </a:solidFill>
@@ -2116,7 +1773,7 @@
           <a:bodyPr wrap="square" lIns="0" tIns="0" rIns="0" bIns="0" rtlCol="0" anchor="ctr"/>
           <a:lstStyle/>
           <a:p>
-            <a:pPr indent="0" marL="0">
+            <a:pPr marL="0" indent="0">
               <a:buNone/>
             </a:pPr>
             <a:r>
@@ -2136,78 +1793,7 @@
       </p:sp>
       <p:pic>
         <p:nvPicPr>
-          <p:cNvPr id="4" name="Image 0" descr="preencoded.png">    </p:cNvPr>
-          <p:cNvPicPr>
-            <a:picLocks noChangeAspect="1"/>
-          </p:cNvPicPr>
-          <p:nvPr/>
-        </p:nvPicPr>
-        <p:blipFill>
-          <a:blip r:embed="rId1"/>
-          <a:stretch>
-            <a:fillRect/>
-          </a:stretch>
-        </p:blipFill>
-        <p:spPr>
-          <a:xfrm>
-            <a:off x="8321040" y="411480"/>
-            <a:ext cx="347472" cy="292608"/>
-          </a:xfrm>
-          <a:prstGeom prst="rect">
-            <a:avLst/>
-          </a:prstGeom>
-        </p:spPr>
-      </p:pic>
-      <p:sp>
-        <p:nvSpPr>
-          <p:cNvPr id="5" name="Shape 2"/>
-          <p:cNvSpPr/>
-          <p:nvPr/>
-        </p:nvSpPr>
-        <p:spPr>
-          <a:xfrm>
-            <a:off x="548640" y="1371600"/>
-            <a:ext cx="8046720" cy="548640"/>
-          </a:xfrm>
-          <a:prstGeom prst="roundRect">
-            <a:avLst>
-              <a:gd name="adj" fmla="val 11667"/>
-            </a:avLst>
-          </a:prstGeom>
-          <a:solidFill>
-            <a:srgbClr val="FBFAF6"/>
-          </a:solidFill>
-          <a:ln w="12700">
-            <a:solidFill>
-              <a:srgbClr val="D8D3C6"/>
-            </a:solidFill>
-            <a:prstDash val="solid"/>
-          </a:ln>
-        </p:spPr>
-      </p:sp>
-      <p:sp>
-        <p:nvSpPr>
-          <p:cNvPr id="6" name="Shape 3"/>
-          <p:cNvSpPr/>
-          <p:nvPr/>
-        </p:nvSpPr>
-        <p:spPr>
-          <a:xfrm>
-            <a:off x="713232" y="1444752"/>
-            <a:ext cx="402336" cy="402336"/>
-          </a:xfrm>
-          <a:prstGeom prst="ellipse">
-            <a:avLst/>
-          </a:prstGeom>
-          <a:solidFill>
-            <a:srgbClr val="D97757"/>
-          </a:solidFill>
-          <a:ln/>
-        </p:spPr>
-      </p:sp>
-      <p:pic>
-        <p:nvPicPr>
-          <p:cNvPr id="7" name="Image 1" descr="preencoded.png">    </p:cNvPr>
+          <p:cNvPr id="4" name="Image 0" descr="preencoded.png"/>
           <p:cNvPicPr>
             <a:picLocks noChangeAspect="1"/>
           </p:cNvPicPr>
@@ -2221,8 +1807,8 @@
         </p:blipFill>
         <p:spPr>
           <a:xfrm>
-            <a:off x="817839" y="1549359"/>
-            <a:ext cx="193121" cy="193121"/>
+            <a:off x="8321040" y="411480"/>
+            <a:ext cx="347472" cy="292608"/>
           </a:xfrm>
           <a:prstGeom prst="rect">
             <a:avLst/>
@@ -2231,91 +1817,13 @@
       </p:pic>
       <p:sp>
         <p:nvSpPr>
-          <p:cNvPr id="8" name="Text 4"/>
-          <p:cNvSpPr/>
-          <p:nvPr/>
-        </p:nvSpPr>
-        <p:spPr>
-          <a:xfrm>
-            <a:off x="1325880" y="1371600"/>
-            <a:ext cx="3931920" cy="548640"/>
-          </a:xfrm>
-          <a:prstGeom prst="rect">
-            <a:avLst/>
-          </a:prstGeom>
-          <a:noFill/>
-          <a:ln/>
-        </p:spPr>
-        <p:txBody>
-          <a:bodyPr wrap="square" lIns="0" tIns="0" rIns="0" bIns="0" rtlCol="0" anchor="ctr"/>
-          <a:lstStyle/>
-          <a:p>
-            <a:pPr indent="0" marL="0">
-              <a:buNone/>
-            </a:pPr>
-            <a:r>
-              <a:rPr lang="en-US" sz="1450" b="1" dirty="0">
-                <a:solidFill>
-                  <a:srgbClr val="141413"/>
-                </a:solidFill>
-                <a:latin typeface="Inter" pitchFamily="34" charset="0"/>
-                <a:ea typeface="Inter" pitchFamily="34" charset="-122"/>
-                <a:cs typeface="Inter" pitchFamily="34" charset="-120"/>
-              </a:rPr>
-              <a:t>Tests pass</a:t>
-            </a:r>
-            <a:endParaRPr lang="en-US" sz="1450" dirty="0"/>
-          </a:p>
-        </p:txBody>
-      </p:sp>
-      <p:sp>
-        <p:nvSpPr>
-          <p:cNvPr id="9" name="Text 5"/>
-          <p:cNvSpPr/>
-          <p:nvPr/>
-        </p:nvSpPr>
-        <p:spPr>
-          <a:xfrm>
-            <a:off x="5303520" y="1371600"/>
-            <a:ext cx="3108960" cy="548640"/>
-          </a:xfrm>
-          <a:prstGeom prst="rect">
-            <a:avLst/>
-          </a:prstGeom>
-          <a:noFill/>
-          <a:ln/>
-        </p:spPr>
-        <p:txBody>
-          <a:bodyPr wrap="square" lIns="0" tIns="0" rIns="0" bIns="0" rtlCol="0" anchor="ctr"/>
-          <a:lstStyle/>
-          <a:p>
-            <a:pPr indent="0" marL="0">
-              <a:buNone/>
-            </a:pPr>
-            <a:r>
-              <a:rPr lang="en-US" sz="1200" dirty="0">
-                <a:solidFill>
-                  <a:srgbClr val="615C52"/>
-                </a:solidFill>
-                <a:latin typeface="Inter" pitchFamily="34" charset="0"/>
-                <a:ea typeface="Inter" pitchFamily="34" charset="-122"/>
-                <a:cs typeface="Inter" pitchFamily="34" charset="-120"/>
-              </a:rPr>
-              <a:t>The generated xUnit suite is green</a:t>
-            </a:r>
-            <a:endParaRPr lang="en-US" sz="1200" dirty="0"/>
-          </a:p>
-        </p:txBody>
-      </p:sp>
-      <p:sp>
-        <p:nvSpPr>
-          <p:cNvPr id="10" name="Shape 6"/>
-          <p:cNvSpPr/>
-          <p:nvPr/>
-        </p:nvSpPr>
-        <p:spPr>
-          <a:xfrm>
-            <a:off x="548640" y="1993392"/>
+          <p:cNvPr id="5" name="Shape 2"/>
+          <p:cNvSpPr/>
+          <p:nvPr/>
+        </p:nvSpPr>
+        <p:spPr>
+          <a:xfrm>
+            <a:off x="548640" y="1371600"/>
             <a:ext cx="8046720" cy="548640"/>
           </a:xfrm>
           <a:prstGeom prst="roundRect">
@@ -2333,16 +1841,23 @@
             <a:prstDash val="solid"/>
           </a:ln>
         </p:spPr>
-      </p:sp>
-      <p:sp>
-        <p:nvSpPr>
-          <p:cNvPr id="11" name="Shape 7"/>
-          <p:cNvSpPr/>
-          <p:nvPr/>
-        </p:nvSpPr>
-        <p:spPr>
-          <a:xfrm>
-            <a:off x="713232" y="2066544"/>
+        <p:txBody>
+          <a:bodyPr/>
+          <a:lstStyle/>
+          <a:p>
+            <a:endParaRPr lang="en-US"/>
+          </a:p>
+        </p:txBody>
+      </p:sp>
+      <p:sp>
+        <p:nvSpPr>
+          <p:cNvPr id="6" name="Shape 3"/>
+          <p:cNvSpPr/>
+          <p:nvPr/>
+        </p:nvSpPr>
+        <p:spPr>
+          <a:xfrm>
+            <a:off x="713232" y="1444752"/>
             <a:ext cx="402336" cy="402336"/>
           </a:xfrm>
           <a:prstGeom prst="ellipse">
@@ -2353,10 +1868,17 @@
           </a:solidFill>
           <a:ln/>
         </p:spPr>
+        <p:txBody>
+          <a:bodyPr/>
+          <a:lstStyle/>
+          <a:p>
+            <a:endParaRPr lang="en-US"/>
+          </a:p>
+        </p:txBody>
       </p:sp>
       <p:pic>
         <p:nvPicPr>
-          <p:cNvPr id="12" name="Image 2" descr="preencoded.png">    </p:cNvPr>
+          <p:cNvPr id="7" name="Image 1" descr="preencoded.png"/>
           <p:cNvPicPr>
             <a:picLocks noChangeAspect="1"/>
           </p:cNvPicPr>
@@ -2370,7 +1892,7 @@
         </p:blipFill>
         <p:spPr>
           <a:xfrm>
-            <a:off x="817839" y="2171151"/>
+            <a:off x="817839" y="1549359"/>
             <a:ext cx="193121" cy="193121"/>
           </a:xfrm>
           <a:prstGeom prst="rect">
@@ -2380,13 +1902,13 @@
       </p:pic>
       <p:sp>
         <p:nvSpPr>
-          <p:cNvPr id="13" name="Text 8"/>
-          <p:cNvSpPr/>
-          <p:nvPr/>
-        </p:nvSpPr>
-        <p:spPr>
-          <a:xfrm>
-            <a:off x="1325880" y="1993392"/>
+          <p:cNvPr id="8" name="Text 4"/>
+          <p:cNvSpPr/>
+          <p:nvPr/>
+        </p:nvSpPr>
+        <p:spPr>
+          <a:xfrm>
+            <a:off x="1325880" y="1371600"/>
             <a:ext cx="3931920" cy="548640"/>
           </a:xfrm>
           <a:prstGeom prst="rect">
@@ -2399,7 +1921,7 @@
           <a:bodyPr wrap="square" lIns="0" tIns="0" rIns="0" bIns="0" rtlCol="0" anchor="ctr"/>
           <a:lstStyle/>
           <a:p>
-            <a:pPr indent="0" marL="0">
+            <a:pPr marL="0" indent="0">
               <a:buNone/>
             </a:pPr>
             <a:r>
@@ -2411,7 +1933,7 @@
                 <a:ea typeface="Inter" pitchFamily="34" charset="-122"/>
                 <a:cs typeface="Inter" pitchFamily="34" charset="-120"/>
               </a:rPr>
-              <a:t>Edge-case tests added</a:t>
+              <a:t>Tests pass</a:t>
             </a:r>
             <a:endParaRPr lang="en-US" sz="1450" dirty="0"/>
           </a:p>
@@ -2419,13 +1941,13 @@
       </p:sp>
       <p:sp>
         <p:nvSpPr>
-          <p:cNvPr id="14" name="Text 9"/>
-          <p:cNvSpPr/>
-          <p:nvPr/>
-        </p:nvSpPr>
-        <p:spPr>
-          <a:xfrm>
-            <a:off x="5303520" y="1993392"/>
+          <p:cNvPr id="9" name="Text 5"/>
+          <p:cNvSpPr/>
+          <p:nvPr/>
+        </p:nvSpPr>
+        <p:spPr>
+          <a:xfrm>
+            <a:off x="5303520" y="1371600"/>
             <a:ext cx="3108960" cy="548640"/>
           </a:xfrm>
           <a:prstGeom prst="rect">
@@ -2438,7 +1960,7 @@
           <a:bodyPr wrap="square" lIns="0" tIns="0" rIns="0" bIns="0" rtlCol="0" anchor="ctr"/>
           <a:lstStyle/>
           <a:p>
-            <a:pPr indent="0" marL="0">
+            <a:pPr marL="0" indent="0">
               <a:buNone/>
             </a:pPr>
             <a:r>
@@ -2450,7 +1972,7 @@
                 <a:ea typeface="Inter" pitchFamily="34" charset="-122"/>
                 <a:cs typeface="Inter" pitchFamily="34" charset="-120"/>
               </a:rPr>
-              <a:t>Adversarial scenarios covered</a:t>
+              <a:t>The generated xUnit suite is green</a:t>
             </a:r>
             <a:endParaRPr lang="en-US" sz="1200" dirty="0"/>
           </a:p>
@@ -2458,13 +1980,13 @@
       </p:sp>
       <p:sp>
         <p:nvSpPr>
-          <p:cNvPr id="15" name="Shape 10"/>
-          <p:cNvSpPr/>
-          <p:nvPr/>
-        </p:nvSpPr>
-        <p:spPr>
-          <a:xfrm>
-            <a:off x="548640" y="2615184"/>
+          <p:cNvPr id="10" name="Shape 6"/>
+          <p:cNvSpPr/>
+          <p:nvPr/>
+        </p:nvSpPr>
+        <p:spPr>
+          <a:xfrm>
+            <a:off x="548640" y="1993392"/>
             <a:ext cx="8046720" cy="548640"/>
           </a:xfrm>
           <a:prstGeom prst="roundRect">
@@ -2482,16 +2004,23 @@
             <a:prstDash val="solid"/>
           </a:ln>
         </p:spPr>
-      </p:sp>
-      <p:sp>
-        <p:nvSpPr>
-          <p:cNvPr id="16" name="Shape 11"/>
-          <p:cNvSpPr/>
-          <p:nvPr/>
-        </p:nvSpPr>
-        <p:spPr>
-          <a:xfrm>
-            <a:off x="713232" y="2688336"/>
+        <p:txBody>
+          <a:bodyPr/>
+          <a:lstStyle/>
+          <a:p>
+            <a:endParaRPr lang="en-US"/>
+          </a:p>
+        </p:txBody>
+      </p:sp>
+      <p:sp>
+        <p:nvSpPr>
+          <p:cNvPr id="11" name="Shape 7"/>
+          <p:cNvSpPr/>
+          <p:nvPr/>
+        </p:nvSpPr>
+        <p:spPr>
+          <a:xfrm>
+            <a:off x="713232" y="2066544"/>
             <a:ext cx="402336" cy="402336"/>
           </a:xfrm>
           <a:prstGeom prst="ellipse">
@@ -2502,10 +2031,17 @@
           </a:solidFill>
           <a:ln/>
         </p:spPr>
+        <p:txBody>
+          <a:bodyPr/>
+          <a:lstStyle/>
+          <a:p>
+            <a:endParaRPr lang="en-US"/>
+          </a:p>
+        </p:txBody>
       </p:sp>
       <p:pic>
         <p:nvPicPr>
-          <p:cNvPr id="17" name="Image 3" descr="preencoded.png">    </p:cNvPr>
+          <p:cNvPr id="12" name="Image 2" descr="preencoded.png"/>
           <p:cNvPicPr>
             <a:picLocks noChangeAspect="1"/>
           </p:cNvPicPr>
@@ -2519,7 +2055,7 @@
         </p:blipFill>
         <p:spPr>
           <a:xfrm>
-            <a:off x="817839" y="2792943"/>
+            <a:off x="817839" y="2171151"/>
             <a:ext cx="193121" cy="193121"/>
           </a:xfrm>
           <a:prstGeom prst="rect">
@@ -2529,13 +2065,13 @@
       </p:pic>
       <p:sp>
         <p:nvSpPr>
-          <p:cNvPr id="18" name="Text 12"/>
-          <p:cNvSpPr/>
-          <p:nvPr/>
-        </p:nvSpPr>
-        <p:spPr>
-          <a:xfrm>
-            <a:off x="1325880" y="2615184"/>
+          <p:cNvPr id="13" name="Text 8"/>
+          <p:cNvSpPr/>
+          <p:nvPr/>
+        </p:nvSpPr>
+        <p:spPr>
+          <a:xfrm>
+            <a:off x="1325880" y="1993392"/>
             <a:ext cx="3931920" cy="548640"/>
           </a:xfrm>
           <a:prstGeom prst="rect">
@@ -2548,7 +2084,7 @@
           <a:bodyPr wrap="square" lIns="0" tIns="0" rIns="0" bIns="0" rtlCol="0" anchor="ctr"/>
           <a:lstStyle/>
           <a:p>
-            <a:pPr indent="0" marL="0">
+            <a:pPr marL="0" indent="0">
               <a:buNone/>
             </a:pPr>
             <a:r>
@@ -2560,7 +2096,7 @@
                 <a:ea typeface="Inter" pitchFamily="34" charset="-122"/>
                 <a:cs typeface="Inter" pitchFamily="34" charset="-120"/>
               </a:rPr>
-              <a:t>CI runs AI review on a PR</a:t>
+              <a:t>Edge-case tests added</a:t>
             </a:r>
             <a:endParaRPr lang="en-US" sz="1450" dirty="0"/>
           </a:p>
@@ -2568,13 +2104,13 @@
       </p:sp>
       <p:sp>
         <p:nvSpPr>
-          <p:cNvPr id="19" name="Text 13"/>
-          <p:cNvSpPr/>
-          <p:nvPr/>
-        </p:nvSpPr>
-        <p:spPr>
-          <a:xfrm>
-            <a:off x="5303520" y="2615184"/>
+          <p:cNvPr id="14" name="Text 9"/>
+          <p:cNvSpPr/>
+          <p:nvPr/>
+        </p:nvSpPr>
+        <p:spPr>
+          <a:xfrm>
+            <a:off x="5303520" y="1993392"/>
             <a:ext cx="3108960" cy="548640"/>
           </a:xfrm>
           <a:prstGeom prst="rect">
@@ -2587,7 +2123,7 @@
           <a:bodyPr wrap="square" lIns="0" tIns="0" rIns="0" bIns="0" rtlCol="0" anchor="ctr"/>
           <a:lstStyle/>
           <a:p>
-            <a:pPr indent="0" marL="0">
+            <a:pPr marL="0" indent="0">
               <a:buNone/>
             </a:pPr>
             <a:r>
@@ -2599,7 +2135,7 @@
                 <a:ea typeface="Inter" pitchFamily="34" charset="-122"/>
                 <a:cs typeface="Inter" pitchFamily="34" charset="-120"/>
               </a:rPr>
-              <a:t>Claude comments on the diff</a:t>
+              <a:t>Adversarial scenarios covered</a:t>
             </a:r>
             <a:endParaRPr lang="en-US" sz="1200" dirty="0"/>
           </a:p>
@@ -2607,13 +2143,13 @@
       </p:sp>
       <p:sp>
         <p:nvSpPr>
-          <p:cNvPr id="20" name="Shape 14"/>
-          <p:cNvSpPr/>
-          <p:nvPr/>
-        </p:nvSpPr>
-        <p:spPr>
-          <a:xfrm>
-            <a:off x="548640" y="3236976"/>
+          <p:cNvPr id="15" name="Shape 10"/>
+          <p:cNvSpPr/>
+          <p:nvPr/>
+        </p:nvSpPr>
+        <p:spPr>
+          <a:xfrm>
+            <a:off x="548640" y="2615184"/>
             <a:ext cx="8046720" cy="548640"/>
           </a:xfrm>
           <a:prstGeom prst="roundRect">
@@ -2631,16 +2167,23 @@
             <a:prstDash val="solid"/>
           </a:ln>
         </p:spPr>
-      </p:sp>
-      <p:sp>
-        <p:nvSpPr>
-          <p:cNvPr id="21" name="Shape 15"/>
-          <p:cNvSpPr/>
-          <p:nvPr/>
-        </p:nvSpPr>
-        <p:spPr>
-          <a:xfrm>
-            <a:off x="713232" y="3310128"/>
+        <p:txBody>
+          <a:bodyPr/>
+          <a:lstStyle/>
+          <a:p>
+            <a:endParaRPr lang="en-US"/>
+          </a:p>
+        </p:txBody>
+      </p:sp>
+      <p:sp>
+        <p:nvSpPr>
+          <p:cNvPr id="16" name="Shape 11"/>
+          <p:cNvSpPr/>
+          <p:nvPr/>
+        </p:nvSpPr>
+        <p:spPr>
+          <a:xfrm>
+            <a:off x="713232" y="2688336"/>
             <a:ext cx="402336" cy="402336"/>
           </a:xfrm>
           <a:prstGeom prst="ellipse">
@@ -2651,10 +2194,17 @@
           </a:solidFill>
           <a:ln/>
         </p:spPr>
+        <p:txBody>
+          <a:bodyPr/>
+          <a:lstStyle/>
+          <a:p>
+            <a:endParaRPr lang="en-US"/>
+          </a:p>
+        </p:txBody>
       </p:sp>
       <p:pic>
         <p:nvPicPr>
-          <p:cNvPr id="22" name="Image 4" descr="preencoded.png">    </p:cNvPr>
+          <p:cNvPr id="17" name="Image 3" descr="preencoded.png"/>
           <p:cNvPicPr>
             <a:picLocks noChangeAspect="1"/>
           </p:cNvPicPr>
@@ -2668,7 +2218,7 @@
         </p:blipFill>
         <p:spPr>
           <a:xfrm>
-            <a:off x="817839" y="3414735"/>
+            <a:off x="817839" y="2792943"/>
             <a:ext cx="193121" cy="193121"/>
           </a:xfrm>
           <a:prstGeom prst="rect">
@@ -2678,13 +2228,13 @@
       </p:pic>
       <p:sp>
         <p:nvSpPr>
-          <p:cNvPr id="23" name="Text 16"/>
-          <p:cNvSpPr/>
-          <p:nvPr/>
-        </p:nvSpPr>
-        <p:spPr>
-          <a:xfrm>
-            <a:off x="1325880" y="3236976"/>
+          <p:cNvPr id="18" name="Text 12"/>
+          <p:cNvSpPr/>
+          <p:nvPr/>
+        </p:nvSpPr>
+        <p:spPr>
+          <a:xfrm>
+            <a:off x="1325880" y="2615184"/>
             <a:ext cx="3931920" cy="548640"/>
           </a:xfrm>
           <a:prstGeom prst="rect">
@@ -2697,7 +2247,7 @@
           <a:bodyPr wrap="square" lIns="0" tIns="0" rIns="0" bIns="0" rtlCol="0" anchor="ctr"/>
           <a:lstStyle/>
           <a:p>
-            <a:pPr indent="0" marL="0">
+            <a:pPr marL="0" indent="0">
               <a:buNone/>
             </a:pPr>
             <a:r>
@@ -2709,7 +2259,7 @@
                 <a:ea typeface="Inter" pitchFamily="34" charset="-122"/>
                 <a:cs typeface="Inter" pitchFamily="34" charset="-120"/>
               </a:rPr>
-              <a:t>Tag push produces release notes</a:t>
+              <a:t>CI runs AI review on a PR</a:t>
             </a:r>
             <a:endParaRPr lang="en-US" sz="1450" dirty="0"/>
           </a:p>
@@ -2717,13 +2267,13 @@
       </p:sp>
       <p:sp>
         <p:nvSpPr>
-          <p:cNvPr id="24" name="Text 17"/>
-          <p:cNvSpPr/>
-          <p:nvPr/>
-        </p:nvSpPr>
-        <p:spPr>
-          <a:xfrm>
-            <a:off x="5303520" y="3236976"/>
+          <p:cNvPr id="19" name="Text 13"/>
+          <p:cNvSpPr/>
+          <p:nvPr/>
+        </p:nvSpPr>
+        <p:spPr>
+          <a:xfrm>
+            <a:off x="5303520" y="2615184"/>
             <a:ext cx="3108960" cy="548640"/>
           </a:xfrm>
           <a:prstGeom prst="rect">
@@ -2736,7 +2286,7 @@
           <a:bodyPr wrap="square" lIns="0" tIns="0" rIns="0" bIns="0" rtlCol="0" anchor="ctr"/>
           <a:lstStyle/>
           <a:p>
-            <a:pPr indent="0" marL="0">
+            <a:pPr marL="0" indent="0">
               <a:buNone/>
             </a:pPr>
             <a:r>
@@ -2748,7 +2298,7 @@
                 <a:ea typeface="Inter" pitchFamily="34" charset="-122"/>
                 <a:cs typeface="Inter" pitchFamily="34" charset="-120"/>
               </a:rPr>
-              <a:t>Grouped, readable output</a:t>
+              <a:t>Claude comments on the diff</a:t>
             </a:r>
             <a:endParaRPr lang="en-US" sz="1200" dirty="0"/>
           </a:p>
@@ -2756,13 +2306,13 @@
       </p:sp>
       <p:sp>
         <p:nvSpPr>
-          <p:cNvPr id="25" name="Shape 18"/>
-          <p:cNvSpPr/>
-          <p:nvPr/>
-        </p:nvSpPr>
-        <p:spPr>
-          <a:xfrm>
-            <a:off x="548640" y="3858768"/>
+          <p:cNvPr id="20" name="Shape 14"/>
+          <p:cNvSpPr/>
+          <p:nvPr/>
+        </p:nvSpPr>
+        <p:spPr>
+          <a:xfrm>
+            <a:off x="548640" y="3236976"/>
             <a:ext cx="8046720" cy="548640"/>
           </a:xfrm>
           <a:prstGeom prst="roundRect">
@@ -2771,7 +2321,7 @@
             </a:avLst>
           </a:prstGeom>
           <a:solidFill>
-            <a:srgbClr val="F4E4DC"/>
+            <a:srgbClr val="FBFAF6"/>
           </a:solidFill>
           <a:ln w="12700">
             <a:solidFill>
@@ -2780,16 +2330,23 @@
             <a:prstDash val="solid"/>
           </a:ln>
         </p:spPr>
-      </p:sp>
-      <p:sp>
-        <p:nvSpPr>
-          <p:cNvPr id="26" name="Shape 19"/>
-          <p:cNvSpPr/>
-          <p:nvPr/>
-        </p:nvSpPr>
-        <p:spPr>
-          <a:xfrm>
-            <a:off x="713232" y="3931920"/>
+        <p:txBody>
+          <a:bodyPr/>
+          <a:lstStyle/>
+          <a:p>
+            <a:endParaRPr lang="en-US"/>
+          </a:p>
+        </p:txBody>
+      </p:sp>
+      <p:sp>
+        <p:nvSpPr>
+          <p:cNvPr id="21" name="Shape 15"/>
+          <p:cNvSpPr/>
+          <p:nvPr/>
+        </p:nvSpPr>
+        <p:spPr>
+          <a:xfrm>
+            <a:off x="713232" y="3310128"/>
             <a:ext cx="402336" cy="402336"/>
           </a:xfrm>
           <a:prstGeom prst="ellipse">
@@ -2800,10 +2357,17 @@
           </a:solidFill>
           <a:ln/>
         </p:spPr>
+        <p:txBody>
+          <a:bodyPr/>
+          <a:lstStyle/>
+          <a:p>
+            <a:endParaRPr lang="en-US"/>
+          </a:p>
+        </p:txBody>
       </p:sp>
       <p:pic>
         <p:nvPicPr>
-          <p:cNvPr id="27" name="Image 5" descr="preencoded.png">    </p:cNvPr>
+          <p:cNvPr id="22" name="Image 4" descr="preencoded.png"/>
           <p:cNvPicPr>
             <a:picLocks noChangeAspect="1"/>
           </p:cNvPicPr>
@@ -2817,6 +2381,169 @@
         </p:blipFill>
         <p:spPr>
           <a:xfrm>
+            <a:off x="817839" y="3414735"/>
+            <a:ext cx="193121" cy="193121"/>
+          </a:xfrm>
+          <a:prstGeom prst="rect">
+            <a:avLst/>
+          </a:prstGeom>
+        </p:spPr>
+      </p:pic>
+      <p:sp>
+        <p:nvSpPr>
+          <p:cNvPr id="23" name="Text 16"/>
+          <p:cNvSpPr/>
+          <p:nvPr/>
+        </p:nvSpPr>
+        <p:spPr>
+          <a:xfrm>
+            <a:off x="1325880" y="3236976"/>
+            <a:ext cx="3931920" cy="548640"/>
+          </a:xfrm>
+          <a:prstGeom prst="rect">
+            <a:avLst/>
+          </a:prstGeom>
+          <a:noFill/>
+          <a:ln/>
+        </p:spPr>
+        <p:txBody>
+          <a:bodyPr wrap="square" lIns="0" tIns="0" rIns="0" bIns="0" rtlCol="0" anchor="ctr"/>
+          <a:lstStyle/>
+          <a:p>
+            <a:pPr marL="0" indent="0">
+              <a:buNone/>
+            </a:pPr>
+            <a:r>
+              <a:rPr lang="en-US" sz="1450" b="1" dirty="0">
+                <a:solidFill>
+                  <a:srgbClr val="141413"/>
+                </a:solidFill>
+                <a:latin typeface="Inter" pitchFamily="34" charset="0"/>
+                <a:ea typeface="Inter" pitchFamily="34" charset="-122"/>
+                <a:cs typeface="Inter" pitchFamily="34" charset="-120"/>
+              </a:rPr>
+              <a:t>Tag push produces release notes</a:t>
+            </a:r>
+            <a:endParaRPr lang="en-US" sz="1450" dirty="0"/>
+          </a:p>
+        </p:txBody>
+      </p:sp>
+      <p:sp>
+        <p:nvSpPr>
+          <p:cNvPr id="24" name="Text 17"/>
+          <p:cNvSpPr/>
+          <p:nvPr/>
+        </p:nvSpPr>
+        <p:spPr>
+          <a:xfrm>
+            <a:off x="5303520" y="3236976"/>
+            <a:ext cx="3108960" cy="548640"/>
+          </a:xfrm>
+          <a:prstGeom prst="rect">
+            <a:avLst/>
+          </a:prstGeom>
+          <a:noFill/>
+          <a:ln/>
+        </p:spPr>
+        <p:txBody>
+          <a:bodyPr wrap="square" lIns="0" tIns="0" rIns="0" bIns="0" rtlCol="0" anchor="ctr"/>
+          <a:lstStyle/>
+          <a:p>
+            <a:pPr marL="0" indent="0">
+              <a:buNone/>
+            </a:pPr>
+            <a:r>
+              <a:rPr lang="en-US" sz="1200" dirty="0">
+                <a:solidFill>
+                  <a:srgbClr val="615C52"/>
+                </a:solidFill>
+                <a:latin typeface="Inter" pitchFamily="34" charset="0"/>
+                <a:ea typeface="Inter" pitchFamily="34" charset="-122"/>
+                <a:cs typeface="Inter" pitchFamily="34" charset="-120"/>
+              </a:rPr>
+              <a:t>Grouped, readable output</a:t>
+            </a:r>
+            <a:endParaRPr lang="en-US" sz="1200" dirty="0"/>
+          </a:p>
+        </p:txBody>
+      </p:sp>
+      <p:sp>
+        <p:nvSpPr>
+          <p:cNvPr id="25" name="Shape 18"/>
+          <p:cNvSpPr/>
+          <p:nvPr/>
+        </p:nvSpPr>
+        <p:spPr>
+          <a:xfrm>
+            <a:off x="548640" y="3858768"/>
+            <a:ext cx="8046720" cy="548640"/>
+          </a:xfrm>
+          <a:prstGeom prst="roundRect">
+            <a:avLst>
+              <a:gd name="adj" fmla="val 11667"/>
+            </a:avLst>
+          </a:prstGeom>
+          <a:solidFill>
+            <a:srgbClr val="F4E4DC"/>
+          </a:solidFill>
+          <a:ln w="12700">
+            <a:solidFill>
+              <a:srgbClr val="D8D3C6"/>
+            </a:solidFill>
+            <a:prstDash val="solid"/>
+          </a:ln>
+        </p:spPr>
+        <p:txBody>
+          <a:bodyPr/>
+          <a:lstStyle/>
+          <a:p>
+            <a:endParaRPr lang="en-US"/>
+          </a:p>
+        </p:txBody>
+      </p:sp>
+      <p:sp>
+        <p:nvSpPr>
+          <p:cNvPr id="26" name="Shape 19"/>
+          <p:cNvSpPr/>
+          <p:nvPr/>
+        </p:nvSpPr>
+        <p:spPr>
+          <a:xfrm>
+            <a:off x="713232" y="3931920"/>
+            <a:ext cx="402336" cy="402336"/>
+          </a:xfrm>
+          <a:prstGeom prst="ellipse">
+            <a:avLst/>
+          </a:prstGeom>
+          <a:solidFill>
+            <a:srgbClr val="D97757"/>
+          </a:solidFill>
+          <a:ln/>
+        </p:spPr>
+        <p:txBody>
+          <a:bodyPr/>
+          <a:lstStyle/>
+          <a:p>
+            <a:endParaRPr lang="en-US"/>
+          </a:p>
+        </p:txBody>
+      </p:sp>
+      <p:pic>
+        <p:nvPicPr>
+          <p:cNvPr id="27" name="Image 5" descr="preencoded.png"/>
+          <p:cNvPicPr>
+            <a:picLocks noChangeAspect="1"/>
+          </p:cNvPicPr>
+          <p:nvPr/>
+        </p:nvPicPr>
+        <p:blipFill>
+          <a:blip r:embed="rId7"/>
+          <a:stretch>
+            <a:fillRect/>
+          </a:stretch>
+        </p:blipFill>
+        <p:spPr>
+          <a:xfrm>
             <a:off x="817839" y="4036527"/>
             <a:ext cx="193121" cy="193121"/>
           </a:xfrm>
@@ -2846,7 +2573,7 @@
           <a:bodyPr wrap="square" lIns="0" tIns="0" rIns="0" bIns="0" rtlCol="0" anchor="ctr"/>
           <a:lstStyle/>
           <a:p>
-            <a:pPr indent="0" marL="0">
+            <a:pPr marL="0" indent="0">
               <a:buNone/>
             </a:pPr>
             <a:r>
@@ -2885,7 +2612,7 @@
           <a:bodyPr wrap="square" lIns="0" tIns="0" rIns="0" bIns="0" rtlCol="0" anchor="ctr"/>
           <a:lstStyle/>
           <a:p>
-            <a:pPr indent="0" marL="0">
+            <a:pPr marL="0" indent="0">
               <a:buNone/>
             </a:pPr>
             <a:r>
@@ -2924,11 +2651,11 @@
           <a:bodyPr wrap="square" lIns="0" tIns="0" rIns="0" bIns="0" rtlCol="0" anchor="ctr"/>
           <a:lstStyle/>
           <a:p>
-            <a:pPr algn="r" indent="0" marL="0">
-              <a:buNone/>
-            </a:pPr>
-            <a:r>
-              <a:rPr lang="en-US" sz="850" b="1" spc="50" kern="0" dirty="0">
+            <a:pPr marL="0" indent="0" algn="r">
+              <a:buNone/>
+            </a:pPr>
+            <a:r>
+              <a:rPr lang="en-US" sz="850" b="1" kern="0" spc="50" dirty="0">
                 <a:solidFill>
                   <a:srgbClr val="C25E40"/>
                 </a:solidFill>
@@ -2963,7 +2690,7 @@
           <a:bodyPr wrap="square" rtlCol="0" anchor="ctr"/>
           <a:lstStyle/>
           <a:p>
-            <a:pPr indent="0" marL="0">
+            <a:pPr marL="0" indent="0">
               <a:buNone/>
             </a:pPr>
             <a:r>
@@ -3002,7 +2729,7 @@
           <a:bodyPr wrap="square" rtlCol="0" anchor="ctr"/>
           <a:lstStyle/>
           <a:p>
-            <a:pPr algn="r" indent="0" marL="0">
+            <a:pPr marL="0" indent="0" algn="r">
               <a:buNone/>
             </a:pPr>
             <a:r>
@@ -3017,45 +2744,6 @@
               <a:t>Day 2 · Section 5  ·  11/11</a:t>
             </a:r>
             <a:endParaRPr lang="en-US" sz="900" dirty="0"/>
-          </a:p>
-        </p:txBody>
-      </p:sp>
-      <p:sp>
-        <p:nvSpPr>
-          <p:cNvPr id="33" name="Text 25"/>
-          <p:cNvSpPr/>
-          <p:nvPr/>
-        </p:nvSpPr>
-        <p:spPr>
-          <a:xfrm>
-            <a:off x="548640" y="4462272"/>
-            <a:ext cx="8046720" cy="274320"/>
-          </a:xfrm>
-          <a:prstGeom prst="rect">
-            <a:avLst/>
-          </a:prstGeom>
-          <a:noFill/>
-          <a:ln/>
-        </p:spPr>
-        <p:txBody>
-          <a:bodyPr wrap="square" lIns="0" tIns="0" rIns="0" bIns="0" rtlCol="0" anchor="ctr"/>
-          <a:lstStyle/>
-          <a:p>
-            <a:pPr indent="0" marL="0">
-              <a:buNone/>
-            </a:pPr>
-            <a:r>
-              <a:rPr lang="en-US" sz="1000" i="1" dirty="0">
-                <a:solidFill>
-                  <a:srgbClr val="615C52"/>
-                </a:solidFill>
-                <a:latin typeface="Inter" pitchFamily="34" charset="0"/>
-                <a:ea typeface="Inter" pitchFamily="34" charset="-122"/>
-                <a:cs typeface="Inter" pitchFamily="34" charset="-120"/>
-              </a:rPr>
-              <a:t>▸ Four core checks plus one stretch — this is the Day 2 testing/CI finish line.</a:t>
-            </a:r>
-            <a:endParaRPr lang="en-US" sz="1000" dirty="0"/>
           </a:p>
         </p:txBody>
       </p:sp>
@@ -3075,6 +2763,7 @@
         <a:solidFill>
           <a:srgbClr val="F0EEE6"/>
         </a:solidFill>
+        <a:effectLst/>
       </p:bgPr>
     </p:bg>
     <p:spTree>
@@ -3112,11 +2801,11 @@
           <a:bodyPr wrap="square" lIns="0" tIns="0" rIns="0" bIns="0" rtlCol="0" anchor="ctr"/>
           <a:lstStyle/>
           <a:p>
-            <a:pPr indent="0" marL="0">
-              <a:buNone/>
-            </a:pPr>
-            <a:r>
-              <a:rPr lang="en-US" sz="1100" b="1" spc="200" kern="0" dirty="0">
+            <a:pPr marL="0" indent="0">
+              <a:buNone/>
+            </a:pPr>
+            <a:r>
+              <a:rPr lang="en-US" sz="1100" b="1" kern="0" spc="200" dirty="0">
                 <a:solidFill>
                   <a:srgbClr val="C25E40"/>
                 </a:solidFill>
@@ -3151,7 +2840,7 @@
           <a:bodyPr wrap="square" lIns="0" tIns="0" rIns="0" bIns="0" rtlCol="0" anchor="ctr"/>
           <a:lstStyle/>
           <a:p>
-            <a:pPr indent="0" marL="0">
+            <a:pPr marL="0" indent="0">
               <a:buNone/>
             </a:pPr>
             <a:r>
@@ -3171,51 +2860,7 @@
       </p:sp>
       <p:pic>
         <p:nvPicPr>
-          <p:cNvPr id="4" name="Image 0" descr="preencoded.png">    </p:cNvPr>
-          <p:cNvPicPr>
-            <a:picLocks noChangeAspect="1"/>
-          </p:cNvPicPr>
-          <p:nvPr/>
-        </p:nvPicPr>
-        <p:blipFill>
-          <a:blip r:embed="rId1"/>
-          <a:stretch>
-            <a:fillRect/>
-          </a:stretch>
-        </p:blipFill>
-        <p:spPr>
-          <a:xfrm>
-            <a:off x="8321040" y="411480"/>
-            <a:ext cx="347472" cy="292608"/>
-          </a:xfrm>
-          <a:prstGeom prst="rect">
-            <a:avLst/>
-          </a:prstGeom>
-        </p:spPr>
-      </p:pic>
-      <p:sp>
-        <p:nvSpPr>
-          <p:cNvPr id="5" name="Shape 2"/>
-          <p:cNvSpPr/>
-          <p:nvPr/>
-        </p:nvSpPr>
-        <p:spPr>
-          <a:xfrm>
-            <a:off x="566928" y="1444752"/>
-            <a:ext cx="329184" cy="329184"/>
-          </a:xfrm>
-          <a:prstGeom prst="ellipse">
-            <a:avLst/>
-          </a:prstGeom>
-          <a:solidFill>
-            <a:srgbClr val="D97757"/>
-          </a:solidFill>
-          <a:ln/>
-        </p:spPr>
-      </p:sp>
-      <p:pic>
-        <p:nvPicPr>
-          <p:cNvPr id="6" name="Image 1" descr="preencoded.png">    </p:cNvPr>
+          <p:cNvPr id="4" name="Image 0" descr="preencoded.png"/>
           <p:cNvPicPr>
             <a:picLocks noChangeAspect="1"/>
           </p:cNvPicPr>
@@ -3229,8 +2874,8 @@
         </p:blipFill>
         <p:spPr>
           <a:xfrm>
-            <a:off x="652516" y="1530340"/>
-            <a:ext cx="158008" cy="158008"/>
+            <a:off x="8321040" y="411480"/>
+            <a:ext cx="347472" cy="292608"/>
           </a:xfrm>
           <a:prstGeom prst="rect">
             <a:avLst/>
@@ -3239,52 +2884,13 @@
       </p:pic>
       <p:sp>
         <p:nvSpPr>
-          <p:cNvPr id="7" name="Text 3"/>
-          <p:cNvSpPr/>
-          <p:nvPr/>
-        </p:nvSpPr>
-        <p:spPr>
-          <a:xfrm>
-            <a:off x="1051560" y="1417320"/>
-            <a:ext cx="7406640" cy="457200"/>
-          </a:xfrm>
-          <a:prstGeom prst="rect">
-            <a:avLst/>
-          </a:prstGeom>
-          <a:noFill/>
-          <a:ln/>
-        </p:spPr>
-        <p:txBody>
-          <a:bodyPr wrap="square" lIns="0" tIns="0" rIns="0" bIns="0" rtlCol="0" anchor="ctr"/>
-          <a:lstStyle/>
-          <a:p>
-            <a:pPr indent="0" marL="0">
-              <a:buNone/>
-            </a:pPr>
-            <a:r>
-              <a:rPr lang="en-US" sz="1600" dirty="0">
-                <a:solidFill>
-                  <a:srgbClr val="141413"/>
-                </a:solidFill>
-                <a:latin typeface="Inter" pitchFamily="34" charset="0"/>
-                <a:ea typeface="Inter" pitchFamily="34" charset="-122"/>
-                <a:cs typeface="Inter" pitchFamily="34" charset="-120"/>
-              </a:rPr>
-              <a:t>Generate xUnit suites with Claude Code</a:t>
-            </a:r>
-            <a:endParaRPr lang="en-US" sz="1600" dirty="0"/>
-          </a:p>
-        </p:txBody>
-      </p:sp>
-      <p:sp>
-        <p:nvSpPr>
-          <p:cNvPr id="8" name="Shape 4"/>
-          <p:cNvSpPr/>
-          <p:nvPr/>
-        </p:nvSpPr>
-        <p:spPr>
-          <a:xfrm>
-            <a:off x="566928" y="1901952"/>
+          <p:cNvPr id="5" name="Shape 2"/>
+          <p:cNvSpPr/>
+          <p:nvPr/>
+        </p:nvSpPr>
+        <p:spPr>
+          <a:xfrm>
+            <a:off x="566928" y="1444752"/>
             <a:ext cx="329184" cy="329184"/>
           </a:xfrm>
           <a:prstGeom prst="ellipse">
@@ -3295,10 +2901,17 @@
           </a:solidFill>
           <a:ln/>
         </p:spPr>
+        <p:txBody>
+          <a:bodyPr/>
+          <a:lstStyle/>
+          <a:p>
+            <a:endParaRPr lang="en-US"/>
+          </a:p>
+        </p:txBody>
       </p:sp>
       <p:pic>
         <p:nvPicPr>
-          <p:cNvPr id="9" name="Image 2" descr="preencoded.png">    </p:cNvPr>
+          <p:cNvPr id="6" name="Image 1" descr="preencoded.png"/>
           <p:cNvPicPr>
             <a:picLocks noChangeAspect="1"/>
           </p:cNvPicPr>
@@ -3312,7 +2925,7 @@
         </p:blipFill>
         <p:spPr>
           <a:xfrm>
-            <a:off x="652516" y="1987540"/>
+            <a:off x="652516" y="1530340"/>
             <a:ext cx="158008" cy="158008"/>
           </a:xfrm>
           <a:prstGeom prst="rect">
@@ -3322,13 +2935,13 @@
       </p:pic>
       <p:sp>
         <p:nvSpPr>
-          <p:cNvPr id="10" name="Text 5"/>
-          <p:cNvSpPr/>
-          <p:nvPr/>
-        </p:nvSpPr>
-        <p:spPr>
-          <a:xfrm>
-            <a:off x="1051560" y="1874520"/>
+          <p:cNvPr id="7" name="Text 3"/>
+          <p:cNvSpPr/>
+          <p:nvPr/>
+        </p:nvSpPr>
+        <p:spPr>
+          <a:xfrm>
+            <a:off x="1051560" y="1417320"/>
             <a:ext cx="7406640" cy="457200"/>
           </a:xfrm>
           <a:prstGeom prst="rect">
@@ -3341,7 +2954,7 @@
           <a:bodyPr wrap="square" lIns="0" tIns="0" rIns="0" bIns="0" rtlCol="0" anchor="ctr"/>
           <a:lstStyle/>
           <a:p>
-            <a:pPr indent="0" marL="0">
+            <a:pPr marL="0" indent="0">
               <a:buNone/>
             </a:pPr>
             <a:r>
@@ -3353,7 +2966,7 @@
                 <a:ea typeface="Inter" pitchFamily="34" charset="-122"/>
                 <a:cs typeface="Inter" pitchFamily="34" charset="-120"/>
               </a:rPr>
-              <a:t>Use AI for edge-case analysis</a:t>
+              <a:t>Generate xUnit suites with Claude Code</a:t>
             </a:r>
             <a:endParaRPr lang="en-US" sz="1600" dirty="0"/>
           </a:p>
@@ -3361,13 +2974,13 @@
       </p:sp>
       <p:sp>
         <p:nvSpPr>
-          <p:cNvPr id="11" name="Shape 6"/>
-          <p:cNvSpPr/>
-          <p:nvPr/>
-        </p:nvSpPr>
-        <p:spPr>
-          <a:xfrm>
-            <a:off x="566928" y="2359152"/>
+          <p:cNvPr id="8" name="Shape 4"/>
+          <p:cNvSpPr/>
+          <p:nvPr/>
+        </p:nvSpPr>
+        <p:spPr>
+          <a:xfrm>
+            <a:off x="566928" y="1901952"/>
             <a:ext cx="329184" cy="329184"/>
           </a:xfrm>
           <a:prstGeom prst="ellipse">
@@ -3378,24 +2991,31 @@
           </a:solidFill>
           <a:ln/>
         </p:spPr>
+        <p:txBody>
+          <a:bodyPr/>
+          <a:lstStyle/>
+          <a:p>
+            <a:endParaRPr lang="en-US"/>
+          </a:p>
+        </p:txBody>
       </p:sp>
       <p:pic>
         <p:nvPicPr>
-          <p:cNvPr id="12" name="Image 3" descr="preencoded.png">    </p:cNvPr>
+          <p:cNvPr id="9" name="Image 2" descr="preencoded.png"/>
           <p:cNvPicPr>
             <a:picLocks noChangeAspect="1"/>
           </p:cNvPicPr>
           <p:nvPr/>
         </p:nvPicPr>
         <p:blipFill>
-          <a:blip r:embed="rId4"/>
+          <a:blip r:embed="rId3"/>
           <a:stretch>
             <a:fillRect/>
           </a:stretch>
         </p:blipFill>
         <p:spPr>
           <a:xfrm>
-            <a:off x="652516" y="2444740"/>
+            <a:off x="652516" y="1987540"/>
             <a:ext cx="158008" cy="158008"/>
           </a:xfrm>
           <a:prstGeom prst="rect">
@@ -3405,13 +3025,13 @@
       </p:pic>
       <p:sp>
         <p:nvSpPr>
-          <p:cNvPr id="13" name="Text 7"/>
-          <p:cNvSpPr/>
-          <p:nvPr/>
-        </p:nvSpPr>
-        <p:spPr>
-          <a:xfrm>
-            <a:off x="1051560" y="2331720"/>
+          <p:cNvPr id="10" name="Text 5"/>
+          <p:cNvSpPr/>
+          <p:nvPr/>
+        </p:nvSpPr>
+        <p:spPr>
+          <a:xfrm>
+            <a:off x="1051560" y="1874520"/>
             <a:ext cx="7406640" cy="457200"/>
           </a:xfrm>
           <a:prstGeom prst="rect">
@@ -3424,7 +3044,7 @@
           <a:bodyPr wrap="square" lIns="0" tIns="0" rIns="0" bIns="0" rtlCol="0" anchor="ctr"/>
           <a:lstStyle/>
           <a:p>
-            <a:pPr indent="0" marL="0">
+            <a:pPr marL="0" indent="0">
               <a:buNone/>
             </a:pPr>
             <a:r>
@@ -3436,7 +3056,7 @@
                 <a:ea typeface="Inter" pitchFamily="34" charset="-122"/>
                 <a:cs typeface="Inter" pitchFamily="34" charset="-120"/>
               </a:rPr>
-              <a:t>Write integration tests with TestContainers</a:t>
+              <a:t>Use AI for edge-case analysis</a:t>
             </a:r>
             <a:endParaRPr lang="en-US" sz="1600" dirty="0"/>
           </a:p>
@@ -3444,13 +3064,13 @@
       </p:sp>
       <p:sp>
         <p:nvSpPr>
-          <p:cNvPr id="14" name="Shape 8"/>
-          <p:cNvSpPr/>
-          <p:nvPr/>
-        </p:nvSpPr>
-        <p:spPr>
-          <a:xfrm>
-            <a:off x="566928" y="2816352"/>
+          <p:cNvPr id="11" name="Shape 6"/>
+          <p:cNvSpPr/>
+          <p:nvPr/>
+        </p:nvSpPr>
+        <p:spPr>
+          <a:xfrm>
+            <a:off x="566928" y="2359152"/>
             <a:ext cx="329184" cy="329184"/>
           </a:xfrm>
           <a:prstGeom prst="ellipse">
@@ -3461,24 +3081,31 @@
           </a:solidFill>
           <a:ln/>
         </p:spPr>
+        <p:txBody>
+          <a:bodyPr/>
+          <a:lstStyle/>
+          <a:p>
+            <a:endParaRPr lang="en-US"/>
+          </a:p>
+        </p:txBody>
       </p:sp>
       <p:pic>
         <p:nvPicPr>
-          <p:cNvPr id="15" name="Image 4" descr="preencoded.png">    </p:cNvPr>
+          <p:cNvPr id="12" name="Image 3" descr="preencoded.png"/>
           <p:cNvPicPr>
             <a:picLocks noChangeAspect="1"/>
           </p:cNvPicPr>
           <p:nvPr/>
         </p:nvPicPr>
         <p:blipFill>
-          <a:blip r:embed="rId5"/>
+          <a:blip r:embed="rId3"/>
           <a:stretch>
             <a:fillRect/>
           </a:stretch>
         </p:blipFill>
         <p:spPr>
           <a:xfrm>
-            <a:off x="652516" y="2901940"/>
+            <a:off x="652516" y="2444740"/>
             <a:ext cx="158008" cy="158008"/>
           </a:xfrm>
           <a:prstGeom prst="rect">
@@ -3488,13 +3115,13 @@
       </p:pic>
       <p:sp>
         <p:nvSpPr>
-          <p:cNvPr id="16" name="Text 9"/>
-          <p:cNvSpPr/>
-          <p:nvPr/>
-        </p:nvSpPr>
-        <p:spPr>
-          <a:xfrm>
-            <a:off x="1051560" y="2788920"/>
+          <p:cNvPr id="13" name="Text 7"/>
+          <p:cNvSpPr/>
+          <p:nvPr/>
+        </p:nvSpPr>
+        <p:spPr>
+          <a:xfrm>
+            <a:off x="1051560" y="2331720"/>
             <a:ext cx="7406640" cy="457200"/>
           </a:xfrm>
           <a:prstGeom prst="rect">
@@ -3507,7 +3134,7 @@
           <a:bodyPr wrap="square" lIns="0" tIns="0" rIns="0" bIns="0" rtlCol="0" anchor="ctr"/>
           <a:lstStyle/>
           <a:p>
-            <a:pPr indent="0" marL="0">
+            <a:pPr marL="0" indent="0">
               <a:buNone/>
             </a:pPr>
             <a:r>
@@ -3519,7 +3146,7 @@
                 <a:ea typeface="Inter" pitchFamily="34" charset="-122"/>
                 <a:cs typeface="Inter" pitchFamily="34" charset="-120"/>
               </a:rPr>
-              <a:t>Run Claude headless in GitHub Actions</a:t>
+              <a:t>Write integration tests with TestContainers</a:t>
             </a:r>
             <a:endParaRPr lang="en-US" sz="1600" dirty="0"/>
           </a:p>
@@ -3527,13 +3154,13 @@
       </p:sp>
       <p:sp>
         <p:nvSpPr>
-          <p:cNvPr id="17" name="Shape 10"/>
-          <p:cNvSpPr/>
-          <p:nvPr/>
-        </p:nvSpPr>
-        <p:spPr>
-          <a:xfrm>
-            <a:off x="566928" y="3273552"/>
+          <p:cNvPr id="14" name="Shape 8"/>
+          <p:cNvSpPr/>
+          <p:nvPr/>
+        </p:nvSpPr>
+        <p:spPr>
+          <a:xfrm>
+            <a:off x="566928" y="2816352"/>
             <a:ext cx="329184" cy="329184"/>
           </a:xfrm>
           <a:prstGeom prst="ellipse">
@@ -3544,24 +3171,31 @@
           </a:solidFill>
           <a:ln/>
         </p:spPr>
+        <p:txBody>
+          <a:bodyPr/>
+          <a:lstStyle/>
+          <a:p>
+            <a:endParaRPr lang="en-US"/>
+          </a:p>
+        </p:txBody>
       </p:sp>
       <p:pic>
         <p:nvPicPr>
-          <p:cNvPr id="18" name="Image 5" descr="preencoded.png">    </p:cNvPr>
+          <p:cNvPr id="15" name="Image 4" descr="preencoded.png"/>
           <p:cNvPicPr>
             <a:picLocks noChangeAspect="1"/>
           </p:cNvPicPr>
           <p:nvPr/>
         </p:nvPicPr>
         <p:blipFill>
-          <a:blip r:embed="rId6"/>
+          <a:blip r:embed="rId3"/>
           <a:stretch>
             <a:fillRect/>
           </a:stretch>
         </p:blipFill>
         <p:spPr>
           <a:xfrm>
-            <a:off x="652516" y="3359140"/>
+            <a:off x="652516" y="2901940"/>
             <a:ext cx="158008" cy="158008"/>
           </a:xfrm>
           <a:prstGeom prst="rect">
@@ -3571,13 +3205,13 @@
       </p:pic>
       <p:sp>
         <p:nvSpPr>
-          <p:cNvPr id="19" name="Text 11"/>
-          <p:cNvSpPr/>
-          <p:nvPr/>
-        </p:nvSpPr>
-        <p:spPr>
-          <a:xfrm>
-            <a:off x="1051560" y="3246120"/>
+          <p:cNvPr id="16" name="Text 9"/>
+          <p:cNvSpPr/>
+          <p:nvPr/>
+        </p:nvSpPr>
+        <p:spPr>
+          <a:xfrm>
+            <a:off x="1051560" y="2788920"/>
             <a:ext cx="7406640" cy="457200"/>
           </a:xfrm>
           <a:prstGeom prst="rect">
@@ -3590,7 +3224,7 @@
           <a:bodyPr wrap="square" lIns="0" tIns="0" rIns="0" bIns="0" rtlCol="0" anchor="ctr"/>
           <a:lstStyle/>
           <a:p>
-            <a:pPr indent="0" marL="0">
+            <a:pPr marL="0" indent="0">
               <a:buNone/>
             </a:pPr>
             <a:r>
@@ -3602,7 +3236,7 @@
                 <a:ea typeface="Inter" pitchFamily="34" charset="-122"/>
                 <a:cs typeface="Inter" pitchFamily="34" charset="-120"/>
               </a:rPr>
-              <a:t>Automate AI code review on PRs</a:t>
+              <a:t>Run Claude headless in GitHub Actions</a:t>
             </a:r>
             <a:endParaRPr lang="en-US" sz="1600" dirty="0"/>
           </a:p>
@@ -3610,13 +3244,13 @@
       </p:sp>
       <p:sp>
         <p:nvSpPr>
-          <p:cNvPr id="20" name="Shape 12"/>
-          <p:cNvSpPr/>
-          <p:nvPr/>
-        </p:nvSpPr>
-        <p:spPr>
-          <a:xfrm>
-            <a:off x="566928" y="3730752"/>
+          <p:cNvPr id="17" name="Shape 10"/>
+          <p:cNvSpPr/>
+          <p:nvPr/>
+        </p:nvSpPr>
+        <p:spPr>
+          <a:xfrm>
+            <a:off x="566928" y="3273552"/>
             <a:ext cx="329184" cy="329184"/>
           </a:xfrm>
           <a:prstGeom prst="ellipse">
@@ -3627,23 +3261,120 @@
           </a:solidFill>
           <a:ln/>
         </p:spPr>
+        <p:txBody>
+          <a:bodyPr/>
+          <a:lstStyle/>
+          <a:p>
+            <a:endParaRPr lang="en-US"/>
+          </a:p>
+        </p:txBody>
       </p:sp>
       <p:pic>
         <p:nvPicPr>
-          <p:cNvPr id="21" name="Image 6" descr="preencoded.png">    </p:cNvPr>
+          <p:cNvPr id="18" name="Image 5" descr="preencoded.png"/>
           <p:cNvPicPr>
             <a:picLocks noChangeAspect="1"/>
           </p:cNvPicPr>
           <p:nvPr/>
         </p:nvPicPr>
         <p:blipFill>
-          <a:blip r:embed="rId7"/>
+          <a:blip r:embed="rId3"/>
           <a:stretch>
             <a:fillRect/>
           </a:stretch>
         </p:blipFill>
         <p:spPr>
           <a:xfrm>
+            <a:off x="652516" y="3359140"/>
+            <a:ext cx="158008" cy="158008"/>
+          </a:xfrm>
+          <a:prstGeom prst="rect">
+            <a:avLst/>
+          </a:prstGeom>
+        </p:spPr>
+      </p:pic>
+      <p:sp>
+        <p:nvSpPr>
+          <p:cNvPr id="19" name="Text 11"/>
+          <p:cNvSpPr/>
+          <p:nvPr/>
+        </p:nvSpPr>
+        <p:spPr>
+          <a:xfrm>
+            <a:off x="1051560" y="3246120"/>
+            <a:ext cx="7406640" cy="457200"/>
+          </a:xfrm>
+          <a:prstGeom prst="rect">
+            <a:avLst/>
+          </a:prstGeom>
+          <a:noFill/>
+          <a:ln/>
+        </p:spPr>
+        <p:txBody>
+          <a:bodyPr wrap="square" lIns="0" tIns="0" rIns="0" bIns="0" rtlCol="0" anchor="ctr"/>
+          <a:lstStyle/>
+          <a:p>
+            <a:pPr marL="0" indent="0">
+              <a:buNone/>
+            </a:pPr>
+            <a:r>
+              <a:rPr lang="en-US" sz="1600" dirty="0">
+                <a:solidFill>
+                  <a:srgbClr val="141413"/>
+                </a:solidFill>
+                <a:latin typeface="Inter" pitchFamily="34" charset="0"/>
+                <a:ea typeface="Inter" pitchFamily="34" charset="-122"/>
+                <a:cs typeface="Inter" pitchFamily="34" charset="-120"/>
+              </a:rPr>
+              <a:t>Automate AI code review on PRs</a:t>
+            </a:r>
+            <a:endParaRPr lang="en-US" sz="1600" dirty="0"/>
+          </a:p>
+        </p:txBody>
+      </p:sp>
+      <p:sp>
+        <p:nvSpPr>
+          <p:cNvPr id="20" name="Shape 12"/>
+          <p:cNvSpPr/>
+          <p:nvPr/>
+        </p:nvSpPr>
+        <p:spPr>
+          <a:xfrm>
+            <a:off x="566928" y="3730752"/>
+            <a:ext cx="329184" cy="329184"/>
+          </a:xfrm>
+          <a:prstGeom prst="ellipse">
+            <a:avLst/>
+          </a:prstGeom>
+          <a:solidFill>
+            <a:srgbClr val="D97757"/>
+          </a:solidFill>
+          <a:ln/>
+        </p:spPr>
+        <p:txBody>
+          <a:bodyPr/>
+          <a:lstStyle/>
+          <a:p>
+            <a:endParaRPr lang="en-US"/>
+          </a:p>
+        </p:txBody>
+      </p:sp>
+      <p:pic>
+        <p:nvPicPr>
+          <p:cNvPr id="21" name="Image 6" descr="preencoded.png"/>
+          <p:cNvPicPr>
+            <a:picLocks noChangeAspect="1"/>
+          </p:cNvPicPr>
+          <p:nvPr/>
+        </p:nvPicPr>
+        <p:blipFill>
+          <a:blip r:embed="rId3"/>
+          <a:stretch>
+            <a:fillRect/>
+          </a:stretch>
+        </p:blipFill>
+        <p:spPr>
+          <a:xfrm>
             <a:off x="652516" y="3816340"/>
             <a:ext cx="158008" cy="158008"/>
           </a:xfrm>
@@ -3673,7 +3404,7 @@
           <a:bodyPr wrap="square" lIns="0" tIns="0" rIns="0" bIns="0" rtlCol="0" anchor="ctr"/>
           <a:lstStyle/>
           <a:p>
-            <a:pPr indent="0" marL="0">
+            <a:pPr marL="0" indent="0">
               <a:buNone/>
             </a:pPr>
             <a:r>
@@ -3712,7 +3443,7 @@
           <a:bodyPr wrap="square" rtlCol="0" anchor="ctr"/>
           <a:lstStyle/>
           <a:p>
-            <a:pPr indent="0" marL="0">
+            <a:pPr marL="0" indent="0">
               <a:buNone/>
             </a:pPr>
             <a:r>
@@ -3751,7 +3482,7 @@
           <a:bodyPr wrap="square" rtlCol="0" anchor="ctr"/>
           <a:lstStyle/>
           <a:p>
-            <a:pPr algn="r" indent="0" marL="0">
+            <a:pPr marL="0" indent="0" algn="r">
               <a:buNone/>
             </a:pPr>
             <a:r>
@@ -3766,45 +3497,6 @@
               <a:t>Day 2 · Section 5  ·  2/11</a:t>
             </a:r>
             <a:endParaRPr lang="en-US" sz="900" dirty="0"/>
-          </a:p>
-        </p:txBody>
-      </p:sp>
-      <p:sp>
-        <p:nvSpPr>
-          <p:cNvPr id="25" name="Text 16"/>
-          <p:cNvSpPr/>
-          <p:nvPr/>
-        </p:nvSpPr>
-        <p:spPr>
-          <a:xfrm>
-            <a:off x="548640" y="4462272"/>
-            <a:ext cx="8046720" cy="274320"/>
-          </a:xfrm>
-          <a:prstGeom prst="rect">
-            <a:avLst/>
-          </a:prstGeom>
-          <a:noFill/>
-          <a:ln/>
-        </p:spPr>
-        <p:txBody>
-          <a:bodyPr wrap="square" lIns="0" tIns="0" rIns="0" bIns="0" rtlCol="0" anchor="ctr"/>
-          <a:lstStyle/>
-          <a:p>
-            <a:pPr indent="0" marL="0">
-              <a:buNone/>
-            </a:pPr>
-            <a:r>
-              <a:rPr lang="en-US" sz="1000" i="1" dirty="0">
-                <a:solidFill>
-                  <a:srgbClr val="615C52"/>
-                </a:solidFill>
-                <a:latin typeface="Inter" pitchFamily="34" charset="0"/>
-                <a:ea typeface="Inter" pitchFamily="34" charset="-122"/>
-                <a:cs typeface="Inter" pitchFamily="34" charset="-120"/>
-              </a:rPr>
-              <a:t>▸ Six objectives spanning AI-written tests through AI-in-the-pipeline.</a:t>
-            </a:r>
-            <a:endParaRPr lang="en-US" sz="1000" dirty="0"/>
           </a:p>
         </p:txBody>
       </p:sp>
@@ -3824,6 +3516,7 @@
         <a:solidFill>
           <a:srgbClr val="F0EEE6"/>
         </a:solidFill>
+        <a:effectLst/>
       </p:bgPr>
     </p:bg>
     <p:spTree>
@@ -3861,11 +3554,11 @@
           <a:bodyPr wrap="square" lIns="0" tIns="0" rIns="0" bIns="0" rtlCol="0" anchor="ctr"/>
           <a:lstStyle/>
           <a:p>
-            <a:pPr indent="0" marL="0">
-              <a:buNone/>
-            </a:pPr>
-            <a:r>
-              <a:rPr lang="en-US" sz="1100" b="1" spc="200" kern="0" dirty="0">
+            <a:pPr marL="0" indent="0">
+              <a:buNone/>
+            </a:pPr>
+            <a:r>
+              <a:rPr lang="en-US" sz="1100" b="1" kern="0" spc="200" dirty="0">
                 <a:solidFill>
                   <a:srgbClr val="C25E40"/>
                 </a:solidFill>
@@ -3900,7 +3593,7 @@
           <a:bodyPr wrap="square" lIns="0" tIns="0" rIns="0" bIns="0" rtlCol="0" anchor="ctr"/>
           <a:lstStyle/>
           <a:p>
-            <a:pPr indent="0" marL="0">
+            <a:pPr marL="0" indent="0">
               <a:buNone/>
             </a:pPr>
             <a:r>
@@ -3920,73 +3613,7 @@
       </p:sp>
       <p:pic>
         <p:nvPicPr>
-          <p:cNvPr id="4" name="Image 0" descr="preencoded.png">    </p:cNvPr>
-          <p:cNvPicPr>
-            <a:picLocks noChangeAspect="1"/>
-          </p:cNvPicPr>
-          <p:nvPr/>
-        </p:nvPicPr>
-        <p:blipFill>
-          <a:blip r:embed="rId1"/>
-          <a:stretch>
-            <a:fillRect/>
-          </a:stretch>
-        </p:blipFill>
-        <p:spPr>
-          <a:xfrm>
-            <a:off x="8321040" y="411480"/>
-            <a:ext cx="347472" cy="292608"/>
-          </a:xfrm>
-          <a:prstGeom prst="rect">
-            <a:avLst/>
-          </a:prstGeom>
-        </p:spPr>
-      </p:pic>
-      <p:sp>
-        <p:nvSpPr>
-          <p:cNvPr id="5" name="Shape 2"/>
-          <p:cNvSpPr/>
-          <p:nvPr/>
-        </p:nvSpPr>
-        <p:spPr>
-          <a:xfrm>
-            <a:off x="548640" y="1417320"/>
-            <a:ext cx="8046720" cy="822960"/>
-          </a:xfrm>
-          <a:prstGeom prst="roundRect">
-            <a:avLst>
-              <a:gd name="adj" fmla="val 11111"/>
-            </a:avLst>
-          </a:prstGeom>
-          <a:solidFill>
-            <a:srgbClr val="F4E4DC"/>
-          </a:solidFill>
-          <a:ln/>
-        </p:spPr>
-      </p:sp>
-      <p:sp>
-        <p:nvSpPr>
-          <p:cNvPr id="6" name="Shape 3"/>
-          <p:cNvSpPr/>
-          <p:nvPr/>
-        </p:nvSpPr>
-        <p:spPr>
-          <a:xfrm>
-            <a:off x="804672" y="1591056"/>
-            <a:ext cx="457200" cy="457200"/>
-          </a:xfrm>
-          <a:prstGeom prst="ellipse">
-            <a:avLst/>
-          </a:prstGeom>
-          <a:solidFill>
-            <a:srgbClr val="D97757"/>
-          </a:solidFill>
-          <a:ln/>
-        </p:spPr>
-      </p:sp>
-      <p:pic>
-        <p:nvPicPr>
-          <p:cNvPr id="7" name="Image 1" descr="preencoded.png">    </p:cNvPr>
+          <p:cNvPr id="4" name="Image 0" descr="preencoded.png"/>
           <p:cNvPicPr>
             <a:picLocks noChangeAspect="1"/>
           </p:cNvPicPr>
@@ -4000,8 +3627,8 @@
         </p:blipFill>
         <p:spPr>
           <a:xfrm>
-            <a:off x="923544" y="1709928"/>
-            <a:ext cx="219456" cy="219456"/>
+            <a:off x="8321040" y="411480"/>
+            <a:ext cx="347472" cy="292608"/>
           </a:xfrm>
           <a:prstGeom prst="rect">
             <a:avLst/>
@@ -4010,94 +3637,43 @@
       </p:pic>
       <p:sp>
         <p:nvSpPr>
-          <p:cNvPr id="8" name="Text 4"/>
-          <p:cNvSpPr/>
-          <p:nvPr/>
-        </p:nvSpPr>
-        <p:spPr>
-          <a:xfrm>
-            <a:off x="1463040" y="1417320"/>
-            <a:ext cx="6949440" cy="822960"/>
-          </a:xfrm>
-          <a:prstGeom prst="rect">
-            <a:avLst/>
-          </a:prstGeom>
-          <a:noFill/>
-          <a:ln/>
-        </p:spPr>
-        <p:txBody>
-          <a:bodyPr wrap="square" lIns="0" tIns="0" rIns="0" bIns="0" rtlCol="0" anchor="ctr"/>
-          <a:lstStyle/>
-          <a:p>
-            <a:pPr indent="0" marL="0">
-              <a:buNone/>
-            </a:pPr>
-            <a:r>
-              <a:rPr lang="en-US" sz="1500" b="1" dirty="0">
-                <a:solidFill>
-                  <a:srgbClr val="C25E40"/>
-                </a:solidFill>
-                <a:latin typeface="Inter" pitchFamily="34" charset="0"/>
-                <a:ea typeface="Inter" pitchFamily="34" charset="-122"/>
-                <a:cs typeface="Inter" pitchFamily="34" charset="-120"/>
-              </a:rPr>
-              <a:t>Claude reads the implementation </a:t>
-            </a:r>
-            <a:pPr indent="0" marL="0">
-              <a:buNone/>
-            </a:pPr>
-            <a:r>
-              <a:rPr lang="en-US" sz="1500" dirty="0">
-                <a:solidFill>
-                  <a:srgbClr val="141413"/>
-                </a:solidFill>
-                <a:latin typeface="Inter" pitchFamily="34" charset="0"/>
-                <a:ea typeface="Inter" pitchFamily="34" charset="-122"/>
-                <a:cs typeface="Inter" pitchFamily="34" charset="-120"/>
-              </a:rPr>
-              <a:t>— you describe the cases, it writes the xUnit.</a:t>
-            </a:r>
-            <a:endParaRPr lang="en-US" sz="1500" dirty="0"/>
-          </a:p>
-        </p:txBody>
-      </p:sp>
-      <p:sp>
-        <p:nvSpPr>
-          <p:cNvPr id="9" name="Shape 5"/>
-          <p:cNvSpPr/>
-          <p:nvPr/>
-        </p:nvSpPr>
-        <p:spPr>
-          <a:xfrm>
-            <a:off x="548640" y="2423160"/>
-            <a:ext cx="3931920" cy="640080"/>
+          <p:cNvPr id="5" name="Shape 2"/>
+          <p:cNvSpPr/>
+          <p:nvPr/>
+        </p:nvSpPr>
+        <p:spPr>
+          <a:xfrm>
+            <a:off x="548640" y="1417320"/>
+            <a:ext cx="8046720" cy="822960"/>
           </a:xfrm>
           <a:prstGeom prst="roundRect">
             <a:avLst>
-              <a:gd name="adj" fmla="val 10000"/>
+              <a:gd name="adj" fmla="val 11111"/>
             </a:avLst>
           </a:prstGeom>
           <a:solidFill>
-            <a:srgbClr val="FBFAF6"/>
-          </a:solidFill>
-          <a:ln w="12700">
-            <a:solidFill>
-              <a:srgbClr val="D8D3C6"/>
-            </a:solidFill>
-            <a:prstDash val="solid"/>
-          </a:ln>
-        </p:spPr>
-      </p:sp>
-      <p:sp>
-        <p:nvSpPr>
-          <p:cNvPr id="10" name="Shape 6"/>
-          <p:cNvSpPr/>
-          <p:nvPr/>
-        </p:nvSpPr>
-        <p:spPr>
-          <a:xfrm>
-            <a:off x="694944" y="2542032"/>
-            <a:ext cx="402336" cy="402336"/>
+            <a:srgbClr val="F4E4DC"/>
+          </a:solidFill>
+          <a:ln/>
+        </p:spPr>
+        <p:txBody>
+          <a:bodyPr/>
+          <a:lstStyle/>
+          <a:p>
+            <a:endParaRPr lang="en-US"/>
+          </a:p>
+        </p:txBody>
+      </p:sp>
+      <p:sp>
+        <p:nvSpPr>
+          <p:cNvPr id="6" name="Shape 3"/>
+          <p:cNvSpPr/>
+          <p:nvPr/>
+        </p:nvSpPr>
+        <p:spPr>
+          <a:xfrm>
+            <a:off x="804672" y="1591056"/>
+            <a:ext cx="457200" cy="457200"/>
           </a:xfrm>
           <a:prstGeom prst="ellipse">
             <a:avLst/>
@@ -4107,10 +3683,17 @@
           </a:solidFill>
           <a:ln/>
         </p:spPr>
+        <p:txBody>
+          <a:bodyPr/>
+          <a:lstStyle/>
+          <a:p>
+            <a:endParaRPr lang="en-US"/>
+          </a:p>
+        </p:txBody>
       </p:sp>
       <p:pic>
         <p:nvPicPr>
-          <p:cNvPr id="11" name="Image 2" descr="preencoded.png">    </p:cNvPr>
+          <p:cNvPr id="7" name="Image 1" descr="preencoded.png"/>
           <p:cNvPicPr>
             <a:picLocks noChangeAspect="1"/>
           </p:cNvPicPr>
@@ -4124,8 +3707,8 @@
         </p:blipFill>
         <p:spPr>
           <a:xfrm>
-            <a:off x="799551" y="2646639"/>
-            <a:ext cx="193121" cy="193121"/>
+            <a:off x="923544" y="1709928"/>
+            <a:ext cx="219456" cy="219456"/>
           </a:xfrm>
           <a:prstGeom prst="rect">
             <a:avLst/>
@@ -4134,30 +3717,41 @@
       </p:pic>
       <p:sp>
         <p:nvSpPr>
-          <p:cNvPr id="12" name="Text 7"/>
-          <p:cNvSpPr/>
-          <p:nvPr/>
-        </p:nvSpPr>
-        <p:spPr>
-          <a:xfrm>
-            <a:off x="1325880" y="2496312"/>
-            <a:ext cx="3063240" cy="292608"/>
-          </a:xfrm>
-          <a:prstGeom prst="rect">
-            <a:avLst/>
-          </a:prstGeom>
-          <a:noFill/>
-          <a:ln/>
-        </p:spPr>
-        <p:txBody>
-          <a:bodyPr wrap="square" lIns="0" tIns="0" rIns="0" bIns="0" rtlCol="0" anchor="ctr"/>
-          <a:lstStyle/>
-          <a:p>
-            <a:pPr indent="0" marL="0">
-              <a:buNone/>
-            </a:pPr>
-            <a:r>
-              <a:rPr lang="en-US" sz="1400" b="1" dirty="0">
+          <p:cNvPr id="8" name="Text 4"/>
+          <p:cNvSpPr/>
+          <p:nvPr/>
+        </p:nvSpPr>
+        <p:spPr>
+          <a:xfrm>
+            <a:off x="1463040" y="1417320"/>
+            <a:ext cx="6949440" cy="822960"/>
+          </a:xfrm>
+          <a:prstGeom prst="rect">
+            <a:avLst/>
+          </a:prstGeom>
+          <a:noFill/>
+          <a:ln/>
+        </p:spPr>
+        <p:txBody>
+          <a:bodyPr wrap="square" lIns="0" tIns="0" rIns="0" bIns="0" rtlCol="0" anchor="ctr"/>
+          <a:lstStyle/>
+          <a:p>
+            <a:pPr marL="0" indent="0">
+              <a:buNone/>
+            </a:pPr>
+            <a:r>
+              <a:rPr lang="en-US" sz="1500" b="1" dirty="0">
+                <a:solidFill>
+                  <a:srgbClr val="C25E40"/>
+                </a:solidFill>
+                <a:latin typeface="Inter" pitchFamily="34" charset="0"/>
+                <a:ea typeface="Inter" pitchFamily="34" charset="-122"/>
+                <a:cs typeface="Inter" pitchFamily="34" charset="-120"/>
+              </a:rPr>
+              <a:t>Claude reads the implementation </a:t>
+            </a:r>
+            <a:r>
+              <a:rPr lang="en-US" sz="1500" dirty="0">
                 <a:solidFill>
                   <a:srgbClr val="141413"/>
                 </a:solidFill>
@@ -4165,60 +3759,21 @@
                 <a:ea typeface="Inter" pitchFamily="34" charset="-122"/>
                 <a:cs typeface="Inter" pitchFamily="34" charset="-120"/>
               </a:rPr>
-              <a:t>Happy path</a:t>
-            </a:r>
-            <a:endParaRPr lang="en-US" sz="1400" dirty="0"/>
-          </a:p>
-        </p:txBody>
-      </p:sp>
-      <p:sp>
-        <p:nvSpPr>
-          <p:cNvPr id="13" name="Text 8"/>
-          <p:cNvSpPr/>
-          <p:nvPr/>
-        </p:nvSpPr>
-        <p:spPr>
-          <a:xfrm>
-            <a:off x="1325880" y="2770632"/>
-            <a:ext cx="3063240" cy="256032"/>
-          </a:xfrm>
-          <a:prstGeom prst="rect">
-            <a:avLst/>
-          </a:prstGeom>
-          <a:noFill/>
-          <a:ln/>
-        </p:spPr>
-        <p:txBody>
-          <a:bodyPr wrap="square" lIns="0" tIns="0" rIns="0" bIns="0" rtlCol="0" anchor="ctr"/>
-          <a:lstStyle/>
-          <a:p>
-            <a:pPr indent="0" marL="0">
-              <a:buNone/>
-            </a:pPr>
-            <a:r>
-              <a:rPr lang="en-US" sz="1100" dirty="0">
-                <a:solidFill>
-                  <a:srgbClr val="615C52"/>
-                </a:solidFill>
-                <a:latin typeface="Inter" pitchFamily="34" charset="0"/>
-                <a:ea typeface="Inter" pitchFamily="34" charset="-122"/>
-                <a:cs typeface="Inter" pitchFamily="34" charset="-120"/>
-              </a:rPr>
-              <a:t>The normal, expected flow</a:t>
-            </a:r>
-            <a:endParaRPr lang="en-US" sz="1100" dirty="0"/>
-          </a:p>
-        </p:txBody>
-      </p:sp>
-      <p:sp>
-        <p:nvSpPr>
-          <p:cNvPr id="14" name="Shape 9"/>
-          <p:cNvSpPr/>
-          <p:nvPr/>
-        </p:nvSpPr>
-        <p:spPr>
-          <a:xfrm>
-            <a:off x="4663440" y="2423160"/>
+              <a:t>— you describe the cases, it writes the xUnit.</a:t>
+            </a:r>
+            <a:endParaRPr lang="en-US" sz="1500" dirty="0"/>
+          </a:p>
+        </p:txBody>
+      </p:sp>
+      <p:sp>
+        <p:nvSpPr>
+          <p:cNvPr id="9" name="Shape 5"/>
+          <p:cNvSpPr/>
+          <p:nvPr/>
+        </p:nvSpPr>
+        <p:spPr>
+          <a:xfrm>
+            <a:off x="548640" y="2423160"/>
             <a:ext cx="3931920" cy="640080"/>
           </a:xfrm>
           <a:prstGeom prst="roundRect">
@@ -4236,16 +3791,23 @@
             <a:prstDash val="solid"/>
           </a:ln>
         </p:spPr>
-      </p:sp>
-      <p:sp>
-        <p:nvSpPr>
-          <p:cNvPr id="15" name="Shape 10"/>
-          <p:cNvSpPr/>
-          <p:nvPr/>
-        </p:nvSpPr>
-        <p:spPr>
-          <a:xfrm>
-            <a:off x="4809744" y="2542032"/>
+        <p:txBody>
+          <a:bodyPr/>
+          <a:lstStyle/>
+          <a:p>
+            <a:endParaRPr lang="en-US"/>
+          </a:p>
+        </p:txBody>
+      </p:sp>
+      <p:sp>
+        <p:nvSpPr>
+          <p:cNvPr id="10" name="Shape 6"/>
+          <p:cNvSpPr/>
+          <p:nvPr/>
+        </p:nvSpPr>
+        <p:spPr>
+          <a:xfrm>
+            <a:off x="694944" y="2542032"/>
             <a:ext cx="402336" cy="402336"/>
           </a:xfrm>
           <a:prstGeom prst="ellipse">
@@ -4256,10 +3818,17 @@
           </a:solidFill>
           <a:ln/>
         </p:spPr>
+        <p:txBody>
+          <a:bodyPr/>
+          <a:lstStyle/>
+          <a:p>
+            <a:endParaRPr lang="en-US"/>
+          </a:p>
+        </p:txBody>
       </p:sp>
       <p:pic>
         <p:nvPicPr>
-          <p:cNvPr id="16" name="Image 3" descr="preencoded.png">    </p:cNvPr>
+          <p:cNvPr id="11" name="Image 2" descr="preencoded.png"/>
           <p:cNvPicPr>
             <a:picLocks noChangeAspect="1"/>
           </p:cNvPicPr>
@@ -4273,7 +3842,7 @@
         </p:blipFill>
         <p:spPr>
           <a:xfrm>
-            <a:off x="4914351" y="2646639"/>
+            <a:off x="799551" y="2646639"/>
             <a:ext cx="193121" cy="193121"/>
           </a:xfrm>
           <a:prstGeom prst="rect">
@@ -4283,13 +3852,13 @@
       </p:pic>
       <p:sp>
         <p:nvSpPr>
-          <p:cNvPr id="17" name="Text 11"/>
-          <p:cNvSpPr/>
-          <p:nvPr/>
-        </p:nvSpPr>
-        <p:spPr>
-          <a:xfrm>
-            <a:off x="5440680" y="2496312"/>
+          <p:cNvPr id="12" name="Text 7"/>
+          <p:cNvSpPr/>
+          <p:nvPr/>
+        </p:nvSpPr>
+        <p:spPr>
+          <a:xfrm>
+            <a:off x="1325880" y="2496312"/>
             <a:ext cx="3063240" cy="292608"/>
           </a:xfrm>
           <a:prstGeom prst="rect">
@@ -4302,7 +3871,7 @@
           <a:bodyPr wrap="square" lIns="0" tIns="0" rIns="0" bIns="0" rtlCol="0" anchor="ctr"/>
           <a:lstStyle/>
           <a:p>
-            <a:pPr indent="0" marL="0">
+            <a:pPr marL="0" indent="0">
               <a:buNone/>
             </a:pPr>
             <a:r>
@@ -4314,7 +3883,7 @@
                 <a:ea typeface="Inter" pitchFamily="34" charset="-122"/>
                 <a:cs typeface="Inter" pitchFamily="34" charset="-120"/>
               </a:rPr>
-              <a:t>Multi-tool</a:t>
+              <a:t>Happy path</a:t>
             </a:r>
             <a:endParaRPr lang="en-US" sz="1400" dirty="0"/>
           </a:p>
@@ -4322,13 +3891,13 @@
       </p:sp>
       <p:sp>
         <p:nvSpPr>
-          <p:cNvPr id="18" name="Text 12"/>
-          <p:cNvSpPr/>
-          <p:nvPr/>
-        </p:nvSpPr>
-        <p:spPr>
-          <a:xfrm>
-            <a:off x="5440680" y="2770632"/>
+          <p:cNvPr id="13" name="Text 8"/>
+          <p:cNvSpPr/>
+          <p:nvPr/>
+        </p:nvSpPr>
+        <p:spPr>
+          <a:xfrm>
+            <a:off x="1325880" y="2770632"/>
             <a:ext cx="3063240" cy="256032"/>
           </a:xfrm>
           <a:prstGeom prst="rect">
@@ -4341,7 +3910,7 @@
           <a:bodyPr wrap="square" lIns="0" tIns="0" rIns="0" bIns="0" rtlCol="0" anchor="ctr"/>
           <a:lstStyle/>
           <a:p>
-            <a:pPr indent="0" marL="0">
+            <a:pPr marL="0" indent="0">
               <a:buNone/>
             </a:pPr>
             <a:r>
@@ -4353,7 +3922,7 @@
                 <a:ea typeface="Inter" pitchFamily="34" charset="-122"/>
                 <a:cs typeface="Inter" pitchFamily="34" charset="-120"/>
               </a:rPr>
-              <a:t>Several tool calls in one turn</a:t>
+              <a:t>The normal, expected flow</a:t>
             </a:r>
             <a:endParaRPr lang="en-US" sz="1100" dirty="0"/>
           </a:p>
@@ -4361,13 +3930,13 @@
       </p:sp>
       <p:sp>
         <p:nvSpPr>
-          <p:cNvPr id="19" name="Shape 13"/>
-          <p:cNvSpPr/>
-          <p:nvPr/>
-        </p:nvSpPr>
-        <p:spPr>
-          <a:xfrm>
-            <a:off x="548640" y="3191256"/>
+          <p:cNvPr id="14" name="Shape 9"/>
+          <p:cNvSpPr/>
+          <p:nvPr/>
+        </p:nvSpPr>
+        <p:spPr>
+          <a:xfrm>
+            <a:off x="4663440" y="2423160"/>
             <a:ext cx="3931920" cy="640080"/>
           </a:xfrm>
           <a:prstGeom prst="roundRect">
@@ -4385,16 +3954,23 @@
             <a:prstDash val="solid"/>
           </a:ln>
         </p:spPr>
-      </p:sp>
-      <p:sp>
-        <p:nvSpPr>
-          <p:cNvPr id="20" name="Shape 14"/>
-          <p:cNvSpPr/>
-          <p:nvPr/>
-        </p:nvSpPr>
-        <p:spPr>
-          <a:xfrm>
-            <a:off x="694944" y="3310128"/>
+        <p:txBody>
+          <a:bodyPr/>
+          <a:lstStyle/>
+          <a:p>
+            <a:endParaRPr lang="en-US"/>
+          </a:p>
+        </p:txBody>
+      </p:sp>
+      <p:sp>
+        <p:nvSpPr>
+          <p:cNvPr id="15" name="Shape 10"/>
+          <p:cNvSpPr/>
+          <p:nvPr/>
+        </p:nvSpPr>
+        <p:spPr>
+          <a:xfrm>
+            <a:off x="4809744" y="2542032"/>
             <a:ext cx="402336" cy="402336"/>
           </a:xfrm>
           <a:prstGeom prst="ellipse">
@@ -4405,10 +3981,17 @@
           </a:solidFill>
           <a:ln/>
         </p:spPr>
+        <p:txBody>
+          <a:bodyPr/>
+          <a:lstStyle/>
+          <a:p>
+            <a:endParaRPr lang="en-US"/>
+          </a:p>
+        </p:txBody>
       </p:sp>
       <p:pic>
         <p:nvPicPr>
-          <p:cNvPr id="21" name="Image 4" descr="preencoded.png">    </p:cNvPr>
+          <p:cNvPr id="16" name="Image 3" descr="preencoded.png"/>
           <p:cNvPicPr>
             <a:picLocks noChangeAspect="1"/>
           </p:cNvPicPr>
@@ -4422,7 +4005,7 @@
         </p:blipFill>
         <p:spPr>
           <a:xfrm>
-            <a:off x="799551" y="3414735"/>
+            <a:off x="4914351" y="2646639"/>
             <a:ext cx="193121" cy="193121"/>
           </a:xfrm>
           <a:prstGeom prst="rect">
@@ -4432,13 +4015,13 @@
       </p:pic>
       <p:sp>
         <p:nvSpPr>
-          <p:cNvPr id="22" name="Text 15"/>
-          <p:cNvSpPr/>
-          <p:nvPr/>
-        </p:nvSpPr>
-        <p:spPr>
-          <a:xfrm>
-            <a:off x="1325880" y="3264408"/>
+          <p:cNvPr id="17" name="Text 11"/>
+          <p:cNvSpPr/>
+          <p:nvPr/>
+        </p:nvSpPr>
+        <p:spPr>
+          <a:xfrm>
+            <a:off x="5440680" y="2496312"/>
             <a:ext cx="3063240" cy="292608"/>
           </a:xfrm>
           <a:prstGeom prst="rect">
@@ -4451,7 +4034,7 @@
           <a:bodyPr wrap="square" lIns="0" tIns="0" rIns="0" bIns="0" rtlCol="0" anchor="ctr"/>
           <a:lstStyle/>
           <a:p>
-            <a:pPr indent="0" marL="0">
+            <a:pPr marL="0" indent="0">
               <a:buNone/>
             </a:pPr>
             <a:r>
@@ -4463,7 +4046,7 @@
                 <a:ea typeface="Inter" pitchFamily="34" charset="-122"/>
                 <a:cs typeface="Inter" pitchFamily="34" charset="-120"/>
               </a:rPr>
-              <a:t>Tool error</a:t>
+              <a:t>Multi-tool</a:t>
             </a:r>
             <a:endParaRPr lang="en-US" sz="1400" dirty="0"/>
           </a:p>
@@ -4471,13 +4054,13 @@
       </p:sp>
       <p:sp>
         <p:nvSpPr>
-          <p:cNvPr id="23" name="Text 16"/>
-          <p:cNvSpPr/>
-          <p:nvPr/>
-        </p:nvSpPr>
-        <p:spPr>
-          <a:xfrm>
-            <a:off x="1325880" y="3538728"/>
+          <p:cNvPr id="18" name="Text 12"/>
+          <p:cNvSpPr/>
+          <p:nvPr/>
+        </p:nvSpPr>
+        <p:spPr>
+          <a:xfrm>
+            <a:off x="5440680" y="2770632"/>
             <a:ext cx="3063240" cy="256032"/>
           </a:xfrm>
           <a:prstGeom prst="rect">
@@ -4490,7 +4073,7 @@
           <a:bodyPr wrap="square" lIns="0" tIns="0" rIns="0" bIns="0" rtlCol="0" anchor="ctr"/>
           <a:lstStyle/>
           <a:p>
-            <a:pPr indent="0" marL="0">
+            <a:pPr marL="0" indent="0">
               <a:buNone/>
             </a:pPr>
             <a:r>
@@ -4502,7 +4085,7 @@
                 <a:ea typeface="Inter" pitchFamily="34" charset="-122"/>
                 <a:cs typeface="Inter" pitchFamily="34" charset="-120"/>
               </a:rPr>
-              <a:t>A tool throws or returns an error</a:t>
+              <a:t>Several tool calls in one turn</a:t>
             </a:r>
             <a:endParaRPr lang="en-US" sz="1100" dirty="0"/>
           </a:p>
@@ -4510,13 +4093,13 @@
       </p:sp>
       <p:sp>
         <p:nvSpPr>
-          <p:cNvPr id="24" name="Shape 17"/>
-          <p:cNvSpPr/>
-          <p:nvPr/>
-        </p:nvSpPr>
-        <p:spPr>
-          <a:xfrm>
-            <a:off x="4663440" y="3191256"/>
+          <p:cNvPr id="19" name="Shape 13"/>
+          <p:cNvSpPr/>
+          <p:nvPr/>
+        </p:nvSpPr>
+        <p:spPr>
+          <a:xfrm>
+            <a:off x="548640" y="3191256"/>
             <a:ext cx="3931920" cy="640080"/>
           </a:xfrm>
           <a:prstGeom prst="roundRect">
@@ -4534,16 +4117,23 @@
             <a:prstDash val="solid"/>
           </a:ln>
         </p:spPr>
-      </p:sp>
-      <p:sp>
-        <p:nvSpPr>
-          <p:cNvPr id="25" name="Shape 18"/>
-          <p:cNvSpPr/>
-          <p:nvPr/>
-        </p:nvSpPr>
-        <p:spPr>
-          <a:xfrm>
-            <a:off x="4809744" y="3310128"/>
+        <p:txBody>
+          <a:bodyPr/>
+          <a:lstStyle/>
+          <a:p>
+            <a:endParaRPr lang="en-US"/>
+          </a:p>
+        </p:txBody>
+      </p:sp>
+      <p:sp>
+        <p:nvSpPr>
+          <p:cNvPr id="20" name="Shape 14"/>
+          <p:cNvSpPr/>
+          <p:nvPr/>
+        </p:nvSpPr>
+        <p:spPr>
+          <a:xfrm>
+            <a:off x="694944" y="3310128"/>
             <a:ext cx="402336" cy="402336"/>
           </a:xfrm>
           <a:prstGeom prst="ellipse">
@@ -4554,10 +4144,17 @@
           </a:solidFill>
           <a:ln/>
         </p:spPr>
+        <p:txBody>
+          <a:bodyPr/>
+          <a:lstStyle/>
+          <a:p>
+            <a:endParaRPr lang="en-US"/>
+          </a:p>
+        </p:txBody>
       </p:sp>
       <p:pic>
         <p:nvPicPr>
-          <p:cNvPr id="26" name="Image 5" descr="preencoded.png">    </p:cNvPr>
+          <p:cNvPr id="21" name="Image 4" descr="preencoded.png"/>
           <p:cNvPicPr>
             <a:picLocks noChangeAspect="1"/>
           </p:cNvPicPr>
@@ -4571,6 +4168,169 @@
         </p:blipFill>
         <p:spPr>
           <a:xfrm>
+            <a:off x="799551" y="3414735"/>
+            <a:ext cx="193121" cy="193121"/>
+          </a:xfrm>
+          <a:prstGeom prst="rect">
+            <a:avLst/>
+          </a:prstGeom>
+        </p:spPr>
+      </p:pic>
+      <p:sp>
+        <p:nvSpPr>
+          <p:cNvPr id="22" name="Text 15"/>
+          <p:cNvSpPr/>
+          <p:nvPr/>
+        </p:nvSpPr>
+        <p:spPr>
+          <a:xfrm>
+            <a:off x="1325880" y="3264408"/>
+            <a:ext cx="3063240" cy="292608"/>
+          </a:xfrm>
+          <a:prstGeom prst="rect">
+            <a:avLst/>
+          </a:prstGeom>
+          <a:noFill/>
+          <a:ln/>
+        </p:spPr>
+        <p:txBody>
+          <a:bodyPr wrap="square" lIns="0" tIns="0" rIns="0" bIns="0" rtlCol="0" anchor="ctr"/>
+          <a:lstStyle/>
+          <a:p>
+            <a:pPr marL="0" indent="0">
+              <a:buNone/>
+            </a:pPr>
+            <a:r>
+              <a:rPr lang="en-US" sz="1400" b="1" dirty="0">
+                <a:solidFill>
+                  <a:srgbClr val="141413"/>
+                </a:solidFill>
+                <a:latin typeface="Inter" pitchFamily="34" charset="0"/>
+                <a:ea typeface="Inter" pitchFamily="34" charset="-122"/>
+                <a:cs typeface="Inter" pitchFamily="34" charset="-120"/>
+              </a:rPr>
+              <a:t>Tool error</a:t>
+            </a:r>
+            <a:endParaRPr lang="en-US" sz="1400" dirty="0"/>
+          </a:p>
+        </p:txBody>
+      </p:sp>
+      <p:sp>
+        <p:nvSpPr>
+          <p:cNvPr id="23" name="Text 16"/>
+          <p:cNvSpPr/>
+          <p:nvPr/>
+        </p:nvSpPr>
+        <p:spPr>
+          <a:xfrm>
+            <a:off x="1325880" y="3538728"/>
+            <a:ext cx="3063240" cy="256032"/>
+          </a:xfrm>
+          <a:prstGeom prst="rect">
+            <a:avLst/>
+          </a:prstGeom>
+          <a:noFill/>
+          <a:ln/>
+        </p:spPr>
+        <p:txBody>
+          <a:bodyPr wrap="square" lIns="0" tIns="0" rIns="0" bIns="0" rtlCol="0" anchor="ctr"/>
+          <a:lstStyle/>
+          <a:p>
+            <a:pPr marL="0" indent="0">
+              <a:buNone/>
+            </a:pPr>
+            <a:r>
+              <a:rPr lang="en-US" sz="1100" dirty="0">
+                <a:solidFill>
+                  <a:srgbClr val="615C52"/>
+                </a:solidFill>
+                <a:latin typeface="Inter" pitchFamily="34" charset="0"/>
+                <a:ea typeface="Inter" pitchFamily="34" charset="-122"/>
+                <a:cs typeface="Inter" pitchFamily="34" charset="-120"/>
+              </a:rPr>
+              <a:t>A tool throws or returns an error</a:t>
+            </a:r>
+            <a:endParaRPr lang="en-US" sz="1100" dirty="0"/>
+          </a:p>
+        </p:txBody>
+      </p:sp>
+      <p:sp>
+        <p:nvSpPr>
+          <p:cNvPr id="24" name="Shape 17"/>
+          <p:cNvSpPr/>
+          <p:nvPr/>
+        </p:nvSpPr>
+        <p:spPr>
+          <a:xfrm>
+            <a:off x="4663440" y="3191256"/>
+            <a:ext cx="3931920" cy="640080"/>
+          </a:xfrm>
+          <a:prstGeom prst="roundRect">
+            <a:avLst>
+              <a:gd name="adj" fmla="val 10000"/>
+            </a:avLst>
+          </a:prstGeom>
+          <a:solidFill>
+            <a:srgbClr val="FBFAF6"/>
+          </a:solidFill>
+          <a:ln w="12700">
+            <a:solidFill>
+              <a:srgbClr val="D8D3C6"/>
+            </a:solidFill>
+            <a:prstDash val="solid"/>
+          </a:ln>
+        </p:spPr>
+        <p:txBody>
+          <a:bodyPr/>
+          <a:lstStyle/>
+          <a:p>
+            <a:endParaRPr lang="en-US"/>
+          </a:p>
+        </p:txBody>
+      </p:sp>
+      <p:sp>
+        <p:nvSpPr>
+          <p:cNvPr id="25" name="Shape 18"/>
+          <p:cNvSpPr/>
+          <p:nvPr/>
+        </p:nvSpPr>
+        <p:spPr>
+          <a:xfrm>
+            <a:off x="4809744" y="3310128"/>
+            <a:ext cx="402336" cy="402336"/>
+          </a:xfrm>
+          <a:prstGeom prst="ellipse">
+            <a:avLst/>
+          </a:prstGeom>
+          <a:solidFill>
+            <a:srgbClr val="D97757"/>
+          </a:solidFill>
+          <a:ln/>
+        </p:spPr>
+        <p:txBody>
+          <a:bodyPr/>
+          <a:lstStyle/>
+          <a:p>
+            <a:endParaRPr lang="en-US"/>
+          </a:p>
+        </p:txBody>
+      </p:sp>
+      <p:pic>
+        <p:nvPicPr>
+          <p:cNvPr id="26" name="Image 5" descr="preencoded.png"/>
+          <p:cNvPicPr>
+            <a:picLocks noChangeAspect="1"/>
+          </p:cNvPicPr>
+          <p:nvPr/>
+        </p:nvPicPr>
+        <p:blipFill>
+          <a:blip r:embed="rId7"/>
+          <a:stretch>
+            <a:fillRect/>
+          </a:stretch>
+        </p:blipFill>
+        <p:spPr>
+          <a:xfrm>
             <a:off x="4914351" y="3414735"/>
             <a:ext cx="193121" cy="193121"/>
           </a:xfrm>
@@ -4600,7 +4360,7 @@
           <a:bodyPr wrap="square" lIns="0" tIns="0" rIns="0" bIns="0" rtlCol="0" anchor="ctr"/>
           <a:lstStyle/>
           <a:p>
-            <a:pPr indent="0" marL="0">
+            <a:pPr marL="0" indent="0">
               <a:buNone/>
             </a:pPr>
             <a:r>
@@ -4639,7 +4399,7 @@
           <a:bodyPr wrap="square" lIns="0" tIns="0" rIns="0" bIns="0" rtlCol="0" anchor="ctr"/>
           <a:lstStyle/>
           <a:p>
-            <a:pPr indent="0" marL="0">
+            <a:pPr marL="0" indent="0">
               <a:buNone/>
             </a:pPr>
             <a:r>
@@ -4678,7 +4438,7 @@
           <a:bodyPr wrap="square" rtlCol="0" anchor="ctr"/>
           <a:lstStyle/>
           <a:p>
-            <a:pPr indent="0" marL="0">
+            <a:pPr marL="0" indent="0">
               <a:buNone/>
             </a:pPr>
             <a:r>
@@ -4717,7 +4477,7 @@
           <a:bodyPr wrap="square" rtlCol="0" anchor="ctr"/>
           <a:lstStyle/>
           <a:p>
-            <a:pPr algn="r" indent="0" marL="0">
+            <a:pPr marL="0" indent="0" algn="r">
               <a:buNone/>
             </a:pPr>
             <a:r>
@@ -4732,45 +4492,6 @@
               <a:t>Day 2 · Section 5  ·  3/11</a:t>
             </a:r>
             <a:endParaRPr lang="en-US" sz="900" dirty="0"/>
-          </a:p>
-        </p:txBody>
-      </p:sp>
-      <p:sp>
-        <p:nvSpPr>
-          <p:cNvPr id="31" name="Text 23"/>
-          <p:cNvSpPr/>
-          <p:nvPr/>
-        </p:nvSpPr>
-        <p:spPr>
-          <a:xfrm>
-            <a:off x="548640" y="4462272"/>
-            <a:ext cx="8046720" cy="274320"/>
-          </a:xfrm>
-          <a:prstGeom prst="rect">
-            <a:avLst/>
-          </a:prstGeom>
-          <a:noFill/>
-          <a:ln/>
-        </p:spPr>
-        <p:txBody>
-          <a:bodyPr wrap="square" lIns="0" tIns="0" rIns="0" bIns="0" rtlCol="0" anchor="ctr"/>
-          <a:lstStyle/>
-          <a:p>
-            <a:pPr indent="0" marL="0">
-              <a:buNone/>
-            </a:pPr>
-            <a:r>
-              <a:rPr lang="en-US" sz="1000" i="1" dirty="0">
-                <a:solidFill>
-                  <a:srgbClr val="615C52"/>
-                </a:solidFill>
-                <a:latin typeface="Inter" pitchFamily="34" charset="0"/>
-                <a:ea typeface="Inter" pitchFamily="34" charset="-122"/>
-                <a:cs typeface="Inter" pitchFamily="34" charset="-120"/>
-              </a:rPr>
-              <a:t>▸ Name the scenarios; Claude reads the code and writes the assertions.</a:t>
-            </a:r>
-            <a:endParaRPr lang="en-US" sz="1000" dirty="0"/>
           </a:p>
         </p:txBody>
       </p:sp>
@@ -4790,6 +4511,7 @@
         <a:solidFill>
           <a:srgbClr val="F0EEE6"/>
         </a:solidFill>
+        <a:effectLst/>
       </p:bgPr>
     </p:bg>
     <p:spTree>
@@ -4827,11 +4549,11 @@
           <a:bodyPr wrap="square" lIns="0" tIns="0" rIns="0" bIns="0" rtlCol="0" anchor="ctr"/>
           <a:lstStyle/>
           <a:p>
-            <a:pPr indent="0" marL="0">
-              <a:buNone/>
-            </a:pPr>
-            <a:r>
-              <a:rPr lang="en-US" sz="1100" b="1" spc="200" kern="0" dirty="0">
+            <a:pPr marL="0" indent="0">
+              <a:buNone/>
+            </a:pPr>
+            <a:r>
+              <a:rPr lang="en-US" sz="1100" b="1" kern="0" spc="200" dirty="0">
                 <a:solidFill>
                   <a:srgbClr val="C25E40"/>
                 </a:solidFill>
@@ -4866,7 +4588,7 @@
           <a:bodyPr wrap="square" lIns="0" tIns="0" rIns="0" bIns="0" rtlCol="0" anchor="ctr"/>
           <a:lstStyle/>
           <a:p>
-            <a:pPr indent="0" marL="0">
+            <a:pPr marL="0" indent="0">
               <a:buNone/>
             </a:pPr>
             <a:r>
@@ -4886,80 +4608,7 @@
       </p:sp>
       <p:pic>
         <p:nvPicPr>
-          <p:cNvPr id="4" name="Image 0" descr="preencoded.png">    </p:cNvPr>
-          <p:cNvPicPr>
-            <a:picLocks noChangeAspect="1"/>
-          </p:cNvPicPr>
-          <p:nvPr/>
-        </p:nvPicPr>
-        <p:blipFill>
-          <a:blip r:embed="rId1"/>
-          <a:stretch>
-            <a:fillRect/>
-          </a:stretch>
-        </p:blipFill>
-        <p:spPr>
-          <a:xfrm>
-            <a:off x="8321040" y="411480"/>
-            <a:ext cx="347472" cy="292608"/>
-          </a:xfrm>
-          <a:prstGeom prst="rect">
-            <a:avLst/>
-          </a:prstGeom>
-        </p:spPr>
-      </p:pic>
-      <p:sp>
-        <p:nvSpPr>
-          <p:cNvPr id="5" name="Shape 2"/>
-          <p:cNvSpPr/>
-          <p:nvPr/>
-        </p:nvSpPr>
-        <p:spPr>
-          <a:xfrm>
-            <a:off x="548640" y="1417320"/>
-            <a:ext cx="8046720" cy="777240"/>
-          </a:xfrm>
-          <a:prstGeom prst="roundRect">
-            <a:avLst>
-              <a:gd name="adj" fmla="val 11765"/>
-            </a:avLst>
-          </a:prstGeom>
-          <a:solidFill>
-            <a:srgbClr val="F4E4DC"/>
-          </a:solidFill>
-          <a:ln/>
-          <a:effectLst>
-            <a:outerShdw sx="100000" sy="100000" kx="0" ky="0" algn="bl" rotWithShape="0" blurRad="88900" dist="38100" dir="5400000">
-              <a:srgbClr val="000000">
-                <a:alpha val="10000"/>
-              </a:srgbClr>
-            </a:outerShdw>
-          </a:effectLst>
-        </p:spPr>
-      </p:sp>
-      <p:sp>
-        <p:nvSpPr>
-          <p:cNvPr id="6" name="Shape 3"/>
-          <p:cNvSpPr/>
-          <p:nvPr/>
-        </p:nvSpPr>
-        <p:spPr>
-          <a:xfrm>
-            <a:off x="804672" y="1572768"/>
-            <a:ext cx="457200" cy="457200"/>
-          </a:xfrm>
-          <a:prstGeom prst="ellipse">
-            <a:avLst/>
-          </a:prstGeom>
-          <a:solidFill>
-            <a:srgbClr val="D97757"/>
-          </a:solidFill>
-          <a:ln/>
-        </p:spPr>
-      </p:sp>
-      <p:pic>
-        <p:nvPicPr>
-          <p:cNvPr id="7" name="Image 1" descr="preencoded.png">    </p:cNvPr>
+          <p:cNvPr id="4" name="Image 0" descr="preencoded.png"/>
           <p:cNvPicPr>
             <a:picLocks noChangeAspect="1"/>
           </p:cNvPicPr>
@@ -4973,8 +4622,8 @@
         </p:blipFill>
         <p:spPr>
           <a:xfrm>
-            <a:off x="923544" y="1691640"/>
-            <a:ext cx="219456" cy="219456"/>
+            <a:off x="8321040" y="411480"/>
+            <a:ext cx="347472" cy="292608"/>
           </a:xfrm>
           <a:prstGeom prst="rect">
             <a:avLst/>
@@ -4983,80 +4632,50 @@
       </p:pic>
       <p:sp>
         <p:nvSpPr>
-          <p:cNvPr id="8" name="Text 4"/>
-          <p:cNvSpPr/>
-          <p:nvPr/>
-        </p:nvSpPr>
-        <p:spPr>
-          <a:xfrm>
-            <a:off x="1463040" y="1417320"/>
-            <a:ext cx="6949440" cy="777240"/>
-          </a:xfrm>
-          <a:prstGeom prst="rect">
-            <a:avLst/>
-          </a:prstGeom>
-          <a:noFill/>
-          <a:ln/>
-        </p:spPr>
-        <p:txBody>
-          <a:bodyPr wrap="square" lIns="0" tIns="0" rIns="0" bIns="0" rtlCol="0" anchor="ctr"/>
-          <a:lstStyle/>
-          <a:p>
-            <a:pPr indent="0" marL="0">
-              <a:buNone/>
-            </a:pPr>
-            <a:r>
-              <a:rPr lang="en-US" sz="1450" b="1" dirty="0">
-                <a:solidFill>
-                  <a:srgbClr val="141413"/>
-                </a:solidFill>
-                <a:latin typeface="Inter" pitchFamily="34" charset="0"/>
-                <a:ea typeface="Inter" pitchFamily="34" charset="-122"/>
-                <a:cs typeface="Inter" pitchFamily="34" charset="-120"/>
-              </a:rPr>
-              <a:t>Prompt Claude to attack its own code — surface the failures you wouldn't think of.</a:t>
-            </a:r>
-            <a:endParaRPr lang="en-US" sz="1450" dirty="0"/>
-          </a:p>
-        </p:txBody>
-      </p:sp>
-      <p:sp>
-        <p:nvSpPr>
-          <p:cNvPr id="9" name="Shape 5"/>
-          <p:cNvSpPr/>
-          <p:nvPr/>
-        </p:nvSpPr>
-        <p:spPr>
-          <a:xfrm>
-            <a:off x="548640" y="2395728"/>
-            <a:ext cx="3931920" cy="475488"/>
+          <p:cNvPr id="5" name="Shape 2"/>
+          <p:cNvSpPr/>
+          <p:nvPr/>
+        </p:nvSpPr>
+        <p:spPr>
+          <a:xfrm>
+            <a:off x="548640" y="1417320"/>
+            <a:ext cx="8046720" cy="777240"/>
           </a:xfrm>
           <a:prstGeom prst="roundRect">
             <a:avLst>
-              <a:gd name="adj" fmla="val 13462"/>
+              <a:gd name="adj" fmla="val 11765"/>
             </a:avLst>
           </a:prstGeom>
           <a:solidFill>
-            <a:srgbClr val="FBFAF6"/>
-          </a:solidFill>
-          <a:ln w="12700">
-            <a:solidFill>
-              <a:srgbClr val="D8D3C6"/>
-            </a:solidFill>
-            <a:prstDash val="solid"/>
-          </a:ln>
-        </p:spPr>
-      </p:sp>
-      <p:sp>
-        <p:nvSpPr>
-          <p:cNvPr id="10" name="Shape 6"/>
-          <p:cNvSpPr/>
-          <p:nvPr/>
-        </p:nvSpPr>
-        <p:spPr>
-          <a:xfrm>
-            <a:off x="676656" y="2487168"/>
-            <a:ext cx="292608" cy="292608"/>
+            <a:srgbClr val="F4E4DC"/>
+          </a:solidFill>
+          <a:ln/>
+          <a:effectLst>
+            <a:outerShdw blurRad="88900" dist="38100" dir="5400000" algn="bl" rotWithShape="0">
+              <a:srgbClr val="000000">
+                <a:alpha val="10000"/>
+              </a:srgbClr>
+            </a:outerShdw>
+          </a:effectLst>
+        </p:spPr>
+        <p:txBody>
+          <a:bodyPr/>
+          <a:lstStyle/>
+          <a:p>
+            <a:endParaRPr lang="en-US"/>
+          </a:p>
+        </p:txBody>
+      </p:sp>
+      <p:sp>
+        <p:nvSpPr>
+          <p:cNvPr id="6" name="Shape 3"/>
+          <p:cNvSpPr/>
+          <p:nvPr/>
+        </p:nvSpPr>
+        <p:spPr>
+          <a:xfrm>
+            <a:off x="804672" y="1572768"/>
+            <a:ext cx="457200" cy="457200"/>
           </a:xfrm>
           <a:prstGeom prst="ellipse">
             <a:avLst/>
@@ -5066,10 +4685,17 @@
           </a:solidFill>
           <a:ln/>
         </p:spPr>
+        <p:txBody>
+          <a:bodyPr/>
+          <a:lstStyle/>
+          <a:p>
+            <a:endParaRPr lang="en-US"/>
+          </a:p>
+        </p:txBody>
       </p:sp>
       <p:pic>
         <p:nvPicPr>
-          <p:cNvPr id="11" name="Image 2" descr="preencoded.png">    </p:cNvPr>
+          <p:cNvPr id="7" name="Image 1" descr="preencoded.png"/>
           <p:cNvPicPr>
             <a:picLocks noChangeAspect="1"/>
           </p:cNvPicPr>
@@ -5083,8 +4709,8 @@
         </p:blipFill>
         <p:spPr>
           <a:xfrm>
-            <a:off x="752734" y="2563246"/>
-            <a:ext cx="140452" cy="140452"/>
+            <a:off x="923544" y="1691640"/>
+            <a:ext cx="219456" cy="219456"/>
           </a:xfrm>
           <a:prstGeom prst="rect">
             <a:avLst/>
@@ -5093,30 +4719,30 @@
       </p:pic>
       <p:sp>
         <p:nvSpPr>
-          <p:cNvPr id="12" name="Text 7"/>
-          <p:cNvSpPr/>
-          <p:nvPr/>
-        </p:nvSpPr>
-        <p:spPr>
-          <a:xfrm>
-            <a:off x="1261872" y="2395728"/>
-            <a:ext cx="3108960" cy="475488"/>
-          </a:xfrm>
-          <a:prstGeom prst="rect">
-            <a:avLst/>
-          </a:prstGeom>
-          <a:noFill/>
-          <a:ln/>
-        </p:spPr>
-        <p:txBody>
-          <a:bodyPr wrap="square" lIns="0" tIns="0" rIns="0" bIns="0" rtlCol="0" anchor="ctr"/>
-          <a:lstStyle/>
-          <a:p>
-            <a:pPr indent="0" marL="0">
-              <a:buNone/>
-            </a:pPr>
-            <a:r>
-              <a:rPr lang="en-US" sz="1350" b="1" dirty="0">
+          <p:cNvPr id="8" name="Text 4"/>
+          <p:cNvSpPr/>
+          <p:nvPr/>
+        </p:nvSpPr>
+        <p:spPr>
+          <a:xfrm>
+            <a:off x="1463040" y="1417320"/>
+            <a:ext cx="6949440" cy="777240"/>
+          </a:xfrm>
+          <a:prstGeom prst="rect">
+            <a:avLst/>
+          </a:prstGeom>
+          <a:noFill/>
+          <a:ln/>
+        </p:spPr>
+        <p:txBody>
+          <a:bodyPr wrap="square" lIns="0" tIns="0" rIns="0" bIns="0" rtlCol="0" anchor="ctr"/>
+          <a:lstStyle/>
+          <a:p>
+            <a:pPr marL="0" indent="0">
+              <a:buNone/>
+            </a:pPr>
+            <a:r>
+              <a:rPr lang="en-US" sz="1450" b="1" dirty="0">
                 <a:solidFill>
                   <a:srgbClr val="141413"/>
                 </a:solidFill>
@@ -5124,21 +4750,21 @@
                 <a:ea typeface="Inter" pitchFamily="34" charset="-122"/>
                 <a:cs typeface="Inter" pitchFamily="34" charset="-120"/>
               </a:rPr>
-              <a:t>Null messages</a:t>
-            </a:r>
-            <a:endParaRPr lang="en-US" sz="1350" dirty="0"/>
-          </a:p>
-        </p:txBody>
-      </p:sp>
-      <p:sp>
-        <p:nvSpPr>
-          <p:cNvPr id="13" name="Shape 8"/>
-          <p:cNvSpPr/>
-          <p:nvPr/>
-        </p:nvSpPr>
-        <p:spPr>
-          <a:xfrm>
-            <a:off x="4663440" y="2395728"/>
+              <a:t>Prompt Claude to attack its own code — surface the failures you wouldn't think of.</a:t>
+            </a:r>
+            <a:endParaRPr lang="en-US" sz="1450" dirty="0"/>
+          </a:p>
+        </p:txBody>
+      </p:sp>
+      <p:sp>
+        <p:nvSpPr>
+          <p:cNvPr id="9" name="Shape 5"/>
+          <p:cNvSpPr/>
+          <p:nvPr/>
+        </p:nvSpPr>
+        <p:spPr>
+          <a:xfrm>
+            <a:off x="548640" y="2395728"/>
             <a:ext cx="3931920" cy="475488"/>
           </a:xfrm>
           <a:prstGeom prst="roundRect">
@@ -5156,16 +4782,23 @@
             <a:prstDash val="solid"/>
           </a:ln>
         </p:spPr>
-      </p:sp>
-      <p:sp>
-        <p:nvSpPr>
-          <p:cNvPr id="14" name="Shape 9"/>
-          <p:cNvSpPr/>
-          <p:nvPr/>
-        </p:nvSpPr>
-        <p:spPr>
-          <a:xfrm>
-            <a:off x="4791456" y="2487168"/>
+        <p:txBody>
+          <a:bodyPr/>
+          <a:lstStyle/>
+          <a:p>
+            <a:endParaRPr lang="en-US"/>
+          </a:p>
+        </p:txBody>
+      </p:sp>
+      <p:sp>
+        <p:nvSpPr>
+          <p:cNvPr id="10" name="Shape 6"/>
+          <p:cNvSpPr/>
+          <p:nvPr/>
+        </p:nvSpPr>
+        <p:spPr>
+          <a:xfrm>
+            <a:off x="676656" y="2487168"/>
             <a:ext cx="292608" cy="292608"/>
           </a:xfrm>
           <a:prstGeom prst="ellipse">
@@ -5176,10 +4809,17 @@
           </a:solidFill>
           <a:ln/>
         </p:spPr>
+        <p:txBody>
+          <a:bodyPr/>
+          <a:lstStyle/>
+          <a:p>
+            <a:endParaRPr lang="en-US"/>
+          </a:p>
+        </p:txBody>
       </p:sp>
       <p:pic>
         <p:nvPicPr>
-          <p:cNvPr id="15" name="Image 3" descr="preencoded.png">    </p:cNvPr>
+          <p:cNvPr id="11" name="Image 2" descr="preencoded.png"/>
           <p:cNvPicPr>
             <a:picLocks noChangeAspect="1"/>
           </p:cNvPicPr>
@@ -5193,7 +4833,7 @@
         </p:blipFill>
         <p:spPr>
           <a:xfrm>
-            <a:off x="4867534" y="2563246"/>
+            <a:off x="752734" y="2563246"/>
             <a:ext cx="140452" cy="140452"/>
           </a:xfrm>
           <a:prstGeom prst="rect">
@@ -5203,13 +4843,13 @@
       </p:pic>
       <p:sp>
         <p:nvSpPr>
-          <p:cNvPr id="16" name="Text 10"/>
-          <p:cNvSpPr/>
-          <p:nvPr/>
-        </p:nvSpPr>
-        <p:spPr>
-          <a:xfrm>
-            <a:off x="5376672" y="2395728"/>
+          <p:cNvPr id="12" name="Text 7"/>
+          <p:cNvSpPr/>
+          <p:nvPr/>
+        </p:nvSpPr>
+        <p:spPr>
+          <a:xfrm>
+            <a:off x="1261872" y="2395728"/>
             <a:ext cx="3108960" cy="475488"/>
           </a:xfrm>
           <a:prstGeom prst="rect">
@@ -5222,7 +4862,7 @@
           <a:bodyPr wrap="square" lIns="0" tIns="0" rIns="0" bIns="0" rtlCol="0" anchor="ctr"/>
           <a:lstStyle/>
           <a:p>
-            <a:pPr indent="0" marL="0">
+            <a:pPr marL="0" indent="0">
               <a:buNone/>
             </a:pPr>
             <a:r>
@@ -5234,7 +4874,7 @@
                 <a:ea typeface="Inter" pitchFamily="34" charset="-122"/>
                 <a:cs typeface="Inter" pitchFamily="34" charset="-120"/>
               </a:rPr>
-              <a:t>Rate-limit handling</a:t>
+              <a:t>Null messages</a:t>
             </a:r>
             <a:endParaRPr lang="en-US" sz="1350" dirty="0"/>
           </a:p>
@@ -5242,13 +4882,13 @@
       </p:sp>
       <p:sp>
         <p:nvSpPr>
-          <p:cNvPr id="17" name="Shape 11"/>
-          <p:cNvSpPr/>
-          <p:nvPr/>
-        </p:nvSpPr>
-        <p:spPr>
-          <a:xfrm>
-            <a:off x="548640" y="2980944"/>
+          <p:cNvPr id="13" name="Shape 8"/>
+          <p:cNvSpPr/>
+          <p:nvPr/>
+        </p:nvSpPr>
+        <p:spPr>
+          <a:xfrm>
+            <a:off x="4663440" y="2395728"/>
             <a:ext cx="3931920" cy="475488"/>
           </a:xfrm>
           <a:prstGeom prst="roundRect">
@@ -5266,16 +4906,23 @@
             <a:prstDash val="solid"/>
           </a:ln>
         </p:spPr>
-      </p:sp>
-      <p:sp>
-        <p:nvSpPr>
-          <p:cNvPr id="18" name="Shape 12"/>
-          <p:cNvSpPr/>
-          <p:nvPr/>
-        </p:nvSpPr>
-        <p:spPr>
-          <a:xfrm>
-            <a:off x="676656" y="3072384"/>
+        <p:txBody>
+          <a:bodyPr/>
+          <a:lstStyle/>
+          <a:p>
+            <a:endParaRPr lang="en-US"/>
+          </a:p>
+        </p:txBody>
+      </p:sp>
+      <p:sp>
+        <p:nvSpPr>
+          <p:cNvPr id="14" name="Shape 9"/>
+          <p:cNvSpPr/>
+          <p:nvPr/>
+        </p:nvSpPr>
+        <p:spPr>
+          <a:xfrm>
+            <a:off x="4791456" y="2487168"/>
             <a:ext cx="292608" cy="292608"/>
           </a:xfrm>
           <a:prstGeom prst="ellipse">
@@ -5286,10 +4933,17 @@
           </a:solidFill>
           <a:ln/>
         </p:spPr>
+        <p:txBody>
+          <a:bodyPr/>
+          <a:lstStyle/>
+          <a:p>
+            <a:endParaRPr lang="en-US"/>
+          </a:p>
+        </p:txBody>
       </p:sp>
       <p:pic>
         <p:nvPicPr>
-          <p:cNvPr id="19" name="Image 4" descr="preencoded.png">    </p:cNvPr>
+          <p:cNvPr id="15" name="Image 3" descr="preencoded.png"/>
           <p:cNvPicPr>
             <a:picLocks noChangeAspect="1"/>
           </p:cNvPicPr>
@@ -5303,7 +4957,7 @@
         </p:blipFill>
         <p:spPr>
           <a:xfrm>
-            <a:off x="752734" y="3148462"/>
+            <a:off x="4867534" y="2563246"/>
             <a:ext cx="140452" cy="140452"/>
           </a:xfrm>
           <a:prstGeom prst="rect">
@@ -5313,13 +4967,13 @@
       </p:pic>
       <p:sp>
         <p:nvSpPr>
-          <p:cNvPr id="20" name="Text 13"/>
-          <p:cNvSpPr/>
-          <p:nvPr/>
-        </p:nvSpPr>
-        <p:spPr>
-          <a:xfrm>
-            <a:off x="1261872" y="2980944"/>
+          <p:cNvPr id="16" name="Text 10"/>
+          <p:cNvSpPr/>
+          <p:nvPr/>
+        </p:nvSpPr>
+        <p:spPr>
+          <a:xfrm>
+            <a:off x="5376672" y="2395728"/>
             <a:ext cx="3108960" cy="475488"/>
           </a:xfrm>
           <a:prstGeom prst="rect">
@@ -5332,7 +4986,7 @@
           <a:bodyPr wrap="square" lIns="0" tIns="0" rIns="0" bIns="0" rtlCol="0" anchor="ctr"/>
           <a:lstStyle/>
           <a:p>
-            <a:pPr indent="0" marL="0">
+            <a:pPr marL="0" indent="0">
               <a:buNone/>
             </a:pPr>
             <a:r>
@@ -5344,7 +4998,7 @@
                 <a:ea typeface="Inter" pitchFamily="34" charset="-122"/>
                 <a:cs typeface="Inter" pitchFamily="34" charset="-120"/>
               </a:rPr>
-              <a:t>Session collision</a:t>
+              <a:t>Rate-limit handling</a:t>
             </a:r>
             <a:endParaRPr lang="en-US" sz="1350" dirty="0"/>
           </a:p>
@@ -5352,13 +5006,13 @@
       </p:sp>
       <p:sp>
         <p:nvSpPr>
-          <p:cNvPr id="21" name="Shape 14"/>
-          <p:cNvSpPr/>
-          <p:nvPr/>
-        </p:nvSpPr>
-        <p:spPr>
-          <a:xfrm>
-            <a:off x="4663440" y="2980944"/>
+          <p:cNvPr id="17" name="Shape 11"/>
+          <p:cNvSpPr/>
+          <p:nvPr/>
+        </p:nvSpPr>
+        <p:spPr>
+          <a:xfrm>
+            <a:off x="548640" y="2980944"/>
             <a:ext cx="3931920" cy="475488"/>
           </a:xfrm>
           <a:prstGeom prst="roundRect">
@@ -5376,16 +5030,23 @@
             <a:prstDash val="solid"/>
           </a:ln>
         </p:spPr>
-      </p:sp>
-      <p:sp>
-        <p:nvSpPr>
-          <p:cNvPr id="22" name="Shape 15"/>
-          <p:cNvSpPr/>
-          <p:nvPr/>
-        </p:nvSpPr>
-        <p:spPr>
-          <a:xfrm>
-            <a:off x="4791456" y="3072384"/>
+        <p:txBody>
+          <a:bodyPr/>
+          <a:lstStyle/>
+          <a:p>
+            <a:endParaRPr lang="en-US"/>
+          </a:p>
+        </p:txBody>
+      </p:sp>
+      <p:sp>
+        <p:nvSpPr>
+          <p:cNvPr id="18" name="Shape 12"/>
+          <p:cNvSpPr/>
+          <p:nvPr/>
+        </p:nvSpPr>
+        <p:spPr>
+          <a:xfrm>
+            <a:off x="676656" y="3072384"/>
             <a:ext cx="292608" cy="292608"/>
           </a:xfrm>
           <a:prstGeom prst="ellipse">
@@ -5396,10 +5057,17 @@
           </a:solidFill>
           <a:ln/>
         </p:spPr>
+        <p:txBody>
+          <a:bodyPr/>
+          <a:lstStyle/>
+          <a:p>
+            <a:endParaRPr lang="en-US"/>
+          </a:p>
+        </p:txBody>
       </p:sp>
       <p:pic>
         <p:nvPicPr>
-          <p:cNvPr id="23" name="Image 5" descr="preencoded.png">    </p:cNvPr>
+          <p:cNvPr id="19" name="Image 4" descr="preencoded.png"/>
           <p:cNvPicPr>
             <a:picLocks noChangeAspect="1"/>
           </p:cNvPicPr>
@@ -5413,7 +5081,7 @@
         </p:blipFill>
         <p:spPr>
           <a:xfrm>
-            <a:off x="4867534" y="3148462"/>
+            <a:off x="752734" y="3148462"/>
             <a:ext cx="140452" cy="140452"/>
           </a:xfrm>
           <a:prstGeom prst="rect">
@@ -5423,13 +5091,13 @@
       </p:pic>
       <p:sp>
         <p:nvSpPr>
-          <p:cNvPr id="24" name="Text 16"/>
-          <p:cNvSpPr/>
-          <p:nvPr/>
-        </p:nvSpPr>
-        <p:spPr>
-          <a:xfrm>
-            <a:off x="5376672" y="2980944"/>
+          <p:cNvPr id="20" name="Text 13"/>
+          <p:cNvSpPr/>
+          <p:nvPr/>
+        </p:nvSpPr>
+        <p:spPr>
+          <a:xfrm>
+            <a:off x="1261872" y="2980944"/>
             <a:ext cx="3108960" cy="475488"/>
           </a:xfrm>
           <a:prstGeom prst="rect">
@@ -5442,7 +5110,7 @@
           <a:bodyPr wrap="square" lIns="0" tIns="0" rIns="0" bIns="0" rtlCol="0" anchor="ctr"/>
           <a:lstStyle/>
           <a:p>
-            <a:pPr indent="0" marL="0">
+            <a:pPr marL="0" indent="0">
               <a:buNone/>
             </a:pPr>
             <a:r>
@@ -5454,7 +5122,7 @@
                 <a:ea typeface="Inter" pitchFamily="34" charset="-122"/>
                 <a:cs typeface="Inter" pitchFamily="34" charset="-120"/>
               </a:rPr>
-              <a:t>Deserialization failures</a:t>
+              <a:t>Session collision</a:t>
             </a:r>
             <a:endParaRPr lang="en-US" sz="1350" dirty="0"/>
           </a:p>
@@ -5462,13 +5130,13 @@
       </p:sp>
       <p:sp>
         <p:nvSpPr>
-          <p:cNvPr id="25" name="Shape 17"/>
-          <p:cNvSpPr/>
-          <p:nvPr/>
-        </p:nvSpPr>
-        <p:spPr>
-          <a:xfrm>
-            <a:off x="548640" y="3566160"/>
+          <p:cNvPr id="21" name="Shape 14"/>
+          <p:cNvSpPr/>
+          <p:nvPr/>
+        </p:nvSpPr>
+        <p:spPr>
+          <a:xfrm>
+            <a:off x="4663440" y="2980944"/>
             <a:ext cx="3931920" cy="475488"/>
           </a:xfrm>
           <a:prstGeom prst="roundRect">
@@ -5486,16 +5154,23 @@
             <a:prstDash val="solid"/>
           </a:ln>
         </p:spPr>
-      </p:sp>
-      <p:sp>
-        <p:nvSpPr>
-          <p:cNvPr id="26" name="Shape 18"/>
-          <p:cNvSpPr/>
-          <p:nvPr/>
-        </p:nvSpPr>
-        <p:spPr>
-          <a:xfrm>
-            <a:off x="676656" y="3657600"/>
+        <p:txBody>
+          <a:bodyPr/>
+          <a:lstStyle/>
+          <a:p>
+            <a:endParaRPr lang="en-US"/>
+          </a:p>
+        </p:txBody>
+      </p:sp>
+      <p:sp>
+        <p:nvSpPr>
+          <p:cNvPr id="22" name="Shape 15"/>
+          <p:cNvSpPr/>
+          <p:nvPr/>
+        </p:nvSpPr>
+        <p:spPr>
+          <a:xfrm>
+            <a:off x="4791456" y="3072384"/>
             <a:ext cx="292608" cy="292608"/>
           </a:xfrm>
           <a:prstGeom prst="ellipse">
@@ -5506,10 +5181,17 @@
           </a:solidFill>
           <a:ln/>
         </p:spPr>
+        <p:txBody>
+          <a:bodyPr/>
+          <a:lstStyle/>
+          <a:p>
+            <a:endParaRPr lang="en-US"/>
+          </a:p>
+        </p:txBody>
       </p:sp>
       <p:pic>
         <p:nvPicPr>
-          <p:cNvPr id="27" name="Image 6" descr="preencoded.png">    </p:cNvPr>
+          <p:cNvPr id="23" name="Image 5" descr="preencoded.png"/>
           <p:cNvPicPr>
             <a:picLocks noChangeAspect="1"/>
           </p:cNvPicPr>
@@ -5523,6 +5205,130 @@
         </p:blipFill>
         <p:spPr>
           <a:xfrm>
+            <a:off x="4867534" y="3148462"/>
+            <a:ext cx="140452" cy="140452"/>
+          </a:xfrm>
+          <a:prstGeom prst="rect">
+            <a:avLst/>
+          </a:prstGeom>
+        </p:spPr>
+      </p:pic>
+      <p:sp>
+        <p:nvSpPr>
+          <p:cNvPr id="24" name="Text 16"/>
+          <p:cNvSpPr/>
+          <p:nvPr/>
+        </p:nvSpPr>
+        <p:spPr>
+          <a:xfrm>
+            <a:off x="5376672" y="2980944"/>
+            <a:ext cx="3108960" cy="475488"/>
+          </a:xfrm>
+          <a:prstGeom prst="rect">
+            <a:avLst/>
+          </a:prstGeom>
+          <a:noFill/>
+          <a:ln/>
+        </p:spPr>
+        <p:txBody>
+          <a:bodyPr wrap="square" lIns="0" tIns="0" rIns="0" bIns="0" rtlCol="0" anchor="ctr"/>
+          <a:lstStyle/>
+          <a:p>
+            <a:pPr marL="0" indent="0">
+              <a:buNone/>
+            </a:pPr>
+            <a:r>
+              <a:rPr lang="en-US" sz="1350" b="1" dirty="0">
+                <a:solidFill>
+                  <a:srgbClr val="141413"/>
+                </a:solidFill>
+                <a:latin typeface="Inter" pitchFamily="34" charset="0"/>
+                <a:ea typeface="Inter" pitchFamily="34" charset="-122"/>
+                <a:cs typeface="Inter" pitchFamily="34" charset="-120"/>
+              </a:rPr>
+              <a:t>Deserialization failures</a:t>
+            </a:r>
+            <a:endParaRPr lang="en-US" sz="1350" dirty="0"/>
+          </a:p>
+        </p:txBody>
+      </p:sp>
+      <p:sp>
+        <p:nvSpPr>
+          <p:cNvPr id="25" name="Shape 17"/>
+          <p:cNvSpPr/>
+          <p:nvPr/>
+        </p:nvSpPr>
+        <p:spPr>
+          <a:xfrm>
+            <a:off x="548640" y="3566160"/>
+            <a:ext cx="3931920" cy="475488"/>
+          </a:xfrm>
+          <a:prstGeom prst="roundRect">
+            <a:avLst>
+              <a:gd name="adj" fmla="val 13462"/>
+            </a:avLst>
+          </a:prstGeom>
+          <a:solidFill>
+            <a:srgbClr val="FBFAF6"/>
+          </a:solidFill>
+          <a:ln w="12700">
+            <a:solidFill>
+              <a:srgbClr val="D8D3C6"/>
+            </a:solidFill>
+            <a:prstDash val="solid"/>
+          </a:ln>
+        </p:spPr>
+        <p:txBody>
+          <a:bodyPr/>
+          <a:lstStyle/>
+          <a:p>
+            <a:endParaRPr lang="en-US"/>
+          </a:p>
+        </p:txBody>
+      </p:sp>
+      <p:sp>
+        <p:nvSpPr>
+          <p:cNvPr id="26" name="Shape 18"/>
+          <p:cNvSpPr/>
+          <p:nvPr/>
+        </p:nvSpPr>
+        <p:spPr>
+          <a:xfrm>
+            <a:off x="676656" y="3657600"/>
+            <a:ext cx="292608" cy="292608"/>
+          </a:xfrm>
+          <a:prstGeom prst="ellipse">
+            <a:avLst/>
+          </a:prstGeom>
+          <a:solidFill>
+            <a:srgbClr val="D97757"/>
+          </a:solidFill>
+          <a:ln/>
+        </p:spPr>
+        <p:txBody>
+          <a:bodyPr/>
+          <a:lstStyle/>
+          <a:p>
+            <a:endParaRPr lang="en-US"/>
+          </a:p>
+        </p:txBody>
+      </p:sp>
+      <p:pic>
+        <p:nvPicPr>
+          <p:cNvPr id="27" name="Image 6" descr="preencoded.png"/>
+          <p:cNvPicPr>
+            <a:picLocks noChangeAspect="1"/>
+          </p:cNvPicPr>
+          <p:nvPr/>
+        </p:nvPicPr>
+        <p:blipFill>
+          <a:blip r:embed="rId8"/>
+          <a:stretch>
+            <a:fillRect/>
+          </a:stretch>
+        </p:blipFill>
+        <p:spPr>
+          <a:xfrm>
             <a:off x="752734" y="3733678"/>
             <a:ext cx="140452" cy="140452"/>
           </a:xfrm>
@@ -5552,7 +5358,7 @@
           <a:bodyPr wrap="square" lIns="0" tIns="0" rIns="0" bIns="0" rtlCol="0" anchor="ctr"/>
           <a:lstStyle/>
           <a:p>
-            <a:pPr indent="0" marL="0">
+            <a:pPr marL="0" indent="0">
               <a:buNone/>
             </a:pPr>
             <a:r>
@@ -5591,7 +5397,7 @@
           <a:bodyPr wrap="square" rtlCol="0" anchor="ctr"/>
           <a:lstStyle/>
           <a:p>
-            <a:pPr indent="0" marL="0">
+            <a:pPr marL="0" indent="0">
               <a:buNone/>
             </a:pPr>
             <a:r>
@@ -5630,7 +5436,7 @@
           <a:bodyPr wrap="square" rtlCol="0" anchor="ctr"/>
           <a:lstStyle/>
           <a:p>
-            <a:pPr algn="r" indent="0" marL="0">
+            <a:pPr marL="0" indent="0" algn="r">
               <a:buNone/>
             </a:pPr>
             <a:r>
@@ -5645,45 +5451,6 @@
               <a:t>Day 2 · Section 5  ·  4/11</a:t>
             </a:r>
             <a:endParaRPr lang="en-US" sz="900" dirty="0"/>
-          </a:p>
-        </p:txBody>
-      </p:sp>
-      <p:sp>
-        <p:nvSpPr>
-          <p:cNvPr id="31" name="Text 22"/>
-          <p:cNvSpPr/>
-          <p:nvPr/>
-        </p:nvSpPr>
-        <p:spPr>
-          <a:xfrm>
-            <a:off x="548640" y="4462272"/>
-            <a:ext cx="8046720" cy="274320"/>
-          </a:xfrm>
-          <a:prstGeom prst="rect">
-            <a:avLst/>
-          </a:prstGeom>
-          <a:noFill/>
-          <a:ln/>
-        </p:spPr>
-        <p:txBody>
-          <a:bodyPr wrap="square" lIns="0" tIns="0" rIns="0" bIns="0" rtlCol="0" anchor="ctr"/>
-          <a:lstStyle/>
-          <a:p>
-            <a:pPr indent="0" marL="0">
-              <a:buNone/>
-            </a:pPr>
-            <a:r>
-              <a:rPr lang="en-US" sz="1000" i="1" dirty="0">
-                <a:solidFill>
-                  <a:srgbClr val="615C52"/>
-                </a:solidFill>
-                <a:latin typeface="Inter" pitchFamily="34" charset="0"/>
-                <a:ea typeface="Inter" pitchFamily="34" charset="-122"/>
-                <a:cs typeface="Inter" pitchFamily="34" charset="-120"/>
-              </a:rPr>
-              <a:t>▸ Reframe Claude as an adversary and it hunts the bugs you'd never write tests for.</a:t>
-            </a:r>
-            <a:endParaRPr lang="en-US" sz="1000" dirty="0"/>
           </a:p>
         </p:txBody>
       </p:sp>
@@ -5703,6 +5470,7 @@
         <a:solidFill>
           <a:srgbClr val="F0EEE6"/>
         </a:solidFill>
+        <a:effectLst/>
       </p:bgPr>
     </p:bg>
     <p:spTree>
@@ -5740,11 +5508,11 @@
           <a:bodyPr wrap="square" lIns="0" tIns="0" rIns="0" bIns="0" rtlCol="0" anchor="ctr"/>
           <a:lstStyle/>
           <a:p>
-            <a:pPr indent="0" marL="0">
-              <a:buNone/>
-            </a:pPr>
-            <a:r>
-              <a:rPr lang="en-US" sz="1100" b="1" spc="200" kern="0" dirty="0">
+            <a:pPr marL="0" indent="0">
+              <a:buNone/>
+            </a:pPr>
+            <a:r>
+              <a:rPr lang="en-US" sz="1100" b="1" kern="0" spc="200" dirty="0">
                 <a:solidFill>
                   <a:srgbClr val="C25E40"/>
                 </a:solidFill>
@@ -5779,7 +5547,7 @@
           <a:bodyPr wrap="square" lIns="0" tIns="0" rIns="0" bIns="0" rtlCol="0" anchor="ctr"/>
           <a:lstStyle/>
           <a:p>
-            <a:pPr indent="0" marL="0">
+            <a:pPr marL="0" indent="0">
               <a:buNone/>
             </a:pPr>
             <a:r>
@@ -5799,51 +5567,7 @@
       </p:sp>
       <p:pic>
         <p:nvPicPr>
-          <p:cNvPr id="4" name="Image 0" descr="preencoded.png">    </p:cNvPr>
-          <p:cNvPicPr>
-            <a:picLocks noChangeAspect="1"/>
-          </p:cNvPicPr>
-          <p:nvPr/>
-        </p:nvPicPr>
-        <p:blipFill>
-          <a:blip r:embed="rId1"/>
-          <a:stretch>
-            <a:fillRect/>
-          </a:stretch>
-        </p:blipFill>
-        <p:spPr>
-          <a:xfrm>
-            <a:off x="8321040" y="411480"/>
-            <a:ext cx="347472" cy="292608"/>
-          </a:xfrm>
-          <a:prstGeom prst="rect">
-            <a:avLst/>
-          </a:prstGeom>
-        </p:spPr>
-      </p:pic>
-      <p:sp>
-        <p:nvSpPr>
-          <p:cNvPr id="5" name="Shape 2"/>
-          <p:cNvSpPr/>
-          <p:nvPr/>
-        </p:nvSpPr>
-        <p:spPr>
-          <a:xfrm>
-            <a:off x="548640" y="1508760"/>
-            <a:ext cx="640080" cy="640080"/>
-          </a:xfrm>
-          <a:prstGeom prst="ellipse">
-            <a:avLst/>
-          </a:prstGeom>
-          <a:solidFill>
-            <a:srgbClr val="D97757"/>
-          </a:solidFill>
-          <a:ln/>
-        </p:spPr>
-      </p:sp>
-      <p:pic>
-        <p:nvPicPr>
-          <p:cNvPr id="6" name="Image 1" descr="preencoded.png">    </p:cNvPr>
+          <p:cNvPr id="4" name="Image 0" descr="preencoded.png"/>
           <p:cNvPicPr>
             <a:picLocks noChangeAspect="1"/>
           </p:cNvPicPr>
@@ -5857,8 +5581,8 @@
         </p:blipFill>
         <p:spPr>
           <a:xfrm>
-            <a:off x="715061" y="1675181"/>
-            <a:ext cx="307238" cy="307238"/>
+            <a:off x="8321040" y="411480"/>
+            <a:ext cx="347472" cy="292608"/>
           </a:xfrm>
           <a:prstGeom prst="rect">
             <a:avLst/>
@@ -5867,136 +5591,14 @@
       </p:pic>
       <p:sp>
         <p:nvSpPr>
-          <p:cNvPr id="7" name="Text 3"/>
-          <p:cNvSpPr/>
-          <p:nvPr/>
-        </p:nvSpPr>
-        <p:spPr>
-          <a:xfrm>
-            <a:off x="1417320" y="1481328"/>
-            <a:ext cx="7223760" cy="685800"/>
-          </a:xfrm>
-          <a:prstGeom prst="rect">
-            <a:avLst/>
-          </a:prstGeom>
-          <a:noFill/>
-          <a:ln/>
-        </p:spPr>
-        <p:txBody>
-          <a:bodyPr wrap="square" lIns="0" tIns="0" rIns="0" bIns="0" rtlCol="0" anchor="ctr"/>
-          <a:lstStyle/>
-          <a:p>
-            <a:pPr indent="0" marL="0">
-              <a:buNone/>
-            </a:pPr>
-            <a:r>
-              <a:rPr lang="en-US" sz="2200" b="1" dirty="0">
-                <a:solidFill>
-                  <a:srgbClr val="141413"/>
-                </a:solidFill>
-                <a:latin typeface="Georgia" pitchFamily="34" charset="0"/>
-                <a:ea typeface="Georgia" pitchFamily="34" charset="-122"/>
-                <a:cs typeface="Georgia" pitchFamily="34" charset="-120"/>
-              </a:rPr>
-              <a:t>Real </a:t>
-            </a:r>
-            <a:pPr indent="0" marL="0">
-              <a:buNone/>
-            </a:pPr>
-            <a:r>
-              <a:rPr lang="en-US" sz="2200" b="1" dirty="0">
-                <a:solidFill>
-                  <a:srgbClr val="C25E40"/>
-                </a:solidFill>
-                <a:latin typeface="Georgia" pitchFamily="34" charset="0"/>
-                <a:ea typeface="Georgia" pitchFamily="34" charset="-122"/>
-                <a:cs typeface="Georgia" pitchFamily="34" charset="-120"/>
-              </a:rPr>
-              <a:t>SQL Server</a:t>
-            </a:r>
-            <a:pPr indent="0" marL="0">
-              <a:buNone/>
-            </a:pPr>
-            <a:r>
-              <a:rPr lang="en-US" sz="2200" b="1" dirty="0">
-                <a:solidFill>
-                  <a:srgbClr val="141413"/>
-                </a:solidFill>
-                <a:latin typeface="Georgia" pitchFamily="34" charset="0"/>
-                <a:ea typeface="Georgia" pitchFamily="34" charset="-122"/>
-                <a:cs typeface="Georgia" pitchFamily="34" charset="-120"/>
-              </a:rPr>
-              <a:t> + real </a:t>
-            </a:r>
-            <a:pPr indent="0" marL="0">
-              <a:buNone/>
-            </a:pPr>
-            <a:r>
-              <a:rPr lang="en-US" sz="2200" b="1" dirty="0">
-                <a:solidFill>
-                  <a:srgbClr val="C25E40"/>
-                </a:solidFill>
-                <a:latin typeface="Georgia" pitchFamily="34" charset="0"/>
-                <a:ea typeface="Georgia" pitchFamily="34" charset="-122"/>
-                <a:cs typeface="Georgia" pitchFamily="34" charset="-120"/>
-              </a:rPr>
-              <a:t>Qdrant</a:t>
-            </a:r>
-            <a:pPr indent="0" marL="0">
-              <a:buNone/>
-            </a:pPr>
-            <a:r>
-              <a:rPr lang="en-US" sz="2200" b="1" dirty="0">
-                <a:solidFill>
-                  <a:srgbClr val="141413"/>
-                </a:solidFill>
-                <a:latin typeface="Georgia" pitchFamily="34" charset="0"/>
-                <a:ea typeface="Georgia" pitchFamily="34" charset="-122"/>
-                <a:cs typeface="Georgia" pitchFamily="34" charset="-120"/>
-              </a:rPr>
-              <a:t> in Docker.</a:t>
-            </a:r>
-            <a:endParaRPr lang="en-US" sz="2200" dirty="0"/>
-          </a:p>
-        </p:txBody>
-      </p:sp>
-      <p:sp>
-        <p:nvSpPr>
-          <p:cNvPr id="8" name="Shape 4"/>
-          <p:cNvSpPr/>
-          <p:nvPr/>
-        </p:nvSpPr>
-        <p:spPr>
-          <a:xfrm>
-            <a:off x="548640" y="2331720"/>
-            <a:ext cx="8046720" cy="566928"/>
-          </a:xfrm>
-          <a:prstGeom prst="roundRect">
-            <a:avLst>
-              <a:gd name="adj" fmla="val 11290"/>
-            </a:avLst>
-          </a:prstGeom>
-          <a:solidFill>
-            <a:srgbClr val="FBFAF6"/>
-          </a:solidFill>
-          <a:ln w="12700">
-            <a:solidFill>
-              <a:srgbClr val="D8D3C6"/>
-            </a:solidFill>
-            <a:prstDash val="solid"/>
-          </a:ln>
-        </p:spPr>
-      </p:sp>
-      <p:sp>
-        <p:nvSpPr>
-          <p:cNvPr id="9" name="Shape 5"/>
-          <p:cNvSpPr/>
-          <p:nvPr/>
-        </p:nvSpPr>
-        <p:spPr>
-          <a:xfrm>
-            <a:off x="749808" y="2404872"/>
-            <a:ext cx="420624" cy="420624"/>
+          <p:cNvPr id="5" name="Shape 2"/>
+          <p:cNvSpPr/>
+          <p:nvPr/>
+        </p:nvSpPr>
+        <p:spPr>
+          <a:xfrm>
+            <a:off x="548640" y="1508760"/>
+            <a:ext cx="640080" cy="640080"/>
           </a:xfrm>
           <a:prstGeom prst="ellipse">
             <a:avLst/>
@@ -6006,10 +5608,17 @@
           </a:solidFill>
           <a:ln/>
         </p:spPr>
+        <p:txBody>
+          <a:bodyPr/>
+          <a:lstStyle/>
+          <a:p>
+            <a:endParaRPr lang="en-US"/>
+          </a:p>
+        </p:txBody>
       </p:sp>
       <p:pic>
         <p:nvPicPr>
-          <p:cNvPr id="10" name="Image 2" descr="preencoded.png">    </p:cNvPr>
+          <p:cNvPr id="6" name="Image 1" descr="preencoded.png"/>
           <p:cNvPicPr>
             <a:picLocks noChangeAspect="1"/>
           </p:cNvPicPr>
@@ -6023,8 +5632,8 @@
         </p:blipFill>
         <p:spPr>
           <a:xfrm>
-            <a:off x="859170" y="2514234"/>
-            <a:ext cx="201900" cy="201900"/>
+            <a:off x="715061" y="1675181"/>
+            <a:ext cx="307238" cy="307238"/>
           </a:xfrm>
           <a:prstGeom prst="rect">
             <a:avLst/>
@@ -6033,91 +5642,96 @@
       </p:pic>
       <p:sp>
         <p:nvSpPr>
-          <p:cNvPr id="11" name="Text 6"/>
-          <p:cNvSpPr/>
-          <p:nvPr/>
-        </p:nvSpPr>
-        <p:spPr>
-          <a:xfrm>
-            <a:off x="1325880" y="2331720"/>
-            <a:ext cx="3200400" cy="566928"/>
-          </a:xfrm>
-          <a:prstGeom prst="rect">
-            <a:avLst/>
-          </a:prstGeom>
-          <a:noFill/>
-          <a:ln/>
-        </p:spPr>
-        <p:txBody>
-          <a:bodyPr wrap="square" lIns="0" tIns="0" rIns="0" bIns="0" rtlCol="0" anchor="ctr"/>
-          <a:lstStyle/>
-          <a:p>
-            <a:pPr indent="0" marL="0">
-              <a:buNone/>
-            </a:pPr>
-            <a:r>
-              <a:rPr lang="en-US" sz="1450" b="1" dirty="0">
+          <p:cNvPr id="7" name="Text 3"/>
+          <p:cNvSpPr/>
+          <p:nvPr/>
+        </p:nvSpPr>
+        <p:spPr>
+          <a:xfrm>
+            <a:off x="1417320" y="1481328"/>
+            <a:ext cx="7223760" cy="685800"/>
+          </a:xfrm>
+          <a:prstGeom prst="rect">
+            <a:avLst/>
+          </a:prstGeom>
+          <a:noFill/>
+          <a:ln/>
+        </p:spPr>
+        <p:txBody>
+          <a:bodyPr wrap="square" lIns="0" tIns="0" rIns="0" bIns="0" rtlCol="0" anchor="ctr"/>
+          <a:lstStyle/>
+          <a:p>
+            <a:pPr marL="0" indent="0">
+              <a:buNone/>
+            </a:pPr>
+            <a:r>
+              <a:rPr lang="en-US" sz="2200" b="1" dirty="0">
                 <a:solidFill>
                   <a:srgbClr val="141413"/>
                 </a:solidFill>
-                <a:latin typeface="Inter" pitchFamily="34" charset="0"/>
-                <a:ea typeface="Inter" pitchFamily="34" charset="-122"/>
-                <a:cs typeface="Inter" pitchFamily="34" charset="-120"/>
-              </a:rPr>
-              <a:t>Real SQL Server</a:t>
-            </a:r>
-            <a:endParaRPr lang="en-US" sz="1450" dirty="0"/>
-          </a:p>
-        </p:txBody>
-      </p:sp>
-      <p:sp>
-        <p:nvSpPr>
-          <p:cNvPr id="12" name="Text 7"/>
-          <p:cNvSpPr/>
-          <p:nvPr/>
-        </p:nvSpPr>
-        <p:spPr>
-          <a:xfrm>
-            <a:off x="4572000" y="2331720"/>
-            <a:ext cx="3840480" cy="566928"/>
-          </a:xfrm>
-          <a:prstGeom prst="rect">
-            <a:avLst/>
-          </a:prstGeom>
-          <a:noFill/>
-          <a:ln/>
-        </p:spPr>
-        <p:txBody>
-          <a:bodyPr wrap="square" lIns="0" tIns="0" rIns="0" bIns="0" rtlCol="0" anchor="ctr"/>
-          <a:lstStyle/>
-          <a:p>
-            <a:pPr indent="0" marL="0">
-              <a:buNone/>
-            </a:pPr>
-            <a:r>
-              <a:rPr lang="en-US" sz="1250" dirty="0">
-                <a:solidFill>
-                  <a:srgbClr val="615C52"/>
-                </a:solidFill>
-                <a:latin typeface="Inter" pitchFamily="34" charset="0"/>
-                <a:ea typeface="Inter" pitchFamily="34" charset="-122"/>
-                <a:cs typeface="Inter" pitchFamily="34" charset="-120"/>
-              </a:rPr>
-              <a:t>EF Core hits an actual database</a:t>
-            </a:r>
-            <a:endParaRPr lang="en-US" sz="1250" dirty="0"/>
-          </a:p>
-        </p:txBody>
-      </p:sp>
-      <p:sp>
-        <p:nvSpPr>
-          <p:cNvPr id="13" name="Shape 8"/>
-          <p:cNvSpPr/>
-          <p:nvPr/>
-        </p:nvSpPr>
-        <p:spPr>
-          <a:xfrm>
-            <a:off x="548640" y="2971800"/>
+                <a:latin typeface="Georgia" pitchFamily="34" charset="0"/>
+                <a:ea typeface="Georgia" pitchFamily="34" charset="-122"/>
+                <a:cs typeface="Georgia" pitchFamily="34" charset="-120"/>
+              </a:rPr>
+              <a:t>Real </a:t>
+            </a:r>
+            <a:r>
+              <a:rPr lang="en-US" sz="2200" b="1" dirty="0">
+                <a:solidFill>
+                  <a:srgbClr val="C25E40"/>
+                </a:solidFill>
+                <a:latin typeface="Georgia" pitchFamily="34" charset="0"/>
+                <a:ea typeface="Georgia" pitchFamily="34" charset="-122"/>
+                <a:cs typeface="Georgia" pitchFamily="34" charset="-120"/>
+              </a:rPr>
+              <a:t>SQL Server</a:t>
+            </a:r>
+            <a:r>
+              <a:rPr lang="en-US" sz="2200" b="1" dirty="0">
+                <a:solidFill>
+                  <a:srgbClr val="141413"/>
+                </a:solidFill>
+                <a:latin typeface="Georgia" pitchFamily="34" charset="0"/>
+                <a:ea typeface="Georgia" pitchFamily="34" charset="-122"/>
+                <a:cs typeface="Georgia" pitchFamily="34" charset="-120"/>
+              </a:rPr>
+              <a:t> + real </a:t>
+            </a:r>
+            <a:r>
+              <a:rPr lang="en-US" sz="2200" b="1" dirty="0">
+                <a:solidFill>
+                  <a:srgbClr val="C25E40"/>
+                </a:solidFill>
+                <a:latin typeface="Georgia" pitchFamily="34" charset="0"/>
+                <a:ea typeface="Georgia" pitchFamily="34" charset="-122"/>
+                <a:cs typeface="Georgia" pitchFamily="34" charset="-120"/>
+              </a:rPr>
+              <a:t>Qdrant</a:t>
+            </a:r>
+            <a:r>
+              <a:rPr lang="en-US" sz="2200" b="1" dirty="0">
+                <a:solidFill>
+                  <a:srgbClr val="141413"/>
+                </a:solidFill>
+                <a:latin typeface="Georgia" pitchFamily="34" charset="0"/>
+                <a:ea typeface="Georgia" pitchFamily="34" charset="-122"/>
+                <a:cs typeface="Georgia" pitchFamily="34" charset="-120"/>
+              </a:rPr>
+              <a:t> in Docker.</a:t>
+            </a:r>
+            <a:endParaRPr lang="en-US" sz="2200" dirty="0"/>
+          </a:p>
+        </p:txBody>
+      </p:sp>
+      <p:sp>
+        <p:nvSpPr>
+          <p:cNvPr id="8" name="Shape 4"/>
+          <p:cNvSpPr/>
+          <p:nvPr/>
+        </p:nvSpPr>
+        <p:spPr>
+          <a:xfrm>
+            <a:off x="548640" y="2331720"/>
             <a:ext cx="8046720" cy="566928"/>
           </a:xfrm>
           <a:prstGeom prst="roundRect">
@@ -6135,16 +5749,23 @@
             <a:prstDash val="solid"/>
           </a:ln>
         </p:spPr>
-      </p:sp>
-      <p:sp>
-        <p:nvSpPr>
-          <p:cNvPr id="14" name="Shape 9"/>
-          <p:cNvSpPr/>
-          <p:nvPr/>
-        </p:nvSpPr>
-        <p:spPr>
-          <a:xfrm>
-            <a:off x="749808" y="3044952"/>
+        <p:txBody>
+          <a:bodyPr/>
+          <a:lstStyle/>
+          <a:p>
+            <a:endParaRPr lang="en-US"/>
+          </a:p>
+        </p:txBody>
+      </p:sp>
+      <p:sp>
+        <p:nvSpPr>
+          <p:cNvPr id="9" name="Shape 5"/>
+          <p:cNvSpPr/>
+          <p:nvPr/>
+        </p:nvSpPr>
+        <p:spPr>
+          <a:xfrm>
+            <a:off x="749808" y="2404872"/>
             <a:ext cx="420624" cy="420624"/>
           </a:xfrm>
           <a:prstGeom prst="ellipse">
@@ -6155,10 +5776,17 @@
           </a:solidFill>
           <a:ln/>
         </p:spPr>
+        <p:txBody>
+          <a:bodyPr/>
+          <a:lstStyle/>
+          <a:p>
+            <a:endParaRPr lang="en-US"/>
+          </a:p>
+        </p:txBody>
       </p:sp>
       <p:pic>
         <p:nvPicPr>
-          <p:cNvPr id="15" name="Image 3" descr="preencoded.png">    </p:cNvPr>
+          <p:cNvPr id="10" name="Image 2" descr="preencoded.png"/>
           <p:cNvPicPr>
             <a:picLocks noChangeAspect="1"/>
           </p:cNvPicPr>
@@ -6172,7 +5800,7 @@
         </p:blipFill>
         <p:spPr>
           <a:xfrm>
-            <a:off x="859170" y="3154314"/>
+            <a:off x="859170" y="2514234"/>
             <a:ext cx="201900" cy="201900"/>
           </a:xfrm>
           <a:prstGeom prst="rect">
@@ -6182,13 +5810,13 @@
       </p:pic>
       <p:sp>
         <p:nvSpPr>
-          <p:cNvPr id="16" name="Text 10"/>
-          <p:cNvSpPr/>
-          <p:nvPr/>
-        </p:nvSpPr>
-        <p:spPr>
-          <a:xfrm>
-            <a:off x="1325880" y="2971800"/>
+          <p:cNvPr id="11" name="Text 6"/>
+          <p:cNvSpPr/>
+          <p:nvPr/>
+        </p:nvSpPr>
+        <p:spPr>
+          <a:xfrm>
+            <a:off x="1325880" y="2331720"/>
             <a:ext cx="3200400" cy="566928"/>
           </a:xfrm>
           <a:prstGeom prst="rect">
@@ -6201,7 +5829,7 @@
           <a:bodyPr wrap="square" lIns="0" tIns="0" rIns="0" bIns="0" rtlCol="0" anchor="ctr"/>
           <a:lstStyle/>
           <a:p>
-            <a:pPr indent="0" marL="0">
+            <a:pPr marL="0" indent="0">
               <a:buNone/>
             </a:pPr>
             <a:r>
@@ -6213,7 +5841,7 @@
                 <a:ea typeface="Inter" pitchFamily="34" charset="-122"/>
                 <a:cs typeface="Inter" pitchFamily="34" charset="-120"/>
               </a:rPr>
-              <a:t>Real Qdrant</a:t>
+              <a:t>Real SQL Server</a:t>
             </a:r>
             <a:endParaRPr lang="en-US" sz="1450" dirty="0"/>
           </a:p>
@@ -6221,13 +5849,13 @@
       </p:sp>
       <p:sp>
         <p:nvSpPr>
-          <p:cNvPr id="17" name="Text 11"/>
-          <p:cNvSpPr/>
-          <p:nvPr/>
-        </p:nvSpPr>
-        <p:spPr>
-          <a:xfrm>
-            <a:off x="4572000" y="2971800"/>
+          <p:cNvPr id="12" name="Text 7"/>
+          <p:cNvSpPr/>
+          <p:nvPr/>
+        </p:nvSpPr>
+        <p:spPr>
+          <a:xfrm>
+            <a:off x="4572000" y="2331720"/>
             <a:ext cx="3840480" cy="566928"/>
           </a:xfrm>
           <a:prstGeom prst="rect">
@@ -6240,7 +5868,7 @@
           <a:bodyPr wrap="square" lIns="0" tIns="0" rIns="0" bIns="0" rtlCol="0" anchor="ctr"/>
           <a:lstStyle/>
           <a:p>
-            <a:pPr indent="0" marL="0">
+            <a:pPr marL="0" indent="0">
               <a:buNone/>
             </a:pPr>
             <a:r>
@@ -6252,7 +5880,7 @@
                 <a:ea typeface="Inter" pitchFamily="34" charset="-122"/>
                 <a:cs typeface="Inter" pitchFamily="34" charset="-120"/>
               </a:rPr>
-              <a:t>Vector queries run end to end</a:t>
+              <a:t>EF Core hits an actual database</a:t>
             </a:r>
             <a:endParaRPr lang="en-US" sz="1250" dirty="0"/>
           </a:p>
@@ -6260,13 +5888,13 @@
       </p:sp>
       <p:sp>
         <p:nvSpPr>
-          <p:cNvPr id="18" name="Shape 12"/>
-          <p:cNvSpPr/>
-          <p:nvPr/>
-        </p:nvSpPr>
-        <p:spPr>
-          <a:xfrm>
-            <a:off x="548640" y="3611880"/>
+          <p:cNvPr id="13" name="Shape 8"/>
+          <p:cNvSpPr/>
+          <p:nvPr/>
+        </p:nvSpPr>
+        <p:spPr>
+          <a:xfrm>
+            <a:off x="548640" y="2971800"/>
             <a:ext cx="8046720" cy="566928"/>
           </a:xfrm>
           <a:prstGeom prst="roundRect">
@@ -6284,16 +5912,23 @@
             <a:prstDash val="solid"/>
           </a:ln>
         </p:spPr>
-      </p:sp>
-      <p:sp>
-        <p:nvSpPr>
-          <p:cNvPr id="19" name="Shape 13"/>
-          <p:cNvSpPr/>
-          <p:nvPr/>
-        </p:nvSpPr>
-        <p:spPr>
-          <a:xfrm>
-            <a:off x="749808" y="3685032"/>
+        <p:txBody>
+          <a:bodyPr/>
+          <a:lstStyle/>
+          <a:p>
+            <a:endParaRPr lang="en-US"/>
+          </a:p>
+        </p:txBody>
+      </p:sp>
+      <p:sp>
+        <p:nvSpPr>
+          <p:cNvPr id="14" name="Shape 9"/>
+          <p:cNvSpPr/>
+          <p:nvPr/>
+        </p:nvSpPr>
+        <p:spPr>
+          <a:xfrm>
+            <a:off x="749808" y="3044952"/>
             <a:ext cx="420624" cy="420624"/>
           </a:xfrm>
           <a:prstGeom prst="ellipse">
@@ -6304,10 +5939,17 @@
           </a:solidFill>
           <a:ln/>
         </p:spPr>
+        <p:txBody>
+          <a:bodyPr/>
+          <a:lstStyle/>
+          <a:p>
+            <a:endParaRPr lang="en-US"/>
+          </a:p>
+        </p:txBody>
       </p:sp>
       <p:pic>
         <p:nvPicPr>
-          <p:cNvPr id="20" name="Image 4" descr="preencoded.png">    </p:cNvPr>
+          <p:cNvPr id="15" name="Image 3" descr="preencoded.png"/>
           <p:cNvPicPr>
             <a:picLocks noChangeAspect="1"/>
           </p:cNvPicPr>
@@ -6321,6 +5963,169 @@
         </p:blipFill>
         <p:spPr>
           <a:xfrm>
+            <a:off x="859170" y="3154314"/>
+            <a:ext cx="201900" cy="201900"/>
+          </a:xfrm>
+          <a:prstGeom prst="rect">
+            <a:avLst/>
+          </a:prstGeom>
+        </p:spPr>
+      </p:pic>
+      <p:sp>
+        <p:nvSpPr>
+          <p:cNvPr id="16" name="Text 10"/>
+          <p:cNvSpPr/>
+          <p:nvPr/>
+        </p:nvSpPr>
+        <p:spPr>
+          <a:xfrm>
+            <a:off x="1325880" y="2971800"/>
+            <a:ext cx="3200400" cy="566928"/>
+          </a:xfrm>
+          <a:prstGeom prst="rect">
+            <a:avLst/>
+          </a:prstGeom>
+          <a:noFill/>
+          <a:ln/>
+        </p:spPr>
+        <p:txBody>
+          <a:bodyPr wrap="square" lIns="0" tIns="0" rIns="0" bIns="0" rtlCol="0" anchor="ctr"/>
+          <a:lstStyle/>
+          <a:p>
+            <a:pPr marL="0" indent="0">
+              <a:buNone/>
+            </a:pPr>
+            <a:r>
+              <a:rPr lang="en-US" sz="1450" b="1" dirty="0">
+                <a:solidFill>
+                  <a:srgbClr val="141413"/>
+                </a:solidFill>
+                <a:latin typeface="Inter" pitchFamily="34" charset="0"/>
+                <a:ea typeface="Inter" pitchFamily="34" charset="-122"/>
+                <a:cs typeface="Inter" pitchFamily="34" charset="-120"/>
+              </a:rPr>
+              <a:t>Real Qdrant</a:t>
+            </a:r>
+            <a:endParaRPr lang="en-US" sz="1450" dirty="0"/>
+          </a:p>
+        </p:txBody>
+      </p:sp>
+      <p:sp>
+        <p:nvSpPr>
+          <p:cNvPr id="17" name="Text 11"/>
+          <p:cNvSpPr/>
+          <p:nvPr/>
+        </p:nvSpPr>
+        <p:spPr>
+          <a:xfrm>
+            <a:off x="4572000" y="2971800"/>
+            <a:ext cx="3840480" cy="566928"/>
+          </a:xfrm>
+          <a:prstGeom prst="rect">
+            <a:avLst/>
+          </a:prstGeom>
+          <a:noFill/>
+          <a:ln/>
+        </p:spPr>
+        <p:txBody>
+          <a:bodyPr wrap="square" lIns="0" tIns="0" rIns="0" bIns="0" rtlCol="0" anchor="ctr"/>
+          <a:lstStyle/>
+          <a:p>
+            <a:pPr marL="0" indent="0">
+              <a:buNone/>
+            </a:pPr>
+            <a:r>
+              <a:rPr lang="en-US" sz="1250" dirty="0">
+                <a:solidFill>
+                  <a:srgbClr val="615C52"/>
+                </a:solidFill>
+                <a:latin typeface="Inter" pitchFamily="34" charset="0"/>
+                <a:ea typeface="Inter" pitchFamily="34" charset="-122"/>
+                <a:cs typeface="Inter" pitchFamily="34" charset="-120"/>
+              </a:rPr>
+              <a:t>Vector queries run end to end</a:t>
+            </a:r>
+            <a:endParaRPr lang="en-US" sz="1250" dirty="0"/>
+          </a:p>
+        </p:txBody>
+      </p:sp>
+      <p:sp>
+        <p:nvSpPr>
+          <p:cNvPr id="18" name="Shape 12"/>
+          <p:cNvSpPr/>
+          <p:nvPr/>
+        </p:nvSpPr>
+        <p:spPr>
+          <a:xfrm>
+            <a:off x="548640" y="3611880"/>
+            <a:ext cx="8046720" cy="566928"/>
+          </a:xfrm>
+          <a:prstGeom prst="roundRect">
+            <a:avLst>
+              <a:gd name="adj" fmla="val 11290"/>
+            </a:avLst>
+          </a:prstGeom>
+          <a:solidFill>
+            <a:srgbClr val="FBFAF6"/>
+          </a:solidFill>
+          <a:ln w="12700">
+            <a:solidFill>
+              <a:srgbClr val="D8D3C6"/>
+            </a:solidFill>
+            <a:prstDash val="solid"/>
+          </a:ln>
+        </p:spPr>
+        <p:txBody>
+          <a:bodyPr/>
+          <a:lstStyle/>
+          <a:p>
+            <a:endParaRPr lang="en-US"/>
+          </a:p>
+        </p:txBody>
+      </p:sp>
+      <p:sp>
+        <p:nvSpPr>
+          <p:cNvPr id="19" name="Shape 13"/>
+          <p:cNvSpPr/>
+          <p:nvPr/>
+        </p:nvSpPr>
+        <p:spPr>
+          <a:xfrm>
+            <a:off x="749808" y="3685032"/>
+            <a:ext cx="420624" cy="420624"/>
+          </a:xfrm>
+          <a:prstGeom prst="ellipse">
+            <a:avLst/>
+          </a:prstGeom>
+          <a:solidFill>
+            <a:srgbClr val="D97757"/>
+          </a:solidFill>
+          <a:ln/>
+        </p:spPr>
+        <p:txBody>
+          <a:bodyPr/>
+          <a:lstStyle/>
+          <a:p>
+            <a:endParaRPr lang="en-US"/>
+          </a:p>
+        </p:txBody>
+      </p:sp>
+      <p:pic>
+        <p:nvPicPr>
+          <p:cNvPr id="20" name="Image 4" descr="preencoded.png"/>
+          <p:cNvPicPr>
+            <a:picLocks noChangeAspect="1"/>
+          </p:cNvPicPr>
+          <p:nvPr/>
+        </p:nvPicPr>
+        <p:blipFill>
+          <a:blip r:embed="rId6"/>
+          <a:stretch>
+            <a:fillRect/>
+          </a:stretch>
+        </p:blipFill>
+        <p:spPr>
+          <a:xfrm>
             <a:off x="859170" y="3794394"/>
             <a:ext cx="201900" cy="201900"/>
           </a:xfrm>
@@ -6350,7 +6155,7 @@
           <a:bodyPr wrap="square" lIns="0" tIns="0" rIns="0" bIns="0" rtlCol="0" anchor="ctr"/>
           <a:lstStyle/>
           <a:p>
-            <a:pPr indent="0" marL="0">
+            <a:pPr marL="0" indent="0">
               <a:buNone/>
             </a:pPr>
             <a:r>
@@ -6389,7 +6194,7 @@
           <a:bodyPr wrap="square" lIns="0" tIns="0" rIns="0" bIns="0" rtlCol="0" anchor="ctr"/>
           <a:lstStyle/>
           <a:p>
-            <a:pPr indent="0" marL="0">
+            <a:pPr marL="0" indent="0">
               <a:buNone/>
             </a:pPr>
             <a:r>
@@ -6428,7 +6233,7 @@
           <a:bodyPr wrap="square" rtlCol="0" anchor="ctr"/>
           <a:lstStyle/>
           <a:p>
-            <a:pPr indent="0" marL="0">
+            <a:pPr marL="0" indent="0">
               <a:buNone/>
             </a:pPr>
             <a:r>
@@ -6467,7 +6272,7 @@
           <a:bodyPr wrap="square" rtlCol="0" anchor="ctr"/>
           <a:lstStyle/>
           <a:p>
-            <a:pPr algn="r" indent="0" marL="0">
+            <a:pPr marL="0" indent="0" algn="r">
               <a:buNone/>
             </a:pPr>
             <a:r>
@@ -6482,45 +6287,6 @@
               <a:t>Day 2 · Section 5  ·  5/11</a:t>
             </a:r>
             <a:endParaRPr lang="en-US" sz="900" dirty="0"/>
-          </a:p>
-        </p:txBody>
-      </p:sp>
-      <p:sp>
-        <p:nvSpPr>
-          <p:cNvPr id="25" name="Text 18"/>
-          <p:cNvSpPr/>
-          <p:nvPr/>
-        </p:nvSpPr>
-        <p:spPr>
-          <a:xfrm>
-            <a:off x="548640" y="4462272"/>
-            <a:ext cx="8046720" cy="274320"/>
-          </a:xfrm>
-          <a:prstGeom prst="rect">
-            <a:avLst/>
-          </a:prstGeom>
-          <a:noFill/>
-          <a:ln/>
-        </p:spPr>
-        <p:txBody>
-          <a:bodyPr wrap="square" lIns="0" tIns="0" rIns="0" bIns="0" rtlCol="0" anchor="ctr"/>
-          <a:lstStyle/>
-          <a:p>
-            <a:pPr indent="0" marL="0">
-              <a:buNone/>
-            </a:pPr>
-            <a:r>
-              <a:rPr lang="en-US" sz="1000" i="1" dirty="0">
-                <a:solidFill>
-                  <a:srgbClr val="615C52"/>
-                </a:solidFill>
-                <a:latin typeface="Inter" pitchFamily="34" charset="0"/>
-                <a:ea typeface="Inter" pitchFamily="34" charset="-122"/>
-                <a:cs typeface="Inter" pitchFamily="34" charset="-120"/>
-              </a:rPr>
-              <a:t>▸ Spin up the real dependencies in Docker — integration tests with zero mocks.</a:t>
-            </a:r>
-            <a:endParaRPr lang="en-US" sz="1000" dirty="0"/>
           </a:p>
         </p:txBody>
       </p:sp>
@@ -6540,6 +6306,7 @@
         <a:solidFill>
           <a:srgbClr val="F0EEE6"/>
         </a:solidFill>
+        <a:effectLst/>
       </p:bgPr>
     </p:bg>
     <p:spTree>
@@ -6577,11 +6344,11 @@
           <a:bodyPr wrap="square" lIns="0" tIns="0" rIns="0" bIns="0" rtlCol="0" anchor="ctr"/>
           <a:lstStyle/>
           <a:p>
-            <a:pPr indent="0" marL="0">
-              <a:buNone/>
-            </a:pPr>
-            <a:r>
-              <a:rPr lang="en-US" sz="1100" b="1" spc="200" kern="0" dirty="0">
+            <a:pPr marL="0" indent="0">
+              <a:buNone/>
+            </a:pPr>
+            <a:r>
+              <a:rPr lang="en-US" sz="1100" b="1" kern="0" spc="200" dirty="0">
                 <a:solidFill>
                   <a:srgbClr val="C25E40"/>
                 </a:solidFill>
@@ -6616,7 +6383,7 @@
           <a:bodyPr wrap="square" lIns="0" tIns="0" rIns="0" bIns="0" rtlCol="0" anchor="ctr"/>
           <a:lstStyle/>
           <a:p>
-            <a:pPr indent="0" marL="0">
+            <a:pPr marL="0" indent="0">
               <a:buNone/>
             </a:pPr>
             <a:r>
@@ -6636,14 +6403,14 @@
       </p:sp>
       <p:pic>
         <p:nvPicPr>
-          <p:cNvPr id="4" name="Image 0" descr="preencoded.png">    </p:cNvPr>
+          <p:cNvPr id="4" name="Image 0" descr="preencoded.png"/>
           <p:cNvPicPr>
             <a:picLocks noChangeAspect="1"/>
           </p:cNvPicPr>
           <p:nvPr/>
         </p:nvPicPr>
         <p:blipFill>
-          <a:blip r:embed="rId1"/>
+          <a:blip r:embed="rId2"/>
           <a:stretch>
             <a:fillRect/>
           </a:stretch>
@@ -6684,13 +6451,20 @@
             <a:prstDash val="solid"/>
           </a:ln>
           <a:effectLst>
-            <a:outerShdw sx="100000" sy="100000" kx="0" ky="0" algn="bl" rotWithShape="0" blurRad="88900" dist="38100" dir="5400000">
+            <a:outerShdw blurRad="88900" dist="38100" dir="5400000" algn="bl" rotWithShape="0">
               <a:srgbClr val="000000">
                 <a:alpha val="10000"/>
               </a:srgbClr>
             </a:outerShdw>
           </a:effectLst>
         </p:spPr>
+        <p:txBody>
+          <a:bodyPr/>
+          <a:lstStyle/>
+          <a:p>
+            <a:endParaRPr lang="en-US"/>
+          </a:p>
+        </p:txBody>
       </p:sp>
       <p:sp>
         <p:nvSpPr>
@@ -6711,17 +6485,24 @@
           </a:solidFill>
           <a:ln/>
         </p:spPr>
+        <p:txBody>
+          <a:bodyPr/>
+          <a:lstStyle/>
+          <a:p>
+            <a:endParaRPr lang="en-US"/>
+          </a:p>
+        </p:txBody>
       </p:sp>
       <p:pic>
         <p:nvPicPr>
-          <p:cNvPr id="7" name="Image 1" descr="preencoded.png">    </p:cNvPr>
+          <p:cNvPr id="7" name="Image 1" descr="preencoded.png"/>
           <p:cNvPicPr>
             <a:picLocks noChangeAspect="1"/>
           </p:cNvPicPr>
           <p:nvPr/>
         </p:nvPicPr>
         <p:blipFill>
-          <a:blip r:embed="rId2"/>
+          <a:blip r:embed="rId3"/>
           <a:stretch>
             <a:fillRect/>
           </a:stretch>
@@ -6757,7 +6538,7 @@
           <a:bodyPr wrap="square" lIns="0" tIns="0" rIns="0" bIns="0" rtlCol="0" anchor="ctr"/>
           <a:lstStyle/>
           <a:p>
-            <a:pPr algn="ctr" indent="0" marL="0">
+            <a:pPr marL="0" indent="0" algn="ctr">
               <a:buNone/>
             </a:pPr>
             <a:r>
@@ -6796,7 +6577,7 @@
           <a:bodyPr wrap="square" lIns="0" tIns="0" rIns="0" bIns="0" rtlCol="0" anchor="ctr"/>
           <a:lstStyle/>
           <a:p>
-            <a:pPr algn="ctr" indent="0" marL="0">
+            <a:pPr marL="0" indent="0" algn="ctr">
               <a:buNone/>
             </a:pPr>
             <a:r>
@@ -6835,7 +6616,7 @@
           <a:bodyPr wrap="square" lIns="0" tIns="0" rIns="0" bIns="0" rtlCol="0" anchor="ctr"/>
           <a:lstStyle/>
           <a:p>
-            <a:pPr algn="ctr" indent="0" marL="0">
+            <a:pPr marL="0" indent="0" algn="ctr">
               <a:buNone/>
             </a:pPr>
             <a:r>
@@ -6879,13 +6660,20 @@
             <a:prstDash val="solid"/>
           </a:ln>
           <a:effectLst>
-            <a:outerShdw sx="100000" sy="100000" kx="0" ky="0" algn="bl" rotWithShape="0" blurRad="88900" dist="38100" dir="5400000">
+            <a:outerShdw blurRad="88900" dist="38100" dir="5400000" algn="bl" rotWithShape="0">
               <a:srgbClr val="000000">
                 <a:alpha val="10000"/>
               </a:srgbClr>
             </a:outerShdw>
           </a:effectLst>
         </p:spPr>
+        <p:txBody>
+          <a:bodyPr/>
+          <a:lstStyle/>
+          <a:p>
+            <a:endParaRPr lang="en-US"/>
+          </a:p>
+        </p:txBody>
       </p:sp>
       <p:sp>
         <p:nvSpPr>
@@ -6906,17 +6694,24 @@
           </a:solidFill>
           <a:ln/>
         </p:spPr>
+        <p:txBody>
+          <a:bodyPr/>
+          <a:lstStyle/>
+          <a:p>
+            <a:endParaRPr lang="en-US"/>
+          </a:p>
+        </p:txBody>
       </p:sp>
       <p:pic>
         <p:nvPicPr>
-          <p:cNvPr id="13" name="Image 2" descr="preencoded.png">    </p:cNvPr>
+          <p:cNvPr id="13" name="Image 2" descr="preencoded.png"/>
           <p:cNvPicPr>
             <a:picLocks noChangeAspect="1"/>
           </p:cNvPicPr>
           <p:nvPr/>
         </p:nvPicPr>
         <p:blipFill>
-          <a:blip r:embed="rId3"/>
+          <a:blip r:embed="rId4"/>
           <a:stretch>
             <a:fillRect/>
           </a:stretch>
@@ -6952,7 +6747,7 @@
           <a:bodyPr wrap="square" lIns="0" tIns="0" rIns="0" bIns="0" rtlCol="0" anchor="ctr"/>
           <a:lstStyle/>
           <a:p>
-            <a:pPr algn="ctr" indent="0" marL="0">
+            <a:pPr marL="0" indent="0" algn="ctr">
               <a:buNone/>
             </a:pPr>
             <a:r>
@@ -6991,7 +6786,7 @@
           <a:bodyPr wrap="square" lIns="0" tIns="0" rIns="0" bIns="0" rtlCol="0" anchor="ctr"/>
           <a:lstStyle/>
           <a:p>
-            <a:pPr algn="ctr" indent="0" marL="0">
+            <a:pPr marL="0" indent="0" algn="ctr">
               <a:buNone/>
             </a:pPr>
             <a:r>
@@ -7030,7 +6825,7 @@
           <a:bodyPr wrap="square" lIns="0" tIns="0" rIns="0" bIns="0" rtlCol="0" anchor="ctr"/>
           <a:lstStyle/>
           <a:p>
-            <a:pPr algn="ctr" indent="0" marL="0">
+            <a:pPr marL="0" indent="0" algn="ctr">
               <a:buNone/>
             </a:pPr>
             <a:r>
@@ -7074,13 +6869,20 @@
             <a:prstDash val="solid"/>
           </a:ln>
           <a:effectLst>
-            <a:outerShdw sx="100000" sy="100000" kx="0" ky="0" algn="bl" rotWithShape="0" blurRad="88900" dist="38100" dir="5400000">
+            <a:outerShdw blurRad="88900" dist="38100" dir="5400000" algn="bl" rotWithShape="0">
               <a:srgbClr val="000000">
                 <a:alpha val="10000"/>
               </a:srgbClr>
             </a:outerShdw>
           </a:effectLst>
         </p:spPr>
+        <p:txBody>
+          <a:bodyPr/>
+          <a:lstStyle/>
+          <a:p>
+            <a:endParaRPr lang="en-US"/>
+          </a:p>
+        </p:txBody>
       </p:sp>
       <p:sp>
         <p:nvSpPr>
@@ -7101,17 +6903,24 @@
           </a:solidFill>
           <a:ln/>
         </p:spPr>
+        <p:txBody>
+          <a:bodyPr/>
+          <a:lstStyle/>
+          <a:p>
+            <a:endParaRPr lang="en-US"/>
+          </a:p>
+        </p:txBody>
       </p:sp>
       <p:pic>
         <p:nvPicPr>
-          <p:cNvPr id="19" name="Image 3" descr="preencoded.png">    </p:cNvPr>
+          <p:cNvPr id="19" name="Image 3" descr="preencoded.png"/>
           <p:cNvPicPr>
             <a:picLocks noChangeAspect="1"/>
           </p:cNvPicPr>
           <p:nvPr/>
         </p:nvPicPr>
         <p:blipFill>
-          <a:blip r:embed="rId4"/>
+          <a:blip r:embed="rId5"/>
           <a:stretch>
             <a:fillRect/>
           </a:stretch>
@@ -7147,7 +6956,7 @@
           <a:bodyPr wrap="square" lIns="0" tIns="0" rIns="0" bIns="0" rtlCol="0" anchor="ctr"/>
           <a:lstStyle/>
           <a:p>
-            <a:pPr algn="ctr" indent="0" marL="0">
+            <a:pPr marL="0" indent="0" algn="ctr">
               <a:buNone/>
             </a:pPr>
             <a:r>
@@ -7186,7 +6995,7 @@
           <a:bodyPr wrap="square" lIns="0" tIns="0" rIns="0" bIns="0" rtlCol="0" anchor="ctr"/>
           <a:lstStyle/>
           <a:p>
-            <a:pPr algn="ctr" indent="0" marL="0">
+            <a:pPr marL="0" indent="0" algn="ctr">
               <a:buNone/>
             </a:pPr>
             <a:r>
@@ -7225,13 +7034,20 @@
           </a:solidFill>
           <a:ln/>
           <a:effectLst>
-            <a:outerShdw sx="100000" sy="100000" kx="0" ky="0" algn="bl" rotWithShape="0" blurRad="88900" dist="38100" dir="5400000">
+            <a:outerShdw blurRad="88900" dist="38100" dir="5400000" algn="bl" rotWithShape="0">
               <a:srgbClr val="000000">
                 <a:alpha val="10000"/>
               </a:srgbClr>
             </a:outerShdw>
           </a:effectLst>
         </p:spPr>
+        <p:txBody>
+          <a:bodyPr/>
+          <a:lstStyle/>
+          <a:p>
+            <a:endParaRPr lang="en-US"/>
+          </a:p>
+        </p:txBody>
       </p:sp>
       <p:sp>
         <p:nvSpPr>
@@ -7254,7 +7070,7 @@
           <a:bodyPr wrap="square" lIns="0" tIns="0" rIns="0" bIns="0" rtlCol="0" anchor="t"/>
           <a:lstStyle/>
           <a:p>
-            <a:pPr indent="0" marL="0">
+            <a:pPr marL="0" indent="0">
               <a:lnSpc>
                 <a:spcPct val="128000"/>
               </a:lnSpc>
@@ -7274,7 +7090,7 @@
             <a:endParaRPr lang="en-US" sz="1300" dirty="0"/>
           </a:p>
           <a:p>
-            <a:pPr indent="0" marL="0">
+            <a:pPr marL="0" indent="0">
               <a:lnSpc>
                 <a:spcPct val="128000"/>
               </a:lnSpc>
@@ -7291,12 +7107,6 @@
               </a:rPr>
               <a:t>$ </a:t>
             </a:r>
-            <a:pPr indent="0" marL="0">
-              <a:lnSpc>
-                <a:spcPct val="128000"/>
-              </a:lnSpc>
-              <a:buNone/>
-            </a:pPr>
             <a:r>
               <a:rPr lang="en-US" sz="1300" dirty="0">
                 <a:solidFill>
@@ -7308,12 +7118,6 @@
               </a:rPr>
               <a:t>claude --model </a:t>
             </a:r>
-            <a:pPr indent="0" marL="0">
-              <a:lnSpc>
-                <a:spcPct val="128000"/>
-              </a:lnSpc>
-              <a:buNone/>
-            </a:pPr>
             <a:r>
               <a:rPr lang="en-US" sz="1300" dirty="0">
                 <a:solidFill>
@@ -7325,12 +7129,6 @@
               </a:rPr>
               <a:t>claude-haiku-4-5</a:t>
             </a:r>
-            <a:pPr indent="0" marL="0">
-              <a:lnSpc>
-                <a:spcPct val="128000"/>
-              </a:lnSpc>
-              <a:buNone/>
-            </a:pPr>
             <a:r>
               <a:rPr lang="en-US" sz="1300" dirty="0">
                 <a:solidFill>
@@ -7342,12 +7140,6 @@
               </a:rPr>
               <a:t> -p </a:t>
             </a:r>
-            <a:pPr indent="0" marL="0">
-              <a:lnSpc>
-                <a:spcPct val="128000"/>
-              </a:lnSpc>
-              <a:buNone/>
-            </a:pPr>
             <a:r>
               <a:rPr lang="en-US" sz="1300" dirty="0">
                 <a:solidFill>
@@ -7384,7 +7176,7 @@
           <a:bodyPr wrap="square" rtlCol="0" anchor="ctr"/>
           <a:lstStyle/>
           <a:p>
-            <a:pPr indent="0" marL="0">
+            <a:pPr marL="0" indent="0">
               <a:buNone/>
             </a:pPr>
             <a:r>
@@ -7423,7 +7215,7 @@
           <a:bodyPr wrap="square" rtlCol="0" anchor="ctr"/>
           <a:lstStyle/>
           <a:p>
-            <a:pPr algn="r" indent="0" marL="0">
+            <a:pPr marL="0" indent="0" algn="r">
               <a:buNone/>
             </a:pPr>
             <a:r>
@@ -7438,45 +7230,6 @@
               <a:t>Day 2 · Section 5  ·  6/11</a:t>
             </a:r>
             <a:endParaRPr lang="en-US" sz="900" dirty="0"/>
-          </a:p>
-        </p:txBody>
-      </p:sp>
-      <p:sp>
-        <p:nvSpPr>
-          <p:cNvPr id="26" name="Text 20"/>
-          <p:cNvSpPr/>
-          <p:nvPr/>
-        </p:nvSpPr>
-        <p:spPr>
-          <a:xfrm>
-            <a:off x="548640" y="4462272"/>
-            <a:ext cx="8046720" cy="274320"/>
-          </a:xfrm>
-          <a:prstGeom prst="rect">
-            <a:avLst/>
-          </a:prstGeom>
-          <a:noFill/>
-          <a:ln/>
-        </p:spPr>
-        <p:txBody>
-          <a:bodyPr wrap="square" lIns="0" tIns="0" rIns="0" bIns="0" rtlCol="0" anchor="ctr"/>
-          <a:lstStyle/>
-          <a:p>
-            <a:pPr indent="0" marL="0">
-              <a:buNone/>
-            </a:pPr>
-            <a:r>
-              <a:rPr lang="en-US" sz="1000" i="1" dirty="0">
-                <a:solidFill>
-                  <a:srgbClr val="615C52"/>
-                </a:solidFill>
-                <a:latin typeface="Inter" pitchFamily="34" charset="0"/>
-                <a:ea typeface="Inter" pitchFamily="34" charset="-122"/>
-                <a:cs typeface="Inter" pitchFamily="34" charset="-120"/>
-              </a:rPr>
-              <a:t>▸ Headless Claude reviews the diff in CI — Haiku keeps the per-PR cost low.</a:t>
-            </a:r>
-            <a:endParaRPr lang="en-US" sz="1000" dirty="0"/>
           </a:p>
         </p:txBody>
       </p:sp>
@@ -7496,6 +7249,7 @@
         <a:solidFill>
           <a:srgbClr val="F0EEE6"/>
         </a:solidFill>
+        <a:effectLst/>
       </p:bgPr>
     </p:bg>
     <p:spTree>
@@ -7533,11 +7287,11 @@
           <a:bodyPr wrap="square" lIns="0" tIns="0" rIns="0" bIns="0" rtlCol="0" anchor="ctr"/>
           <a:lstStyle/>
           <a:p>
-            <a:pPr indent="0" marL="0">
-              <a:buNone/>
-            </a:pPr>
-            <a:r>
-              <a:rPr lang="en-US" sz="1100" b="1" spc="200" kern="0" dirty="0">
+            <a:pPr marL="0" indent="0">
+              <a:buNone/>
+            </a:pPr>
+            <a:r>
+              <a:rPr lang="en-US" sz="1100" b="1" kern="0" spc="200" dirty="0">
                 <a:solidFill>
                   <a:srgbClr val="C25E40"/>
                 </a:solidFill>
@@ -7572,7 +7326,7 @@
           <a:bodyPr wrap="square" lIns="0" tIns="0" rIns="0" bIns="0" rtlCol="0" anchor="ctr"/>
           <a:lstStyle/>
           <a:p>
-            <a:pPr indent="0" marL="0">
+            <a:pPr marL="0" indent="0">
               <a:buNone/>
             </a:pPr>
             <a:r>
@@ -7592,274 +7346,7 @@
       </p:sp>
       <p:pic>
         <p:nvPicPr>
-          <p:cNvPr id="4" name="Image 0" descr="preencoded.png">    </p:cNvPr>
-          <p:cNvPicPr>
-            <a:picLocks noChangeAspect="1"/>
-          </p:cNvPicPr>
-          <p:nvPr/>
-        </p:nvPicPr>
-        <p:blipFill>
-          <a:blip r:embed="rId1"/>
-          <a:stretch>
-            <a:fillRect/>
-          </a:stretch>
-        </p:blipFill>
-        <p:spPr>
-          <a:xfrm>
-            <a:off x="8321040" y="411480"/>
-            <a:ext cx="347472" cy="292608"/>
-          </a:xfrm>
-          <a:prstGeom prst="rect">
-            <a:avLst/>
-          </a:prstGeom>
-        </p:spPr>
-      </p:pic>
-      <p:sp>
-        <p:nvSpPr>
-          <p:cNvPr id="5" name="Shape 2"/>
-          <p:cNvSpPr/>
-          <p:nvPr/>
-        </p:nvSpPr>
-        <p:spPr>
-          <a:xfrm>
-            <a:off x="548640" y="1371600"/>
-            <a:ext cx="4206240" cy="1481328"/>
-          </a:xfrm>
-          <a:prstGeom prst="roundRect">
-            <a:avLst>
-              <a:gd name="adj" fmla="val 4938"/>
-            </a:avLst>
-          </a:prstGeom>
-          <a:solidFill>
-            <a:srgbClr val="1F1E1D"/>
-          </a:solidFill>
-          <a:ln/>
-          <a:effectLst>
-            <a:outerShdw sx="100000" sy="100000" kx="0" ky="0" algn="bl" rotWithShape="0" blurRad="88900" dist="38100" dir="5400000">
-              <a:srgbClr val="000000">
-                <a:alpha val="10000"/>
-              </a:srgbClr>
-            </a:outerShdw>
-          </a:effectLst>
-        </p:spPr>
-      </p:sp>
-      <p:sp>
-        <p:nvSpPr>
-          <p:cNvPr id="6" name="Text 3"/>
-          <p:cNvSpPr/>
-          <p:nvPr/>
-        </p:nvSpPr>
-        <p:spPr>
-          <a:xfrm>
-            <a:off x="822960" y="1517904"/>
-            <a:ext cx="3657600" cy="256032"/>
-          </a:xfrm>
-          <a:prstGeom prst="rect">
-            <a:avLst/>
-          </a:prstGeom>
-          <a:noFill/>
-          <a:ln/>
-        </p:spPr>
-        <p:txBody>
-          <a:bodyPr wrap="square" lIns="0" tIns="0" rIns="0" bIns="0" rtlCol="0" anchor="ctr"/>
-          <a:lstStyle/>
-          <a:p>
-            <a:pPr indent="0" marL="0">
-              <a:buNone/>
-            </a:pPr>
-            <a:r>
-              <a:rPr lang="en-US" sz="1050" b="1" spc="50" kern="0" dirty="0">
-                <a:solidFill>
-                  <a:srgbClr val="D97757"/>
-                </a:solidFill>
-                <a:latin typeface="Courier New" pitchFamily="34" charset="0"/>
-                <a:ea typeface="Courier New" pitchFamily="34" charset="-122"/>
-                <a:cs typeface="Courier New" pitchFamily="34" charset="-120"/>
-              </a:rPr>
-              <a:t>// trigger</a:t>
-            </a:r>
-            <a:endParaRPr lang="en-US" sz="1050" dirty="0"/>
-          </a:p>
-        </p:txBody>
-      </p:sp>
-      <p:sp>
-        <p:nvSpPr>
-          <p:cNvPr id="7" name="Text 4"/>
-          <p:cNvSpPr/>
-          <p:nvPr/>
-        </p:nvSpPr>
-        <p:spPr>
-          <a:xfrm>
-            <a:off x="841248" y="1828800"/>
-            <a:ext cx="3657600" cy="841248"/>
-          </a:xfrm>
-          <a:prstGeom prst="rect">
-            <a:avLst/>
-          </a:prstGeom>
-          <a:noFill/>
-          <a:ln/>
-        </p:spPr>
-        <p:txBody>
-          <a:bodyPr wrap="square" lIns="0" tIns="0" rIns="0" bIns="0" rtlCol="0" anchor="t"/>
-          <a:lstStyle/>
-          <a:p>
-            <a:pPr indent="0" marL="0">
-              <a:lnSpc>
-                <a:spcPct val="128000"/>
-              </a:lnSpc>
-              <a:buNone/>
-            </a:pPr>
-            <a:r>
-              <a:rPr lang="en-US" sz="1250" dirty="0">
-                <a:solidFill>
-                  <a:srgbClr val="E9E5DD"/>
-                </a:solidFill>
-                <a:latin typeface="Courier New" pitchFamily="34" charset="0"/>
-                <a:ea typeface="Courier New" pitchFamily="34" charset="-122"/>
-                <a:cs typeface="Courier New" pitchFamily="34" charset="-120"/>
-              </a:rPr>
-              <a:t>on: push:</a:t>
-            </a:r>
-            <a:endParaRPr lang="en-US" sz="1250" dirty="0"/>
-          </a:p>
-          <a:p>
-            <a:pPr indent="0" marL="0">
-              <a:lnSpc>
-                <a:spcPct val="128000"/>
-              </a:lnSpc>
-              <a:buNone/>
-            </a:pPr>
-            <a:r>
-              <a:rPr lang="en-US" sz="1250" dirty="0">
-                <a:solidFill>
-                  <a:srgbClr val="E9E5DD"/>
-                </a:solidFill>
-                <a:latin typeface="Courier New" pitchFamily="34" charset="0"/>
-                <a:ea typeface="Courier New" pitchFamily="34" charset="-122"/>
-                <a:cs typeface="Courier New" pitchFamily="34" charset="-120"/>
-              </a:rPr>
-              <a:t>  tags: [ </a:t>
-            </a:r>
-            <a:pPr indent="0" marL="0">
-              <a:lnSpc>
-                <a:spcPct val="128000"/>
-              </a:lnSpc>
-              <a:buNone/>
-            </a:pPr>
-            <a:r>
-              <a:rPr lang="en-US" sz="1250" dirty="0">
-                <a:solidFill>
-                  <a:srgbClr val="E0A04A"/>
-                </a:solidFill>
-                <a:latin typeface="Courier New" pitchFamily="34" charset="0"/>
-                <a:ea typeface="Courier New" pitchFamily="34" charset="-122"/>
-                <a:cs typeface="Courier New" pitchFamily="34" charset="-120"/>
-              </a:rPr>
-              <a:t>"v*"</a:t>
-            </a:r>
-            <a:pPr indent="0" marL="0">
-              <a:lnSpc>
-                <a:spcPct val="128000"/>
-              </a:lnSpc>
-              <a:buNone/>
-            </a:pPr>
-            <a:r>
-              <a:rPr lang="en-US" sz="1250" dirty="0">
-                <a:solidFill>
-                  <a:srgbClr val="E9E5DD"/>
-                </a:solidFill>
-                <a:latin typeface="Courier New" pitchFamily="34" charset="0"/>
-                <a:ea typeface="Courier New" pitchFamily="34" charset="-122"/>
-                <a:cs typeface="Courier New" pitchFamily="34" charset="-120"/>
-              </a:rPr>
-              <a:t> ]</a:t>
-            </a:r>
-            <a:endParaRPr lang="en-US" sz="1250" dirty="0"/>
-          </a:p>
-          <a:p>
-            <a:pPr indent="0" marL="0">
-              <a:lnSpc>
-                <a:spcPct val="128000"/>
-              </a:lnSpc>
-              <a:buNone/>
-            </a:pPr>
-            <a:r>
-              <a:rPr lang="en-US" sz="1250" dirty="0">
-                <a:solidFill>
-                  <a:srgbClr val="9A958B"/>
-                </a:solidFill>
-                <a:latin typeface="Courier New" pitchFamily="34" charset="0"/>
-                <a:ea typeface="Courier New" pitchFamily="34" charset="-122"/>
-                <a:cs typeface="Courier New" pitchFamily="34" charset="-120"/>
-              </a:rPr>
-              <a:t># git log → Claude → notes</a:t>
-            </a:r>
-            <a:endParaRPr lang="en-US" sz="1250" dirty="0"/>
-          </a:p>
-        </p:txBody>
-      </p:sp>
-      <p:sp>
-        <p:nvSpPr>
-          <p:cNvPr id="8" name="Text 5"/>
-          <p:cNvSpPr/>
-          <p:nvPr/>
-        </p:nvSpPr>
-        <p:spPr>
-          <a:xfrm>
-            <a:off x="5029200" y="1371600"/>
-            <a:ext cx="3657600" cy="274320"/>
-          </a:xfrm>
-          <a:prstGeom prst="rect">
-            <a:avLst/>
-          </a:prstGeom>
-          <a:noFill/>
-          <a:ln/>
-        </p:spPr>
-        <p:txBody>
-          <a:bodyPr wrap="square" lIns="0" tIns="0" rIns="0" bIns="0" rtlCol="0" anchor="ctr"/>
-          <a:lstStyle/>
-          <a:p>
-            <a:pPr indent="0" marL="0">
-              <a:buNone/>
-            </a:pPr>
-            <a:r>
-              <a:rPr lang="en-US" sz="1100" b="1" spc="100" kern="0" dirty="0">
-                <a:solidFill>
-                  <a:srgbClr val="C25E40"/>
-                </a:solidFill>
-                <a:latin typeface="Inter" pitchFamily="34" charset="0"/>
-                <a:ea typeface="Inter" pitchFamily="34" charset="-122"/>
-                <a:cs typeface="Inter" pitchFamily="34" charset="-120"/>
-              </a:rPr>
-              <a:t>GROUPED INTO</a:t>
-            </a:r>
-            <a:endParaRPr lang="en-US" sz="1100" dirty="0"/>
-          </a:p>
-        </p:txBody>
-      </p:sp>
-      <p:sp>
-        <p:nvSpPr>
-          <p:cNvPr id="9" name="Shape 6"/>
-          <p:cNvSpPr/>
-          <p:nvPr/>
-        </p:nvSpPr>
-        <p:spPr>
-          <a:xfrm>
-            <a:off x="5029200" y="1691640"/>
-            <a:ext cx="365760" cy="365760"/>
-          </a:xfrm>
-          <a:prstGeom prst="ellipse">
-            <a:avLst/>
-          </a:prstGeom>
-          <a:solidFill>
-            <a:srgbClr val="D97757"/>
-          </a:solidFill>
-          <a:ln/>
-        </p:spPr>
-      </p:sp>
-      <p:pic>
-        <p:nvPicPr>
-          <p:cNvPr id="10" name="Image 1" descr="preencoded.png">    </p:cNvPr>
+          <p:cNvPr id="4" name="Image 0" descr="preencoded.png"/>
           <p:cNvPicPr>
             <a:picLocks noChangeAspect="1"/>
           </p:cNvPicPr>
@@ -7873,8 +7360,8 @@
         </p:blipFill>
         <p:spPr>
           <a:xfrm>
-            <a:off x="5124298" y="1786738"/>
-            <a:ext cx="175565" cy="175565"/>
+            <a:off x="8321040" y="411480"/>
+            <a:ext cx="347472" cy="292608"/>
           </a:xfrm>
           <a:prstGeom prst="rect">
             <a:avLst/>
@@ -7883,52 +7370,231 @@
       </p:pic>
       <p:sp>
         <p:nvSpPr>
-          <p:cNvPr id="11" name="Text 7"/>
-          <p:cNvSpPr/>
-          <p:nvPr/>
-        </p:nvSpPr>
-        <p:spPr>
-          <a:xfrm>
-            <a:off x="5541264" y="1691640"/>
-            <a:ext cx="3200400" cy="365760"/>
-          </a:xfrm>
-          <a:prstGeom prst="rect">
-            <a:avLst/>
-          </a:prstGeom>
-          <a:noFill/>
-          <a:ln/>
-        </p:spPr>
-        <p:txBody>
-          <a:bodyPr wrap="square" lIns="0" tIns="0" rIns="0" bIns="0" rtlCol="0" anchor="ctr"/>
-          <a:lstStyle/>
-          <a:p>
-            <a:pPr indent="0" marL="0">
-              <a:buNone/>
-            </a:pPr>
-            <a:r>
-              <a:rPr lang="en-US" sz="1400" b="1" dirty="0">
-                <a:solidFill>
-                  <a:srgbClr val="141413"/>
-                </a:solidFill>
-                <a:latin typeface="Inter" pitchFamily="34" charset="0"/>
-                <a:ea typeface="Inter" pitchFamily="34" charset="-122"/>
-                <a:cs typeface="Inter" pitchFamily="34" charset="-120"/>
-              </a:rPr>
-              <a:t>What's New</a:t>
-            </a:r>
-            <a:endParaRPr lang="en-US" sz="1400" dirty="0"/>
-          </a:p>
-        </p:txBody>
-      </p:sp>
-      <p:sp>
-        <p:nvSpPr>
-          <p:cNvPr id="12" name="Shape 8"/>
-          <p:cNvSpPr/>
-          <p:nvPr/>
-        </p:nvSpPr>
-        <p:spPr>
-          <a:xfrm>
-            <a:off x="5029200" y="2194560"/>
+          <p:cNvPr id="5" name="Shape 2"/>
+          <p:cNvSpPr/>
+          <p:nvPr/>
+        </p:nvSpPr>
+        <p:spPr>
+          <a:xfrm>
+            <a:off x="548640" y="1371600"/>
+            <a:ext cx="4206240" cy="1481328"/>
+          </a:xfrm>
+          <a:prstGeom prst="roundRect">
+            <a:avLst>
+              <a:gd name="adj" fmla="val 4938"/>
+            </a:avLst>
+          </a:prstGeom>
+          <a:solidFill>
+            <a:srgbClr val="1F1E1D"/>
+          </a:solidFill>
+          <a:ln/>
+          <a:effectLst>
+            <a:outerShdw blurRad="88900" dist="38100" dir="5400000" algn="bl" rotWithShape="0">
+              <a:srgbClr val="000000">
+                <a:alpha val="10000"/>
+              </a:srgbClr>
+            </a:outerShdw>
+          </a:effectLst>
+        </p:spPr>
+        <p:txBody>
+          <a:bodyPr/>
+          <a:lstStyle/>
+          <a:p>
+            <a:endParaRPr lang="en-US"/>
+          </a:p>
+        </p:txBody>
+      </p:sp>
+      <p:sp>
+        <p:nvSpPr>
+          <p:cNvPr id="6" name="Text 3"/>
+          <p:cNvSpPr/>
+          <p:nvPr/>
+        </p:nvSpPr>
+        <p:spPr>
+          <a:xfrm>
+            <a:off x="822960" y="1517904"/>
+            <a:ext cx="3657600" cy="256032"/>
+          </a:xfrm>
+          <a:prstGeom prst="rect">
+            <a:avLst/>
+          </a:prstGeom>
+          <a:noFill/>
+          <a:ln/>
+        </p:spPr>
+        <p:txBody>
+          <a:bodyPr wrap="square" lIns="0" tIns="0" rIns="0" bIns="0" rtlCol="0" anchor="ctr"/>
+          <a:lstStyle/>
+          <a:p>
+            <a:pPr marL="0" indent="0">
+              <a:buNone/>
+            </a:pPr>
+            <a:r>
+              <a:rPr lang="en-US" sz="1050" b="1" kern="0" spc="50" dirty="0">
+                <a:solidFill>
+                  <a:srgbClr val="D97757"/>
+                </a:solidFill>
+                <a:latin typeface="Courier New" pitchFamily="34" charset="0"/>
+                <a:ea typeface="Courier New" pitchFamily="34" charset="-122"/>
+                <a:cs typeface="Courier New" pitchFamily="34" charset="-120"/>
+              </a:rPr>
+              <a:t>// trigger</a:t>
+            </a:r>
+            <a:endParaRPr lang="en-US" sz="1050" dirty="0"/>
+          </a:p>
+        </p:txBody>
+      </p:sp>
+      <p:sp>
+        <p:nvSpPr>
+          <p:cNvPr id="7" name="Text 4"/>
+          <p:cNvSpPr/>
+          <p:nvPr/>
+        </p:nvSpPr>
+        <p:spPr>
+          <a:xfrm>
+            <a:off x="841248" y="1828800"/>
+            <a:ext cx="3657600" cy="841248"/>
+          </a:xfrm>
+          <a:prstGeom prst="rect">
+            <a:avLst/>
+          </a:prstGeom>
+          <a:noFill/>
+          <a:ln/>
+        </p:spPr>
+        <p:txBody>
+          <a:bodyPr wrap="square" lIns="0" tIns="0" rIns="0" bIns="0" rtlCol="0" anchor="t"/>
+          <a:lstStyle/>
+          <a:p>
+            <a:pPr marL="0" indent="0">
+              <a:lnSpc>
+                <a:spcPct val="128000"/>
+              </a:lnSpc>
+              <a:buNone/>
+            </a:pPr>
+            <a:r>
+              <a:rPr lang="en-US" sz="1250" dirty="0">
+                <a:solidFill>
+                  <a:srgbClr val="E9E5DD"/>
+                </a:solidFill>
+                <a:latin typeface="Courier New" pitchFamily="34" charset="0"/>
+                <a:ea typeface="Courier New" pitchFamily="34" charset="-122"/>
+                <a:cs typeface="Courier New" pitchFamily="34" charset="-120"/>
+              </a:rPr>
+              <a:t>on: push:</a:t>
+            </a:r>
+            <a:endParaRPr lang="en-US" sz="1250" dirty="0"/>
+          </a:p>
+          <a:p>
+            <a:pPr marL="0" indent="0">
+              <a:lnSpc>
+                <a:spcPct val="128000"/>
+              </a:lnSpc>
+              <a:buNone/>
+            </a:pPr>
+            <a:r>
+              <a:rPr lang="en-US" sz="1250" dirty="0">
+                <a:solidFill>
+                  <a:srgbClr val="E9E5DD"/>
+                </a:solidFill>
+                <a:latin typeface="Courier New" pitchFamily="34" charset="0"/>
+                <a:ea typeface="Courier New" pitchFamily="34" charset="-122"/>
+                <a:cs typeface="Courier New" pitchFamily="34" charset="-120"/>
+              </a:rPr>
+              <a:t>  tags: [ </a:t>
+            </a:r>
+            <a:r>
+              <a:rPr lang="en-US" sz="1250" dirty="0">
+                <a:solidFill>
+                  <a:srgbClr val="E0A04A"/>
+                </a:solidFill>
+                <a:latin typeface="Courier New" pitchFamily="34" charset="0"/>
+                <a:ea typeface="Courier New" pitchFamily="34" charset="-122"/>
+                <a:cs typeface="Courier New" pitchFamily="34" charset="-120"/>
+              </a:rPr>
+              <a:t>"v*"</a:t>
+            </a:r>
+            <a:r>
+              <a:rPr lang="en-US" sz="1250" dirty="0">
+                <a:solidFill>
+                  <a:srgbClr val="E9E5DD"/>
+                </a:solidFill>
+                <a:latin typeface="Courier New" pitchFamily="34" charset="0"/>
+                <a:ea typeface="Courier New" pitchFamily="34" charset="-122"/>
+                <a:cs typeface="Courier New" pitchFamily="34" charset="-120"/>
+              </a:rPr>
+              <a:t> ]</a:t>
+            </a:r>
+            <a:endParaRPr lang="en-US" sz="1250" dirty="0"/>
+          </a:p>
+          <a:p>
+            <a:pPr marL="0" indent="0">
+              <a:lnSpc>
+                <a:spcPct val="128000"/>
+              </a:lnSpc>
+              <a:buNone/>
+            </a:pPr>
+            <a:r>
+              <a:rPr lang="en-US" sz="1250" dirty="0">
+                <a:solidFill>
+                  <a:srgbClr val="9A958B"/>
+                </a:solidFill>
+                <a:latin typeface="Courier New" pitchFamily="34" charset="0"/>
+                <a:ea typeface="Courier New" pitchFamily="34" charset="-122"/>
+                <a:cs typeface="Courier New" pitchFamily="34" charset="-120"/>
+              </a:rPr>
+              <a:t># git log → Claude → notes</a:t>
+            </a:r>
+            <a:endParaRPr lang="en-US" sz="1250" dirty="0"/>
+          </a:p>
+        </p:txBody>
+      </p:sp>
+      <p:sp>
+        <p:nvSpPr>
+          <p:cNvPr id="8" name="Text 5"/>
+          <p:cNvSpPr/>
+          <p:nvPr/>
+        </p:nvSpPr>
+        <p:spPr>
+          <a:xfrm>
+            <a:off x="5029200" y="1371600"/>
+            <a:ext cx="3657600" cy="274320"/>
+          </a:xfrm>
+          <a:prstGeom prst="rect">
+            <a:avLst/>
+          </a:prstGeom>
+          <a:noFill/>
+          <a:ln/>
+        </p:spPr>
+        <p:txBody>
+          <a:bodyPr wrap="square" lIns="0" tIns="0" rIns="0" bIns="0" rtlCol="0" anchor="ctr"/>
+          <a:lstStyle/>
+          <a:p>
+            <a:pPr marL="0" indent="0">
+              <a:buNone/>
+            </a:pPr>
+            <a:r>
+              <a:rPr lang="en-US" sz="1100" b="1" kern="0" spc="100" dirty="0">
+                <a:solidFill>
+                  <a:srgbClr val="C25E40"/>
+                </a:solidFill>
+                <a:latin typeface="Inter" pitchFamily="34" charset="0"/>
+                <a:ea typeface="Inter" pitchFamily="34" charset="-122"/>
+                <a:cs typeface="Inter" pitchFamily="34" charset="-120"/>
+              </a:rPr>
+              <a:t>GROUPED INTO</a:t>
+            </a:r>
+            <a:endParaRPr lang="en-US" sz="1100" dirty="0"/>
+          </a:p>
+        </p:txBody>
+      </p:sp>
+      <p:sp>
+        <p:nvSpPr>
+          <p:cNvPr id="9" name="Shape 6"/>
+          <p:cNvSpPr/>
+          <p:nvPr/>
+        </p:nvSpPr>
+        <p:spPr>
+          <a:xfrm>
+            <a:off x="5029200" y="1691640"/>
             <a:ext cx="365760" cy="365760"/>
           </a:xfrm>
           <a:prstGeom prst="ellipse">
@@ -7939,10 +7605,17 @@
           </a:solidFill>
           <a:ln/>
         </p:spPr>
+        <p:txBody>
+          <a:bodyPr/>
+          <a:lstStyle/>
+          <a:p>
+            <a:endParaRPr lang="en-US"/>
+          </a:p>
+        </p:txBody>
       </p:sp>
       <p:pic>
         <p:nvPicPr>
-          <p:cNvPr id="13" name="Image 2" descr="preencoded.png">    </p:cNvPr>
+          <p:cNvPr id="10" name="Image 1" descr="preencoded.png"/>
           <p:cNvPicPr>
             <a:picLocks noChangeAspect="1"/>
           </p:cNvPicPr>
@@ -7956,7 +7629,7 @@
         </p:blipFill>
         <p:spPr>
           <a:xfrm>
-            <a:off x="5124298" y="2289658"/>
+            <a:off x="5124298" y="1786738"/>
             <a:ext cx="175565" cy="175565"/>
           </a:xfrm>
           <a:prstGeom prst="rect">
@@ -7966,13 +7639,13 @@
       </p:pic>
       <p:sp>
         <p:nvSpPr>
-          <p:cNvPr id="14" name="Text 9"/>
-          <p:cNvSpPr/>
-          <p:nvPr/>
-        </p:nvSpPr>
-        <p:spPr>
-          <a:xfrm>
-            <a:off x="5541264" y="2194560"/>
+          <p:cNvPr id="11" name="Text 7"/>
+          <p:cNvSpPr/>
+          <p:nvPr/>
+        </p:nvSpPr>
+        <p:spPr>
+          <a:xfrm>
+            <a:off x="5541264" y="1691640"/>
             <a:ext cx="3200400" cy="365760"/>
           </a:xfrm>
           <a:prstGeom prst="rect">
@@ -7985,7 +7658,7 @@
           <a:bodyPr wrap="square" lIns="0" tIns="0" rIns="0" bIns="0" rtlCol="0" anchor="ctr"/>
           <a:lstStyle/>
           <a:p>
-            <a:pPr indent="0" marL="0">
+            <a:pPr marL="0" indent="0">
               <a:buNone/>
             </a:pPr>
             <a:r>
@@ -7997,7 +7670,7 @@
                 <a:ea typeface="Inter" pitchFamily="34" charset="-122"/>
                 <a:cs typeface="Inter" pitchFamily="34" charset="-120"/>
               </a:rPr>
-              <a:t>Bug Fixes</a:t>
+              <a:t>What's New</a:t>
             </a:r>
             <a:endParaRPr lang="en-US" sz="1400" dirty="0"/>
           </a:p>
@@ -8005,13 +7678,13 @@
       </p:sp>
       <p:sp>
         <p:nvSpPr>
-          <p:cNvPr id="15" name="Shape 10"/>
-          <p:cNvSpPr/>
-          <p:nvPr/>
-        </p:nvSpPr>
-        <p:spPr>
-          <a:xfrm>
-            <a:off x="5029200" y="2697480"/>
+          <p:cNvPr id="12" name="Shape 8"/>
+          <p:cNvSpPr/>
+          <p:nvPr/>
+        </p:nvSpPr>
+        <p:spPr>
+          <a:xfrm>
+            <a:off x="5029200" y="2194560"/>
             <a:ext cx="365760" cy="365760"/>
           </a:xfrm>
           <a:prstGeom prst="ellipse">
@@ -8022,10 +7695,17 @@
           </a:solidFill>
           <a:ln/>
         </p:spPr>
+        <p:txBody>
+          <a:bodyPr/>
+          <a:lstStyle/>
+          <a:p>
+            <a:endParaRPr lang="en-US"/>
+          </a:p>
+        </p:txBody>
       </p:sp>
       <p:pic>
         <p:nvPicPr>
-          <p:cNvPr id="16" name="Image 3" descr="preencoded.png">    </p:cNvPr>
+          <p:cNvPr id="13" name="Image 2" descr="preencoded.png"/>
           <p:cNvPicPr>
             <a:picLocks noChangeAspect="1"/>
           </p:cNvPicPr>
@@ -8039,7 +7719,7 @@
         </p:blipFill>
         <p:spPr>
           <a:xfrm>
-            <a:off x="5124298" y="2792578"/>
+            <a:off x="5124298" y="2289658"/>
             <a:ext cx="175565" cy="175565"/>
           </a:xfrm>
           <a:prstGeom prst="rect">
@@ -8049,13 +7729,13 @@
       </p:pic>
       <p:sp>
         <p:nvSpPr>
-          <p:cNvPr id="17" name="Text 11"/>
-          <p:cNvSpPr/>
-          <p:nvPr/>
-        </p:nvSpPr>
-        <p:spPr>
-          <a:xfrm>
-            <a:off x="5541264" y="2697480"/>
+          <p:cNvPr id="14" name="Text 9"/>
+          <p:cNvSpPr/>
+          <p:nvPr/>
+        </p:nvSpPr>
+        <p:spPr>
+          <a:xfrm>
+            <a:off x="5541264" y="2194560"/>
             <a:ext cx="3200400" cy="365760"/>
           </a:xfrm>
           <a:prstGeom prst="rect">
@@ -8068,7 +7748,7 @@
           <a:bodyPr wrap="square" lIns="0" tIns="0" rIns="0" bIns="0" rtlCol="0" anchor="ctr"/>
           <a:lstStyle/>
           <a:p>
-            <a:pPr indent="0" marL="0">
+            <a:pPr marL="0" indent="0">
               <a:buNone/>
             </a:pPr>
             <a:r>
@@ -8080,7 +7760,7 @@
                 <a:ea typeface="Inter" pitchFamily="34" charset="-122"/>
                 <a:cs typeface="Inter" pitchFamily="34" charset="-120"/>
               </a:rPr>
-              <a:t>Breaking Changes</a:t>
+              <a:t>Bug Fixes</a:t>
             </a:r>
             <a:endParaRPr lang="en-US" sz="1400" dirty="0"/>
           </a:p>
@@ -8088,13 +7768,13 @@
       </p:sp>
       <p:sp>
         <p:nvSpPr>
-          <p:cNvPr id="18" name="Shape 12"/>
-          <p:cNvSpPr/>
-          <p:nvPr/>
-        </p:nvSpPr>
-        <p:spPr>
-          <a:xfrm>
-            <a:off x="5029200" y="3200400"/>
+          <p:cNvPr id="15" name="Shape 10"/>
+          <p:cNvSpPr/>
+          <p:nvPr/>
+        </p:nvSpPr>
+        <p:spPr>
+          <a:xfrm>
+            <a:off x="5029200" y="2697480"/>
             <a:ext cx="365760" cy="365760"/>
           </a:xfrm>
           <a:prstGeom prst="ellipse">
@@ -8105,10 +7785,17 @@
           </a:solidFill>
           <a:ln/>
         </p:spPr>
+        <p:txBody>
+          <a:bodyPr/>
+          <a:lstStyle/>
+          <a:p>
+            <a:endParaRPr lang="en-US"/>
+          </a:p>
+        </p:txBody>
       </p:sp>
       <p:pic>
         <p:nvPicPr>
-          <p:cNvPr id="19" name="Image 4" descr="preencoded.png">    </p:cNvPr>
+          <p:cNvPr id="16" name="Image 3" descr="preencoded.png"/>
           <p:cNvPicPr>
             <a:picLocks noChangeAspect="1"/>
           </p:cNvPicPr>
@@ -8122,6 +7809,96 @@
         </p:blipFill>
         <p:spPr>
           <a:xfrm>
+            <a:off x="5124298" y="2792578"/>
+            <a:ext cx="175565" cy="175565"/>
+          </a:xfrm>
+          <a:prstGeom prst="rect">
+            <a:avLst/>
+          </a:prstGeom>
+        </p:spPr>
+      </p:pic>
+      <p:sp>
+        <p:nvSpPr>
+          <p:cNvPr id="17" name="Text 11"/>
+          <p:cNvSpPr/>
+          <p:nvPr/>
+        </p:nvSpPr>
+        <p:spPr>
+          <a:xfrm>
+            <a:off x="5541264" y="2697480"/>
+            <a:ext cx="3200400" cy="365760"/>
+          </a:xfrm>
+          <a:prstGeom prst="rect">
+            <a:avLst/>
+          </a:prstGeom>
+          <a:noFill/>
+          <a:ln/>
+        </p:spPr>
+        <p:txBody>
+          <a:bodyPr wrap="square" lIns="0" tIns="0" rIns="0" bIns="0" rtlCol="0" anchor="ctr"/>
+          <a:lstStyle/>
+          <a:p>
+            <a:pPr marL="0" indent="0">
+              <a:buNone/>
+            </a:pPr>
+            <a:r>
+              <a:rPr lang="en-US" sz="1400" b="1" dirty="0">
+                <a:solidFill>
+                  <a:srgbClr val="141413"/>
+                </a:solidFill>
+                <a:latin typeface="Inter" pitchFamily="34" charset="0"/>
+                <a:ea typeface="Inter" pitchFamily="34" charset="-122"/>
+                <a:cs typeface="Inter" pitchFamily="34" charset="-120"/>
+              </a:rPr>
+              <a:t>Breaking Changes</a:t>
+            </a:r>
+            <a:endParaRPr lang="en-US" sz="1400" dirty="0"/>
+          </a:p>
+        </p:txBody>
+      </p:sp>
+      <p:sp>
+        <p:nvSpPr>
+          <p:cNvPr id="18" name="Shape 12"/>
+          <p:cNvSpPr/>
+          <p:nvPr/>
+        </p:nvSpPr>
+        <p:spPr>
+          <a:xfrm>
+            <a:off x="5029200" y="3200400"/>
+            <a:ext cx="365760" cy="365760"/>
+          </a:xfrm>
+          <a:prstGeom prst="ellipse">
+            <a:avLst/>
+          </a:prstGeom>
+          <a:solidFill>
+            <a:srgbClr val="D97757"/>
+          </a:solidFill>
+          <a:ln/>
+        </p:spPr>
+        <p:txBody>
+          <a:bodyPr/>
+          <a:lstStyle/>
+          <a:p>
+            <a:endParaRPr lang="en-US"/>
+          </a:p>
+        </p:txBody>
+      </p:sp>
+      <p:pic>
+        <p:nvPicPr>
+          <p:cNvPr id="19" name="Image 4" descr="preencoded.png"/>
+          <p:cNvPicPr>
+            <a:picLocks noChangeAspect="1"/>
+          </p:cNvPicPr>
+          <p:nvPr/>
+        </p:nvPicPr>
+        <p:blipFill>
+          <a:blip r:embed="rId6"/>
+          <a:stretch>
+            <a:fillRect/>
+          </a:stretch>
+        </p:blipFill>
+        <p:spPr>
+          <a:xfrm>
             <a:off x="5124298" y="3295498"/>
             <a:ext cx="175565" cy="175565"/>
           </a:xfrm>
@@ -8151,7 +7928,7 @@
           <a:bodyPr wrap="square" lIns="0" tIns="0" rIns="0" bIns="0" rtlCol="0" anchor="ctr"/>
           <a:lstStyle/>
           <a:p>
-            <a:pPr indent="0" marL="0">
+            <a:pPr marL="0" indent="0">
               <a:buNone/>
             </a:pPr>
             <a:r>
@@ -8190,6 +7967,13 @@
           </a:solidFill>
           <a:ln/>
         </p:spPr>
+        <p:txBody>
+          <a:bodyPr/>
+          <a:lstStyle/>
+          <a:p>
+            <a:endParaRPr lang="en-US"/>
+          </a:p>
+        </p:txBody>
       </p:sp>
       <p:sp>
         <p:nvSpPr>
@@ -8212,7 +7996,7 @@
           <a:bodyPr wrap="square" lIns="0" tIns="0" rIns="0" bIns="0" rtlCol="0" anchor="ctr"/>
           <a:lstStyle/>
           <a:p>
-            <a:pPr indent="0" marL="0">
+            <a:pPr marL="0" indent="0">
               <a:buNone/>
             </a:pPr>
             <a:r>
@@ -8226,13 +8010,10 @@
               </a:rPr>
               <a:t>From the git log</a:t>
             </a:r>
-            <a:pPr indent="0" marL="0">
-              <a:buNone/>
-            </a:pPr>
             <a:endParaRPr lang="en-US" sz="1400" dirty="0"/>
           </a:p>
           <a:p>
-            <a:pPr indent="0" marL="0">
+            <a:pPr marL="0" indent="0">
               <a:buNone/>
             </a:pPr>
             <a:r>
@@ -8271,7 +8052,7 @@
           <a:bodyPr wrap="square" rtlCol="0" anchor="ctr"/>
           <a:lstStyle/>
           <a:p>
-            <a:pPr indent="0" marL="0">
+            <a:pPr marL="0" indent="0">
               <a:buNone/>
             </a:pPr>
             <a:r>
@@ -8310,7 +8091,7 @@
           <a:bodyPr wrap="square" rtlCol="0" anchor="ctr"/>
           <a:lstStyle/>
           <a:p>
-            <a:pPr algn="r" indent="0" marL="0">
+            <a:pPr marL="0" indent="0" algn="r">
               <a:buNone/>
             </a:pPr>
             <a:r>
@@ -8325,45 +8106,6 @@
               <a:t>Day 2 · Section 5  ·  7/11</a:t>
             </a:r>
             <a:endParaRPr lang="en-US" sz="900" dirty="0"/>
-          </a:p>
-        </p:txBody>
-      </p:sp>
-      <p:sp>
-        <p:nvSpPr>
-          <p:cNvPr id="25" name="Text 18"/>
-          <p:cNvSpPr/>
-          <p:nvPr/>
-        </p:nvSpPr>
-        <p:spPr>
-          <a:xfrm>
-            <a:off x="548640" y="4462272"/>
-            <a:ext cx="8046720" cy="274320"/>
-          </a:xfrm>
-          <a:prstGeom prst="rect">
-            <a:avLst/>
-          </a:prstGeom>
-          <a:noFill/>
-          <a:ln/>
-        </p:spPr>
-        <p:txBody>
-          <a:bodyPr wrap="square" lIns="0" tIns="0" rIns="0" bIns="0" rtlCol="0" anchor="ctr"/>
-          <a:lstStyle/>
-          <a:p>
-            <a:pPr indent="0" marL="0">
-              <a:buNone/>
-            </a:pPr>
-            <a:r>
-              <a:rPr lang="en-US" sz="1000" i="1" dirty="0">
-                <a:solidFill>
-                  <a:srgbClr val="615C52"/>
-                </a:solidFill>
-                <a:latin typeface="Inter" pitchFamily="34" charset="0"/>
-                <a:ea typeface="Inter" pitchFamily="34" charset="-122"/>
-                <a:cs typeface="Inter" pitchFamily="34" charset="-120"/>
-              </a:rPr>
-              <a:t>▸ Tag a release and the commits become grouped, human-readable notes.</a:t>
-            </a:r>
-            <a:endParaRPr lang="en-US" sz="1000" dirty="0"/>
           </a:p>
         </p:txBody>
       </p:sp>
@@ -8383,6 +8125,7 @@
         <a:solidFill>
           <a:srgbClr val="F0EEE6"/>
         </a:solidFill>
+        <a:effectLst/>
       </p:bgPr>
     </p:bg>
     <p:spTree>
@@ -8420,11 +8163,11 @@
           <a:bodyPr wrap="square" lIns="0" tIns="0" rIns="0" bIns="0" rtlCol="0" anchor="ctr"/>
           <a:lstStyle/>
           <a:p>
-            <a:pPr indent="0" marL="0">
-              <a:buNone/>
-            </a:pPr>
-            <a:r>
-              <a:rPr lang="en-US" sz="1100" b="1" spc="200" kern="0" dirty="0">
+            <a:pPr marL="0" indent="0">
+              <a:buNone/>
+            </a:pPr>
+            <a:r>
+              <a:rPr lang="en-US" sz="1100" b="1" kern="0" spc="200" dirty="0">
                 <a:solidFill>
                   <a:srgbClr val="C25E40"/>
                 </a:solidFill>
@@ -8459,7 +8202,7 @@
           <a:bodyPr wrap="square" lIns="0" tIns="0" rIns="0" bIns="0" rtlCol="0" anchor="ctr"/>
           <a:lstStyle/>
           <a:p>
-            <a:pPr indent="0" marL="0">
+            <a:pPr marL="0" indent="0">
               <a:buNone/>
             </a:pPr>
             <a:r>
@@ -8479,80 +8222,7 @@
       </p:sp>
       <p:pic>
         <p:nvPicPr>
-          <p:cNvPr id="4" name="Image 0" descr="preencoded.png">    </p:cNvPr>
-          <p:cNvPicPr>
-            <a:picLocks noChangeAspect="1"/>
-          </p:cNvPicPr>
-          <p:nvPr/>
-        </p:nvPicPr>
-        <p:blipFill>
-          <a:blip r:embed="rId1"/>
-          <a:stretch>
-            <a:fillRect/>
-          </a:stretch>
-        </p:blipFill>
-        <p:spPr>
-          <a:xfrm>
-            <a:off x="8321040" y="411480"/>
-            <a:ext cx="347472" cy="292608"/>
-          </a:xfrm>
-          <a:prstGeom prst="rect">
-            <a:avLst/>
-          </a:prstGeom>
-        </p:spPr>
-      </p:pic>
-      <p:sp>
-        <p:nvSpPr>
-          <p:cNvPr id="5" name="Shape 2"/>
-          <p:cNvSpPr/>
-          <p:nvPr/>
-        </p:nvSpPr>
-        <p:spPr>
-          <a:xfrm>
-            <a:off x="548640" y="1417320"/>
-            <a:ext cx="8046720" cy="1005840"/>
-          </a:xfrm>
-          <a:prstGeom prst="roundRect">
-            <a:avLst>
-              <a:gd name="adj" fmla="val 10909"/>
-            </a:avLst>
-          </a:prstGeom>
-          <a:solidFill>
-            <a:srgbClr val="F4E4DC"/>
-          </a:solidFill>
-          <a:ln/>
-          <a:effectLst>
-            <a:outerShdw sx="100000" sy="100000" kx="0" ky="0" algn="bl" rotWithShape="0" blurRad="88900" dist="38100" dir="5400000">
-              <a:srgbClr val="000000">
-                <a:alpha val="10000"/>
-              </a:srgbClr>
-            </a:outerShdw>
-          </a:effectLst>
-        </p:spPr>
-      </p:sp>
-      <p:sp>
-        <p:nvSpPr>
-          <p:cNvPr id="6" name="Shape 3"/>
-          <p:cNvSpPr/>
-          <p:nvPr/>
-        </p:nvSpPr>
-        <p:spPr>
-          <a:xfrm>
-            <a:off x="841248" y="1691640"/>
-            <a:ext cx="502920" cy="502920"/>
-          </a:xfrm>
-          <a:prstGeom prst="ellipse">
-            <a:avLst/>
-          </a:prstGeom>
-          <a:solidFill>
-            <a:srgbClr val="D97757"/>
-          </a:solidFill>
-          <a:ln/>
-        </p:spPr>
-      </p:sp>
-      <p:pic>
-        <p:nvPicPr>
-          <p:cNvPr id="7" name="Image 1" descr="preencoded.png">    </p:cNvPr>
+          <p:cNvPr id="4" name="Image 0" descr="preencoded.png"/>
           <p:cNvPicPr>
             <a:picLocks noChangeAspect="1"/>
           </p:cNvPicPr>
@@ -8566,8 +8236,8 @@
         </p:blipFill>
         <p:spPr>
           <a:xfrm>
-            <a:off x="972007" y="1822399"/>
-            <a:ext cx="241402" cy="241402"/>
+            <a:off x="8321040" y="411480"/>
+            <a:ext cx="347472" cy="292608"/>
           </a:xfrm>
           <a:prstGeom prst="rect">
             <a:avLst/>
@@ -8576,67 +8246,50 @@
       </p:pic>
       <p:sp>
         <p:nvSpPr>
-          <p:cNvPr id="8" name="Text 4"/>
-          <p:cNvSpPr/>
-          <p:nvPr/>
-        </p:nvSpPr>
-        <p:spPr>
-          <a:xfrm>
-            <a:off x="1572768" y="1417320"/>
-            <a:ext cx="6766560" cy="1005840"/>
-          </a:xfrm>
-          <a:prstGeom prst="rect">
-            <a:avLst/>
-          </a:prstGeom>
-          <a:noFill/>
-          <a:ln/>
-        </p:spPr>
-        <p:txBody>
-          <a:bodyPr wrap="square" lIns="0" tIns="0" rIns="0" bIns="0" rtlCol="0" anchor="ctr"/>
-          <a:lstStyle/>
-          <a:p>
-            <a:pPr indent="0" marL="0">
-              <a:buNone/>
-            </a:pPr>
-            <a:r>
-              <a:rPr lang="en-US" sz="1600" b="1" dirty="0">
-                <a:solidFill>
-                  <a:srgbClr val="C25E40"/>
-                </a:solidFill>
-                <a:latin typeface="Inter" pitchFamily="34" charset="0"/>
-                <a:ea typeface="Inter" pitchFamily="34" charset="-122"/>
-                <a:cs typeface="Inter" pitchFamily="34" charset="-120"/>
-              </a:rPr>
-              <a:t>Same .claude/skills/ code-review skill </a:t>
-            </a:r>
-            <a:pPr indent="0" marL="0">
-              <a:buNone/>
-            </a:pPr>
-            <a:r>
-              <a:rPr lang="en-US" sz="1600" dirty="0">
-                <a:solidFill>
-                  <a:srgbClr val="141413"/>
-                </a:solidFill>
-                <a:latin typeface="Inter" pitchFamily="34" charset="0"/>
-                <a:ea typeface="Inter" pitchFamily="34" charset="-122"/>
-                <a:cs typeface="Inter" pitchFamily="34" charset="-120"/>
-              </a:rPr>
-              <a:t>you run locally with /code-review.</a:t>
-            </a:r>
-            <a:endParaRPr lang="en-US" sz="1600" dirty="0"/>
-          </a:p>
-        </p:txBody>
-      </p:sp>
-      <p:sp>
-        <p:nvSpPr>
-          <p:cNvPr id="9" name="Shape 5"/>
-          <p:cNvSpPr/>
-          <p:nvPr/>
-        </p:nvSpPr>
-        <p:spPr>
-          <a:xfrm>
-            <a:off x="566928" y="2697480"/>
-            <a:ext cx="420624" cy="420624"/>
+          <p:cNvPr id="5" name="Shape 2"/>
+          <p:cNvSpPr/>
+          <p:nvPr/>
+        </p:nvSpPr>
+        <p:spPr>
+          <a:xfrm>
+            <a:off x="548640" y="1417320"/>
+            <a:ext cx="8046720" cy="1005840"/>
+          </a:xfrm>
+          <a:prstGeom prst="roundRect">
+            <a:avLst>
+              <a:gd name="adj" fmla="val 10909"/>
+            </a:avLst>
+          </a:prstGeom>
+          <a:solidFill>
+            <a:srgbClr val="F4E4DC"/>
+          </a:solidFill>
+          <a:ln/>
+          <a:effectLst>
+            <a:outerShdw blurRad="88900" dist="38100" dir="5400000" algn="bl" rotWithShape="0">
+              <a:srgbClr val="000000">
+                <a:alpha val="10000"/>
+              </a:srgbClr>
+            </a:outerShdw>
+          </a:effectLst>
+        </p:spPr>
+        <p:txBody>
+          <a:bodyPr/>
+          <a:lstStyle/>
+          <a:p>
+            <a:endParaRPr lang="en-US"/>
+          </a:p>
+        </p:txBody>
+      </p:sp>
+      <p:sp>
+        <p:nvSpPr>
+          <p:cNvPr id="6" name="Shape 3"/>
+          <p:cNvSpPr/>
+          <p:nvPr/>
+        </p:nvSpPr>
+        <p:spPr>
+          <a:xfrm>
+            <a:off x="841248" y="1691640"/>
+            <a:ext cx="502920" cy="502920"/>
           </a:xfrm>
           <a:prstGeom prst="ellipse">
             <a:avLst/>
@@ -8646,10 +8299,17 @@
           </a:solidFill>
           <a:ln/>
         </p:spPr>
+        <p:txBody>
+          <a:bodyPr/>
+          <a:lstStyle/>
+          <a:p>
+            <a:endParaRPr lang="en-US"/>
+          </a:p>
+        </p:txBody>
       </p:sp>
       <p:pic>
         <p:nvPicPr>
-          <p:cNvPr id="10" name="Image 2" descr="preencoded.png">    </p:cNvPr>
+          <p:cNvPr id="7" name="Image 1" descr="preencoded.png"/>
           <p:cNvPicPr>
             <a:picLocks noChangeAspect="1"/>
           </p:cNvPicPr>
@@ -8663,8 +8323,8 @@
         </p:blipFill>
         <p:spPr>
           <a:xfrm>
-            <a:off x="676290" y="2806842"/>
-            <a:ext cx="201900" cy="201900"/>
+            <a:off x="972007" y="1822399"/>
+            <a:ext cx="241402" cy="241402"/>
           </a:xfrm>
           <a:prstGeom prst="rect">
             <a:avLst/>
@@ -8673,30 +8333,41 @@
       </p:pic>
       <p:sp>
         <p:nvSpPr>
-          <p:cNvPr id="11" name="Text 6"/>
-          <p:cNvSpPr/>
-          <p:nvPr/>
-        </p:nvSpPr>
-        <p:spPr>
-          <a:xfrm>
-            <a:off x="1133856" y="2660904"/>
-            <a:ext cx="3931920" cy="292608"/>
-          </a:xfrm>
-          <a:prstGeom prst="rect">
-            <a:avLst/>
-          </a:prstGeom>
-          <a:noFill/>
-          <a:ln/>
-        </p:spPr>
-        <p:txBody>
-          <a:bodyPr wrap="square" lIns="0" tIns="0" rIns="0" bIns="0" rtlCol="0" anchor="ctr"/>
-          <a:lstStyle/>
-          <a:p>
-            <a:pPr indent="0" marL="0">
-              <a:buNone/>
-            </a:pPr>
-            <a:r>
-              <a:rPr lang="en-US" sz="1400" b="1" dirty="0">
+          <p:cNvPr id="8" name="Text 4"/>
+          <p:cNvSpPr/>
+          <p:nvPr/>
+        </p:nvSpPr>
+        <p:spPr>
+          <a:xfrm>
+            <a:off x="1572768" y="1417320"/>
+            <a:ext cx="6766560" cy="1005840"/>
+          </a:xfrm>
+          <a:prstGeom prst="rect">
+            <a:avLst/>
+          </a:prstGeom>
+          <a:noFill/>
+          <a:ln/>
+        </p:spPr>
+        <p:txBody>
+          <a:bodyPr wrap="square" lIns="0" tIns="0" rIns="0" bIns="0" rtlCol="0" anchor="ctr"/>
+          <a:lstStyle/>
+          <a:p>
+            <a:pPr marL="0" indent="0">
+              <a:buNone/>
+            </a:pPr>
+            <a:r>
+              <a:rPr lang="en-US" sz="1600" b="1" dirty="0">
+                <a:solidFill>
+                  <a:srgbClr val="C25E40"/>
+                </a:solidFill>
+                <a:latin typeface="Inter" pitchFamily="34" charset="0"/>
+                <a:ea typeface="Inter" pitchFamily="34" charset="-122"/>
+                <a:cs typeface="Inter" pitchFamily="34" charset="-120"/>
+              </a:rPr>
+              <a:t>Same .claude/skills/ code-review skill </a:t>
+            </a:r>
+            <a:r>
+              <a:rPr lang="en-US" sz="1600" dirty="0">
                 <a:solidFill>
                   <a:srgbClr val="141413"/>
                 </a:solidFill>
@@ -8704,60 +8375,21 @@
                 <a:ea typeface="Inter" pitchFamily="34" charset="-122"/>
                 <a:cs typeface="Inter" pitchFamily="34" charset="-120"/>
               </a:rPr>
-              <a:t>Write it once</a:t>
-            </a:r>
-            <a:endParaRPr lang="en-US" sz="1400" dirty="0"/>
-          </a:p>
-        </p:txBody>
-      </p:sp>
-      <p:sp>
-        <p:nvSpPr>
-          <p:cNvPr id="12" name="Text 7"/>
-          <p:cNvSpPr/>
-          <p:nvPr/>
-        </p:nvSpPr>
-        <p:spPr>
-          <a:xfrm>
-            <a:off x="5074920" y="2660904"/>
-            <a:ext cx="3383280" cy="292608"/>
-          </a:xfrm>
-          <a:prstGeom prst="rect">
-            <a:avLst/>
-          </a:prstGeom>
-          <a:noFill/>
-          <a:ln/>
-        </p:spPr>
-        <p:txBody>
-          <a:bodyPr wrap="square" lIns="0" tIns="0" rIns="0" bIns="0" rtlCol="0" anchor="ctr"/>
-          <a:lstStyle/>
-          <a:p>
-            <a:pPr indent="0" marL="0">
-              <a:buNone/>
-            </a:pPr>
-            <a:r>
-              <a:rPr lang="en-US" sz="1150" dirty="0">
-                <a:solidFill>
-                  <a:srgbClr val="615C52"/>
-                </a:solidFill>
-                <a:latin typeface="Inter" pitchFamily="34" charset="0"/>
-                <a:ea typeface="Inter" pitchFamily="34" charset="-122"/>
-                <a:cs typeface="Inter" pitchFamily="34" charset="-120"/>
-              </a:rPr>
-              <a:t>Same skill runs locally and in CI</a:t>
-            </a:r>
-            <a:endParaRPr lang="en-US" sz="1150" dirty="0"/>
-          </a:p>
-        </p:txBody>
-      </p:sp>
-      <p:sp>
-        <p:nvSpPr>
-          <p:cNvPr id="13" name="Shape 8"/>
-          <p:cNvSpPr/>
-          <p:nvPr/>
-        </p:nvSpPr>
-        <p:spPr>
-          <a:xfrm>
-            <a:off x="566928" y="3200400"/>
+              <a:t>you run locally with /code-review.</a:t>
+            </a:r>
+            <a:endParaRPr lang="en-US" sz="1600" dirty="0"/>
+          </a:p>
+        </p:txBody>
+      </p:sp>
+      <p:sp>
+        <p:nvSpPr>
+          <p:cNvPr id="9" name="Shape 5"/>
+          <p:cNvSpPr/>
+          <p:nvPr/>
+        </p:nvSpPr>
+        <p:spPr>
+          <a:xfrm>
+            <a:off x="566928" y="2697480"/>
             <a:ext cx="420624" cy="420624"/>
           </a:xfrm>
           <a:prstGeom prst="ellipse">
@@ -8768,10 +8400,17 @@
           </a:solidFill>
           <a:ln/>
         </p:spPr>
+        <p:txBody>
+          <a:bodyPr/>
+          <a:lstStyle/>
+          <a:p>
+            <a:endParaRPr lang="en-US"/>
+          </a:p>
+        </p:txBody>
       </p:sp>
       <p:pic>
         <p:nvPicPr>
-          <p:cNvPr id="14" name="Image 3" descr="preencoded.png">    </p:cNvPr>
+          <p:cNvPr id="10" name="Image 2" descr="preencoded.png"/>
           <p:cNvPicPr>
             <a:picLocks noChangeAspect="1"/>
           </p:cNvPicPr>
@@ -8785,7 +8424,7 @@
         </p:blipFill>
         <p:spPr>
           <a:xfrm>
-            <a:off x="676290" y="3309762"/>
+            <a:off x="676290" y="2806842"/>
             <a:ext cx="201900" cy="201900"/>
           </a:xfrm>
           <a:prstGeom prst="rect">
@@ -8795,13 +8434,13 @@
       </p:pic>
       <p:sp>
         <p:nvSpPr>
-          <p:cNvPr id="15" name="Text 9"/>
-          <p:cNvSpPr/>
-          <p:nvPr/>
-        </p:nvSpPr>
-        <p:spPr>
-          <a:xfrm>
-            <a:off x="1133856" y="3163824"/>
+          <p:cNvPr id="11" name="Text 6"/>
+          <p:cNvSpPr/>
+          <p:nvPr/>
+        </p:nvSpPr>
+        <p:spPr>
+          <a:xfrm>
+            <a:off x="1133856" y="2660904"/>
             <a:ext cx="3931920" cy="292608"/>
           </a:xfrm>
           <a:prstGeom prst="rect">
@@ -8814,7 +8453,7 @@
           <a:bodyPr wrap="square" lIns="0" tIns="0" rIns="0" bIns="0" rtlCol="0" anchor="ctr"/>
           <a:lstStyle/>
           <a:p>
-            <a:pPr indent="0" marL="0">
+            <a:pPr marL="0" indent="0">
               <a:buNone/>
             </a:pPr>
             <a:r>
@@ -8826,7 +8465,7 @@
                 <a:ea typeface="Inter" pitchFamily="34" charset="-122"/>
                 <a:cs typeface="Inter" pitchFamily="34" charset="-120"/>
               </a:rPr>
-              <a:t>Log invocations</a:t>
+              <a:t>Write it once</a:t>
             </a:r>
             <a:endParaRPr lang="en-US" sz="1400" dirty="0"/>
           </a:p>
@@ -8834,13 +8473,13 @@
       </p:sp>
       <p:sp>
         <p:nvSpPr>
-          <p:cNvPr id="16" name="Text 10"/>
-          <p:cNvSpPr/>
-          <p:nvPr/>
-        </p:nvSpPr>
-        <p:spPr>
-          <a:xfrm>
-            <a:off x="5074920" y="3163824"/>
+          <p:cNvPr id="12" name="Text 7"/>
+          <p:cNvSpPr/>
+          <p:nvPr/>
+        </p:nvSpPr>
+        <p:spPr>
+          <a:xfrm>
+            <a:off x="5074920" y="2660904"/>
             <a:ext cx="3383280" cy="292608"/>
           </a:xfrm>
           <a:prstGeom prst="rect">
@@ -8853,7 +8492,7 @@
           <a:bodyPr wrap="square" lIns="0" tIns="0" rIns="0" bIns="0" rtlCol="0" anchor="ctr"/>
           <a:lstStyle/>
           <a:p>
-            <a:pPr indent="0" marL="0">
+            <a:pPr marL="0" indent="0">
               <a:buNone/>
             </a:pPr>
             <a:r>
@@ -8865,7 +8504,7 @@
                 <a:ea typeface="Inter" pitchFamily="34" charset="-122"/>
                 <a:cs typeface="Inter" pitchFamily="34" charset="-120"/>
               </a:rPr>
-              <a:t>Register a PreToolUse hook to record use</a:t>
+              <a:t>Same skill runs locally and in CI</a:t>
             </a:r>
             <a:endParaRPr lang="en-US" sz="1150" dirty="0"/>
           </a:p>
@@ -8873,13 +8512,13 @@
       </p:sp>
       <p:sp>
         <p:nvSpPr>
-          <p:cNvPr id="17" name="Shape 11"/>
-          <p:cNvSpPr/>
-          <p:nvPr/>
-        </p:nvSpPr>
-        <p:spPr>
-          <a:xfrm>
-            <a:off x="566928" y="3703320"/>
+          <p:cNvPr id="13" name="Shape 8"/>
+          <p:cNvSpPr/>
+          <p:nvPr/>
+        </p:nvSpPr>
+        <p:spPr>
+          <a:xfrm>
+            <a:off x="566928" y="3200400"/>
             <a:ext cx="420624" cy="420624"/>
           </a:xfrm>
           <a:prstGeom prst="ellipse">
@@ -8890,10 +8529,17 @@
           </a:solidFill>
           <a:ln/>
         </p:spPr>
+        <p:txBody>
+          <a:bodyPr/>
+          <a:lstStyle/>
+          <a:p>
+            <a:endParaRPr lang="en-US"/>
+          </a:p>
+        </p:txBody>
       </p:sp>
       <p:pic>
         <p:nvPicPr>
-          <p:cNvPr id="18" name="Image 4" descr="preencoded.png">    </p:cNvPr>
+          <p:cNvPr id="14" name="Image 3" descr="preencoded.png"/>
           <p:cNvPicPr>
             <a:picLocks noChangeAspect="1"/>
           </p:cNvPicPr>
@@ -8907,6 +8553,135 @@
         </p:blipFill>
         <p:spPr>
           <a:xfrm>
+            <a:off x="676290" y="3309762"/>
+            <a:ext cx="201900" cy="201900"/>
+          </a:xfrm>
+          <a:prstGeom prst="rect">
+            <a:avLst/>
+          </a:prstGeom>
+        </p:spPr>
+      </p:pic>
+      <p:sp>
+        <p:nvSpPr>
+          <p:cNvPr id="15" name="Text 9"/>
+          <p:cNvSpPr/>
+          <p:nvPr/>
+        </p:nvSpPr>
+        <p:spPr>
+          <a:xfrm>
+            <a:off x="1133856" y="3163824"/>
+            <a:ext cx="3931920" cy="292608"/>
+          </a:xfrm>
+          <a:prstGeom prst="rect">
+            <a:avLst/>
+          </a:prstGeom>
+          <a:noFill/>
+          <a:ln/>
+        </p:spPr>
+        <p:txBody>
+          <a:bodyPr wrap="square" lIns="0" tIns="0" rIns="0" bIns="0" rtlCol="0" anchor="ctr"/>
+          <a:lstStyle/>
+          <a:p>
+            <a:pPr marL="0" indent="0">
+              <a:buNone/>
+            </a:pPr>
+            <a:r>
+              <a:rPr lang="en-US" sz="1400" b="1" dirty="0">
+                <a:solidFill>
+                  <a:srgbClr val="141413"/>
+                </a:solidFill>
+                <a:latin typeface="Inter" pitchFamily="34" charset="0"/>
+                <a:ea typeface="Inter" pitchFamily="34" charset="-122"/>
+                <a:cs typeface="Inter" pitchFamily="34" charset="-120"/>
+              </a:rPr>
+              <a:t>Log invocations</a:t>
+            </a:r>
+            <a:endParaRPr lang="en-US" sz="1400" dirty="0"/>
+          </a:p>
+        </p:txBody>
+      </p:sp>
+      <p:sp>
+        <p:nvSpPr>
+          <p:cNvPr id="16" name="Text 10"/>
+          <p:cNvSpPr/>
+          <p:nvPr/>
+        </p:nvSpPr>
+        <p:spPr>
+          <a:xfrm>
+            <a:off x="5074920" y="3163824"/>
+            <a:ext cx="3383280" cy="292608"/>
+          </a:xfrm>
+          <a:prstGeom prst="rect">
+            <a:avLst/>
+          </a:prstGeom>
+          <a:noFill/>
+          <a:ln/>
+        </p:spPr>
+        <p:txBody>
+          <a:bodyPr wrap="square" lIns="0" tIns="0" rIns="0" bIns="0" rtlCol="0" anchor="ctr"/>
+          <a:lstStyle/>
+          <a:p>
+            <a:pPr marL="0" indent="0">
+              <a:buNone/>
+            </a:pPr>
+            <a:r>
+              <a:rPr lang="en-US" sz="1150" dirty="0">
+                <a:solidFill>
+                  <a:srgbClr val="615C52"/>
+                </a:solidFill>
+                <a:latin typeface="Inter" pitchFamily="34" charset="0"/>
+                <a:ea typeface="Inter" pitchFamily="34" charset="-122"/>
+                <a:cs typeface="Inter" pitchFamily="34" charset="-120"/>
+              </a:rPr>
+              <a:t>Register a PreToolUse hook to record use</a:t>
+            </a:r>
+            <a:endParaRPr lang="en-US" sz="1150" dirty="0"/>
+          </a:p>
+        </p:txBody>
+      </p:sp>
+      <p:sp>
+        <p:nvSpPr>
+          <p:cNvPr id="17" name="Shape 11"/>
+          <p:cNvSpPr/>
+          <p:nvPr/>
+        </p:nvSpPr>
+        <p:spPr>
+          <a:xfrm>
+            <a:off x="566928" y="3703320"/>
+            <a:ext cx="420624" cy="420624"/>
+          </a:xfrm>
+          <a:prstGeom prst="ellipse">
+            <a:avLst/>
+          </a:prstGeom>
+          <a:solidFill>
+            <a:srgbClr val="D97757"/>
+          </a:solidFill>
+          <a:ln/>
+        </p:spPr>
+        <p:txBody>
+          <a:bodyPr/>
+          <a:lstStyle/>
+          <a:p>
+            <a:endParaRPr lang="en-US"/>
+          </a:p>
+        </p:txBody>
+      </p:sp>
+      <p:pic>
+        <p:nvPicPr>
+          <p:cNvPr id="18" name="Image 4" descr="preencoded.png"/>
+          <p:cNvPicPr>
+            <a:picLocks noChangeAspect="1"/>
+          </p:cNvPicPr>
+          <p:nvPr/>
+        </p:nvPicPr>
+        <p:blipFill>
+          <a:blip r:embed="rId6"/>
+          <a:stretch>
+            <a:fillRect/>
+          </a:stretch>
+        </p:blipFill>
+        <p:spPr>
+          <a:xfrm>
             <a:off x="676290" y="3812682"/>
             <a:ext cx="201900" cy="201900"/>
           </a:xfrm>
@@ -8936,7 +8711,7 @@
           <a:bodyPr wrap="square" lIns="0" tIns="0" rIns="0" bIns="0" rtlCol="0" anchor="ctr"/>
           <a:lstStyle/>
           <a:p>
-            <a:pPr indent="0" marL="0">
+            <a:pPr marL="0" indent="0">
               <a:buNone/>
             </a:pPr>
             <a:r>
@@ -8975,7 +8750,7 @@
           <a:bodyPr wrap="square" lIns="0" tIns="0" rIns="0" bIns="0" rtlCol="0" anchor="ctr"/>
           <a:lstStyle/>
           <a:p>
-            <a:pPr indent="0" marL="0">
+            <a:pPr marL="0" indent="0">
               <a:buNone/>
             </a:pPr>
             <a:r>
@@ -9014,7 +8789,7 @@
           <a:bodyPr wrap="square" rtlCol="0" anchor="ctr"/>
           <a:lstStyle/>
           <a:p>
-            <a:pPr indent="0" marL="0">
+            <a:pPr marL="0" indent="0">
               <a:buNone/>
             </a:pPr>
             <a:r>
@@ -9053,7 +8828,7 @@
           <a:bodyPr wrap="square" rtlCol="0" anchor="ctr"/>
           <a:lstStyle/>
           <a:p>
-            <a:pPr algn="r" indent="0" marL="0">
+            <a:pPr marL="0" indent="0" algn="r">
               <a:buNone/>
             </a:pPr>
             <a:r>
@@ -9068,45 +8843,6 @@
               <a:t>Day 2 · Section 5  ·  8/11</a:t>
             </a:r>
             <a:endParaRPr lang="en-US" sz="900" dirty="0"/>
-          </a:p>
-        </p:txBody>
-      </p:sp>
-      <p:sp>
-        <p:nvSpPr>
-          <p:cNvPr id="23" name="Text 16"/>
-          <p:cNvSpPr/>
-          <p:nvPr/>
-        </p:nvSpPr>
-        <p:spPr>
-          <a:xfrm>
-            <a:off x="548640" y="4462272"/>
-            <a:ext cx="8046720" cy="274320"/>
-          </a:xfrm>
-          <a:prstGeom prst="rect">
-            <a:avLst/>
-          </a:prstGeom>
-          <a:noFill/>
-          <a:ln/>
-        </p:spPr>
-        <p:txBody>
-          <a:bodyPr wrap="square" lIns="0" tIns="0" rIns="0" bIns="0" rtlCol="0" anchor="ctr"/>
-          <a:lstStyle/>
-          <a:p>
-            <a:pPr indent="0" marL="0">
-              <a:buNone/>
-            </a:pPr>
-            <a:r>
-              <a:rPr lang="en-US" sz="1000" i="1" dirty="0">
-                <a:solidFill>
-                  <a:srgbClr val="615C52"/>
-                </a:solidFill>
-                <a:latin typeface="Inter" pitchFamily="34" charset="0"/>
-                <a:ea typeface="Inter" pitchFamily="34" charset="-122"/>
-                <a:cs typeface="Inter" pitchFamily="34" charset="-120"/>
-              </a:rPr>
-              <a:t>▸ One skill, two homes — and a hook that reveals when it isn't firing.</a:t>
-            </a:r>
-            <a:endParaRPr lang="en-US" sz="1000" dirty="0"/>
           </a:p>
         </p:txBody>
       </p:sp>
@@ -9126,6 +8862,7 @@
         <a:solidFill>
           <a:srgbClr val="F0EEE6"/>
         </a:solidFill>
+        <a:effectLst/>
       </p:bgPr>
     </p:bg>
     <p:spTree>
@@ -9144,210 +8881,7 @@
       </p:grpSpPr>
       <p:pic>
         <p:nvPicPr>
-          <p:cNvPr id="2" name="Image 0" descr="preencoded.png">    </p:cNvPr>
-          <p:cNvPicPr>
-            <a:picLocks noChangeAspect="1"/>
-          </p:cNvPicPr>
-          <p:nvPr/>
-        </p:nvPicPr>
-        <p:blipFill>
-          <a:blip r:embed="rId1"/>
-          <a:stretch>
-            <a:fillRect/>
-          </a:stretch>
-        </p:blipFill>
-        <p:spPr>
-          <a:xfrm>
-            <a:off x="8321040" y="411480"/>
-            <a:ext cx="347472" cy="292608"/>
-          </a:xfrm>
-          <a:prstGeom prst="rect">
-            <a:avLst/>
-          </a:prstGeom>
-        </p:spPr>
-      </p:pic>
-      <p:sp>
-        <p:nvSpPr>
-          <p:cNvPr id="3" name="Shape 0"/>
-          <p:cNvSpPr/>
-          <p:nvPr/>
-        </p:nvSpPr>
-        <p:spPr>
-          <a:xfrm>
-            <a:off x="548640" y="822960"/>
-            <a:ext cx="3200400" cy="548640"/>
-          </a:xfrm>
-          <a:prstGeom prst="roundRect">
-            <a:avLst>
-              <a:gd name="adj" fmla="val 50000"/>
-            </a:avLst>
-          </a:prstGeom>
-          <a:solidFill>
-            <a:srgbClr val="C0392B"/>
-          </a:solidFill>
-          <a:ln/>
-        </p:spPr>
-      </p:sp>
-      <p:sp>
-        <p:nvSpPr>
-          <p:cNvPr id="4" name="Shape 1"/>
-          <p:cNvSpPr/>
-          <p:nvPr/>
-        </p:nvSpPr>
-        <p:spPr>
-          <a:xfrm>
-            <a:off x="804672" y="1014984"/>
-            <a:ext cx="164592" cy="164592"/>
-          </a:xfrm>
-          <a:prstGeom prst="ellipse">
-            <a:avLst/>
-          </a:prstGeom>
-          <a:solidFill>
-            <a:srgbClr val="FFFFFF"/>
-          </a:solidFill>
-          <a:ln/>
-        </p:spPr>
-      </p:sp>
-      <p:sp>
-        <p:nvSpPr>
-          <p:cNvPr id="5" name="Text 2"/>
-          <p:cNvSpPr/>
-          <p:nvPr/>
-        </p:nvSpPr>
-        <p:spPr>
-          <a:xfrm>
-            <a:off x="1051560" y="822960"/>
-            <a:ext cx="2560320" cy="548640"/>
-          </a:xfrm>
-          <a:prstGeom prst="rect">
-            <a:avLst/>
-          </a:prstGeom>
-          <a:noFill/>
-          <a:ln/>
-        </p:spPr>
-        <p:txBody>
-          <a:bodyPr wrap="square" lIns="0" tIns="0" rIns="0" bIns="0" rtlCol="0" anchor="ctr"/>
-          <a:lstStyle/>
-          <a:p>
-            <a:pPr indent="0" marL="0">
-              <a:buNone/>
-            </a:pPr>
-            <a:r>
-              <a:rPr lang="en-US" sz="1700" b="1" spc="100" kern="0" dirty="0">
-                <a:solidFill>
-                  <a:srgbClr val="FFFFFF"/>
-                </a:solidFill>
-                <a:latin typeface="Inter" pitchFamily="34" charset="0"/>
-                <a:ea typeface="Inter" pitchFamily="34" charset="-122"/>
-                <a:cs typeface="Inter" pitchFamily="34" charset="-120"/>
-              </a:rPr>
-              <a:t>LIVE DEMO</a:t>
-            </a:r>
-            <a:endParaRPr lang="en-US" sz="1700" dirty="0"/>
-          </a:p>
-        </p:txBody>
-      </p:sp>
-      <p:sp>
-        <p:nvSpPr>
-          <p:cNvPr id="6" name="Text 3"/>
-          <p:cNvSpPr/>
-          <p:nvPr/>
-        </p:nvSpPr>
-        <p:spPr>
-          <a:xfrm>
-            <a:off x="548640" y="1600200"/>
-            <a:ext cx="8046720" cy="457200"/>
-          </a:xfrm>
-          <a:prstGeom prst="rect">
-            <a:avLst/>
-          </a:prstGeom>
-          <a:noFill/>
-          <a:ln/>
-        </p:spPr>
-        <p:txBody>
-          <a:bodyPr wrap="square" lIns="0" tIns="0" rIns="0" bIns="0" rtlCol="0" anchor="ctr"/>
-          <a:lstStyle/>
-          <a:p>
-            <a:pPr indent="0" marL="0">
-              <a:buNone/>
-            </a:pPr>
-            <a:r>
-              <a:rPr lang="en-US" sz="2600" b="1" dirty="0">
-                <a:solidFill>
-                  <a:srgbClr val="141413"/>
-                </a:solidFill>
-                <a:latin typeface="Georgia" pitchFamily="34" charset="0"/>
-                <a:ea typeface="Georgia" pitchFamily="34" charset="-122"/>
-                <a:cs typeface="Georgia" pitchFamily="34" charset="-120"/>
-              </a:rPr>
-              <a:t>Generated tests + CI review on a PR</a:t>
-            </a:r>
-            <a:endParaRPr lang="en-US" sz="2600" dirty="0"/>
-          </a:p>
-        </p:txBody>
-      </p:sp>
-      <p:sp>
-        <p:nvSpPr>
-          <p:cNvPr id="7" name="Text 4"/>
-          <p:cNvSpPr/>
-          <p:nvPr/>
-        </p:nvSpPr>
-        <p:spPr>
-          <a:xfrm>
-            <a:off x="548640" y="2075688"/>
-            <a:ext cx="8046720" cy="365760"/>
-          </a:xfrm>
-          <a:prstGeom prst="rect">
-            <a:avLst/>
-          </a:prstGeom>
-          <a:noFill/>
-          <a:ln/>
-        </p:spPr>
-        <p:txBody>
-          <a:bodyPr wrap="square" lIns="0" tIns="0" rIns="0" bIns="0" rtlCol="0" anchor="ctr"/>
-          <a:lstStyle/>
-          <a:p>
-            <a:pPr indent="0" marL="0">
-              <a:buNone/>
-            </a:pPr>
-            <a:r>
-              <a:rPr lang="en-US" sz="1500" b="1" dirty="0">
-                <a:solidFill>
-                  <a:srgbClr val="C25E40"/>
-                </a:solidFill>
-                <a:latin typeface="Inter" pitchFamily="34" charset="0"/>
-                <a:ea typeface="Inter" pitchFamily="34" charset="-122"/>
-                <a:cs typeface="Inter" pitchFamily="34" charset="-120"/>
-              </a:rPr>
-              <a:t>From a fresh test suite to an automated PR comment</a:t>
-            </a:r>
-            <a:endParaRPr lang="en-US" sz="1500" dirty="0"/>
-          </a:p>
-        </p:txBody>
-      </p:sp>
-      <p:sp>
-        <p:nvSpPr>
-          <p:cNvPr id="8" name="Shape 5"/>
-          <p:cNvSpPr/>
-          <p:nvPr/>
-        </p:nvSpPr>
-        <p:spPr>
-          <a:xfrm>
-            <a:off x="566928" y="2670048"/>
-            <a:ext cx="274320" cy="274320"/>
-          </a:xfrm>
-          <a:prstGeom prst="ellipse">
-            <a:avLst/>
-          </a:prstGeom>
-          <a:solidFill>
-            <a:srgbClr val="C0392B"/>
-          </a:solidFill>
-          <a:ln/>
-        </p:spPr>
-      </p:sp>
-      <p:pic>
-        <p:nvPicPr>
-          <p:cNvPr id="9" name="Image 1" descr="preencoded.png">    </p:cNvPr>
+          <p:cNvPr id="2" name="Image 0" descr="preencoded.png"/>
           <p:cNvPicPr>
             <a:picLocks noChangeAspect="1"/>
           </p:cNvPicPr>
@@ -9361,8 +8895,8 @@
         </p:blipFill>
         <p:spPr>
           <a:xfrm>
-            <a:off x="638251" y="2741371"/>
-            <a:ext cx="131674" cy="131674"/>
+            <a:off x="8321040" y="411480"/>
+            <a:ext cx="347472" cy="292608"/>
           </a:xfrm>
           <a:prstGeom prst="rect">
             <a:avLst/>
@@ -9371,52 +8905,186 @@
       </p:pic>
       <p:sp>
         <p:nvSpPr>
-          <p:cNvPr id="10" name="Text 6"/>
-          <p:cNvSpPr/>
-          <p:nvPr/>
-        </p:nvSpPr>
-        <p:spPr>
-          <a:xfrm>
-            <a:off x="960120" y="2651760"/>
-            <a:ext cx="7406640" cy="310896"/>
-          </a:xfrm>
-          <a:prstGeom prst="rect">
-            <a:avLst/>
-          </a:prstGeom>
-          <a:noFill/>
-          <a:ln/>
-        </p:spPr>
-        <p:txBody>
-          <a:bodyPr wrap="square" lIns="0" tIns="0" rIns="0" bIns="0" rtlCol="0" anchor="ctr"/>
-          <a:lstStyle/>
-          <a:p>
-            <a:pPr indent="0" marL="0">
-              <a:buNone/>
-            </a:pPr>
-            <a:r>
-              <a:rPr lang="en-US" sz="1450" dirty="0">
+          <p:cNvPr id="3" name="Shape 0"/>
+          <p:cNvSpPr/>
+          <p:nvPr/>
+        </p:nvSpPr>
+        <p:spPr>
+          <a:xfrm>
+            <a:off x="548640" y="822960"/>
+            <a:ext cx="3200400" cy="548640"/>
+          </a:xfrm>
+          <a:prstGeom prst="roundRect">
+            <a:avLst>
+              <a:gd name="adj" fmla="val 50000"/>
+            </a:avLst>
+          </a:prstGeom>
+          <a:solidFill>
+            <a:srgbClr val="C0392B"/>
+          </a:solidFill>
+          <a:ln/>
+        </p:spPr>
+        <p:txBody>
+          <a:bodyPr/>
+          <a:lstStyle/>
+          <a:p>
+            <a:endParaRPr lang="en-US"/>
+          </a:p>
+        </p:txBody>
+      </p:sp>
+      <p:sp>
+        <p:nvSpPr>
+          <p:cNvPr id="4" name="Shape 1"/>
+          <p:cNvSpPr/>
+          <p:nvPr/>
+        </p:nvSpPr>
+        <p:spPr>
+          <a:xfrm>
+            <a:off x="804672" y="1014984"/>
+            <a:ext cx="164592" cy="164592"/>
+          </a:xfrm>
+          <a:prstGeom prst="ellipse">
+            <a:avLst/>
+          </a:prstGeom>
+          <a:solidFill>
+            <a:srgbClr val="FFFFFF"/>
+          </a:solidFill>
+          <a:ln/>
+        </p:spPr>
+        <p:txBody>
+          <a:bodyPr/>
+          <a:lstStyle/>
+          <a:p>
+            <a:endParaRPr lang="en-US"/>
+          </a:p>
+        </p:txBody>
+      </p:sp>
+      <p:sp>
+        <p:nvSpPr>
+          <p:cNvPr id="5" name="Text 2"/>
+          <p:cNvSpPr/>
+          <p:nvPr/>
+        </p:nvSpPr>
+        <p:spPr>
+          <a:xfrm>
+            <a:off x="1051560" y="822960"/>
+            <a:ext cx="2560320" cy="548640"/>
+          </a:xfrm>
+          <a:prstGeom prst="rect">
+            <a:avLst/>
+          </a:prstGeom>
+          <a:noFill/>
+          <a:ln/>
+        </p:spPr>
+        <p:txBody>
+          <a:bodyPr wrap="square" lIns="0" tIns="0" rIns="0" bIns="0" rtlCol="0" anchor="ctr"/>
+          <a:lstStyle/>
+          <a:p>
+            <a:pPr marL="0" indent="0">
+              <a:buNone/>
+            </a:pPr>
+            <a:r>
+              <a:rPr lang="en-US" sz="1700" b="1" kern="0" spc="100" dirty="0">
+                <a:solidFill>
+                  <a:srgbClr val="FFFFFF"/>
+                </a:solidFill>
+                <a:latin typeface="Inter" pitchFamily="34" charset="0"/>
+                <a:ea typeface="Inter" pitchFamily="34" charset="-122"/>
+                <a:cs typeface="Inter" pitchFamily="34" charset="-120"/>
+              </a:rPr>
+              <a:t>LIVE DEMO</a:t>
+            </a:r>
+            <a:endParaRPr lang="en-US" sz="1700" dirty="0"/>
+          </a:p>
+        </p:txBody>
+      </p:sp>
+      <p:sp>
+        <p:nvSpPr>
+          <p:cNvPr id="6" name="Text 3"/>
+          <p:cNvSpPr/>
+          <p:nvPr/>
+        </p:nvSpPr>
+        <p:spPr>
+          <a:xfrm>
+            <a:off x="548640" y="1600200"/>
+            <a:ext cx="8046720" cy="457200"/>
+          </a:xfrm>
+          <a:prstGeom prst="rect">
+            <a:avLst/>
+          </a:prstGeom>
+          <a:noFill/>
+          <a:ln/>
+        </p:spPr>
+        <p:txBody>
+          <a:bodyPr wrap="square" lIns="0" tIns="0" rIns="0" bIns="0" rtlCol="0" anchor="ctr"/>
+          <a:lstStyle/>
+          <a:p>
+            <a:pPr marL="0" indent="0">
+              <a:buNone/>
+            </a:pPr>
+            <a:r>
+              <a:rPr lang="en-US" sz="2600" b="1" dirty="0">
                 <a:solidFill>
                   <a:srgbClr val="141413"/>
                 </a:solidFill>
-                <a:latin typeface="Inter" pitchFamily="34" charset="0"/>
-                <a:ea typeface="Inter" pitchFamily="34" charset="-122"/>
-                <a:cs typeface="Inter" pitchFamily="34" charset="-120"/>
-              </a:rPr>
-              <a:t>Generate a test suite for AgentService</a:t>
-            </a:r>
-            <a:endParaRPr lang="en-US" sz="1450" dirty="0"/>
-          </a:p>
-        </p:txBody>
-      </p:sp>
-      <p:sp>
-        <p:nvSpPr>
-          <p:cNvPr id="11" name="Shape 7"/>
-          <p:cNvSpPr/>
-          <p:nvPr/>
-        </p:nvSpPr>
-        <p:spPr>
-          <a:xfrm>
-            <a:off x="566928" y="3054096"/>
+                <a:latin typeface="Georgia" pitchFamily="34" charset="0"/>
+                <a:ea typeface="Georgia" pitchFamily="34" charset="-122"/>
+                <a:cs typeface="Georgia" pitchFamily="34" charset="-120"/>
+              </a:rPr>
+              <a:t>Generated tests + CI review on a PR</a:t>
+            </a:r>
+            <a:endParaRPr lang="en-US" sz="2600" dirty="0"/>
+          </a:p>
+        </p:txBody>
+      </p:sp>
+      <p:sp>
+        <p:nvSpPr>
+          <p:cNvPr id="7" name="Text 4"/>
+          <p:cNvSpPr/>
+          <p:nvPr/>
+        </p:nvSpPr>
+        <p:spPr>
+          <a:xfrm>
+            <a:off x="548640" y="2075688"/>
+            <a:ext cx="8046720" cy="365760"/>
+          </a:xfrm>
+          <a:prstGeom prst="rect">
+            <a:avLst/>
+          </a:prstGeom>
+          <a:noFill/>
+          <a:ln/>
+        </p:spPr>
+        <p:txBody>
+          <a:bodyPr wrap="square" lIns="0" tIns="0" rIns="0" bIns="0" rtlCol="0" anchor="ctr"/>
+          <a:lstStyle/>
+          <a:p>
+            <a:pPr marL="0" indent="0">
+              <a:buNone/>
+            </a:pPr>
+            <a:r>
+              <a:rPr lang="en-US" sz="1500" b="1" dirty="0">
+                <a:solidFill>
+                  <a:srgbClr val="C25E40"/>
+                </a:solidFill>
+                <a:latin typeface="Inter" pitchFamily="34" charset="0"/>
+                <a:ea typeface="Inter" pitchFamily="34" charset="-122"/>
+                <a:cs typeface="Inter" pitchFamily="34" charset="-120"/>
+              </a:rPr>
+              <a:t>From a fresh test suite to an automated PR comment</a:t>
+            </a:r>
+            <a:endParaRPr lang="en-US" sz="1500" dirty="0"/>
+          </a:p>
+        </p:txBody>
+      </p:sp>
+      <p:sp>
+        <p:nvSpPr>
+          <p:cNvPr id="8" name="Shape 5"/>
+          <p:cNvSpPr/>
+          <p:nvPr/>
+        </p:nvSpPr>
+        <p:spPr>
+          <a:xfrm>
+            <a:off x="566928" y="2670048"/>
             <a:ext cx="274320" cy="274320"/>
           </a:xfrm>
           <a:prstGeom prst="ellipse">
@@ -9427,10 +9095,17 @@
           </a:solidFill>
           <a:ln/>
         </p:spPr>
+        <p:txBody>
+          <a:bodyPr/>
+          <a:lstStyle/>
+          <a:p>
+            <a:endParaRPr lang="en-US"/>
+          </a:p>
+        </p:txBody>
       </p:sp>
       <p:pic>
         <p:nvPicPr>
-          <p:cNvPr id="12" name="Image 2" descr="preencoded.png">    </p:cNvPr>
+          <p:cNvPr id="9" name="Image 1" descr="preencoded.png"/>
           <p:cNvPicPr>
             <a:picLocks noChangeAspect="1"/>
           </p:cNvPicPr>
@@ -9444,7 +9119,7 @@
         </p:blipFill>
         <p:spPr>
           <a:xfrm>
-            <a:off x="638251" y="3125419"/>
+            <a:off x="638251" y="2741371"/>
             <a:ext cx="131674" cy="131674"/>
           </a:xfrm>
           <a:prstGeom prst="rect">
@@ -9454,13 +9129,13 @@
       </p:pic>
       <p:sp>
         <p:nvSpPr>
-          <p:cNvPr id="13" name="Text 8"/>
-          <p:cNvSpPr/>
-          <p:nvPr/>
-        </p:nvSpPr>
-        <p:spPr>
-          <a:xfrm>
-            <a:off x="960120" y="3035808"/>
+          <p:cNvPr id="10" name="Text 6"/>
+          <p:cNvSpPr/>
+          <p:nvPr/>
+        </p:nvSpPr>
+        <p:spPr>
+          <a:xfrm>
+            <a:off x="960120" y="2651760"/>
             <a:ext cx="7406640" cy="310896"/>
           </a:xfrm>
           <a:prstGeom prst="rect">
@@ -9473,7 +9148,7 @@
           <a:bodyPr wrap="square" lIns="0" tIns="0" rIns="0" bIns="0" rtlCol="0" anchor="ctr"/>
           <a:lstStyle/>
           <a:p>
-            <a:pPr indent="0" marL="0">
+            <a:pPr marL="0" indent="0">
               <a:buNone/>
             </a:pPr>
             <a:r>
@@ -9485,7 +9160,7 @@
                 <a:ea typeface="Inter" pitchFamily="34" charset="-122"/>
                 <a:cs typeface="Inter" pitchFamily="34" charset="-120"/>
               </a:rPr>
-              <a:t>Open a PR and let Actions run</a:t>
+              <a:t>Generate a test suite for AgentService</a:t>
             </a:r>
             <a:endParaRPr lang="en-US" sz="1450" dirty="0"/>
           </a:p>
@@ -9493,13 +9168,13 @@
       </p:sp>
       <p:sp>
         <p:nvSpPr>
-          <p:cNvPr id="14" name="Shape 9"/>
-          <p:cNvSpPr/>
-          <p:nvPr/>
-        </p:nvSpPr>
-        <p:spPr>
-          <a:xfrm>
-            <a:off x="566928" y="3438144"/>
+          <p:cNvPr id="11" name="Shape 7"/>
+          <p:cNvSpPr/>
+          <p:nvPr/>
+        </p:nvSpPr>
+        <p:spPr>
+          <a:xfrm>
+            <a:off x="566928" y="3054096"/>
             <a:ext cx="274320" cy="274320"/>
           </a:xfrm>
           <a:prstGeom prst="ellipse">
@@ -9510,23 +9185,120 @@
           </a:solidFill>
           <a:ln/>
         </p:spPr>
+        <p:txBody>
+          <a:bodyPr/>
+          <a:lstStyle/>
+          <a:p>
+            <a:endParaRPr lang="en-US"/>
+          </a:p>
+        </p:txBody>
       </p:sp>
       <p:pic>
         <p:nvPicPr>
-          <p:cNvPr id="15" name="Image 3" descr="preencoded.png">    </p:cNvPr>
+          <p:cNvPr id="12" name="Image 2" descr="preencoded.png"/>
           <p:cNvPicPr>
             <a:picLocks noChangeAspect="1"/>
           </p:cNvPicPr>
           <p:nvPr/>
         </p:nvPicPr>
         <p:blipFill>
-          <a:blip r:embed="rId4"/>
+          <a:blip r:embed="rId3"/>
           <a:stretch>
             <a:fillRect/>
           </a:stretch>
         </p:blipFill>
         <p:spPr>
           <a:xfrm>
+            <a:off x="638251" y="3125419"/>
+            <a:ext cx="131674" cy="131674"/>
+          </a:xfrm>
+          <a:prstGeom prst="rect">
+            <a:avLst/>
+          </a:prstGeom>
+        </p:spPr>
+      </p:pic>
+      <p:sp>
+        <p:nvSpPr>
+          <p:cNvPr id="13" name="Text 8"/>
+          <p:cNvSpPr/>
+          <p:nvPr/>
+        </p:nvSpPr>
+        <p:spPr>
+          <a:xfrm>
+            <a:off x="960120" y="3035808"/>
+            <a:ext cx="7406640" cy="310896"/>
+          </a:xfrm>
+          <a:prstGeom prst="rect">
+            <a:avLst/>
+          </a:prstGeom>
+          <a:noFill/>
+          <a:ln/>
+        </p:spPr>
+        <p:txBody>
+          <a:bodyPr wrap="square" lIns="0" tIns="0" rIns="0" bIns="0" rtlCol="0" anchor="ctr"/>
+          <a:lstStyle/>
+          <a:p>
+            <a:pPr marL="0" indent="0">
+              <a:buNone/>
+            </a:pPr>
+            <a:r>
+              <a:rPr lang="en-US" sz="1450" dirty="0">
+                <a:solidFill>
+                  <a:srgbClr val="141413"/>
+                </a:solidFill>
+                <a:latin typeface="Inter" pitchFamily="34" charset="0"/>
+                <a:ea typeface="Inter" pitchFamily="34" charset="-122"/>
+                <a:cs typeface="Inter" pitchFamily="34" charset="-120"/>
+              </a:rPr>
+              <a:t>Open a PR and let Actions run</a:t>
+            </a:r>
+            <a:endParaRPr lang="en-US" sz="1450" dirty="0"/>
+          </a:p>
+        </p:txBody>
+      </p:sp>
+      <p:sp>
+        <p:nvSpPr>
+          <p:cNvPr id="14" name="Shape 9"/>
+          <p:cNvSpPr/>
+          <p:nvPr/>
+        </p:nvSpPr>
+        <p:spPr>
+          <a:xfrm>
+            <a:off x="566928" y="3438144"/>
+            <a:ext cx="274320" cy="274320"/>
+          </a:xfrm>
+          <a:prstGeom prst="ellipse">
+            <a:avLst/>
+          </a:prstGeom>
+          <a:solidFill>
+            <a:srgbClr val="C0392B"/>
+          </a:solidFill>
+          <a:ln/>
+        </p:spPr>
+        <p:txBody>
+          <a:bodyPr/>
+          <a:lstStyle/>
+          <a:p>
+            <a:endParaRPr lang="en-US"/>
+          </a:p>
+        </p:txBody>
+      </p:sp>
+      <p:pic>
+        <p:nvPicPr>
+          <p:cNvPr id="15" name="Image 3" descr="preencoded.png"/>
+          <p:cNvPicPr>
+            <a:picLocks noChangeAspect="1"/>
+          </p:cNvPicPr>
+          <p:nvPr/>
+        </p:nvPicPr>
+        <p:blipFill>
+          <a:blip r:embed="rId3"/>
+          <a:stretch>
+            <a:fillRect/>
+          </a:stretch>
+        </p:blipFill>
+        <p:spPr>
+          <a:xfrm>
             <a:off x="638251" y="3509467"/>
             <a:ext cx="131674" cy="131674"/>
           </a:xfrm>
@@ -9556,7 +9328,7 @@
           <a:bodyPr wrap="square" lIns="0" tIns="0" rIns="0" bIns="0" rtlCol="0" anchor="ctr"/>
           <a:lstStyle/>
           <a:p>
-            <a:pPr indent="0" marL="0">
+            <a:pPr marL="0" indent="0">
               <a:buNone/>
             </a:pPr>
             <a:r>
@@ -9595,6 +9367,13 @@
           </a:solidFill>
           <a:ln/>
         </p:spPr>
+        <p:txBody>
+          <a:bodyPr/>
+          <a:lstStyle/>
+          <a:p>
+            <a:endParaRPr lang="en-US"/>
+          </a:p>
+        </p:txBody>
       </p:sp>
       <p:sp>
         <p:nvSpPr>
@@ -9617,7 +9396,7 @@
           <a:bodyPr wrap="square" lIns="0" tIns="0" rIns="0" bIns="0" rtlCol="0" anchor="ctr"/>
           <a:lstStyle/>
           <a:p>
-            <a:pPr indent="0" marL="0">
+            <a:pPr marL="0" indent="0">
               <a:buNone/>
             </a:pPr>
             <a:r>
@@ -9631,9 +9410,6 @@
               </a:rPr>
               <a:t>Watch for it:  </a:t>
             </a:r>
-            <a:pPr indent="0" marL="0">
-              <a:buNone/>
-            </a:pPr>
             <a:r>
               <a:rPr lang="en-US" sz="1250" dirty="0">
                 <a:solidFill>
@@ -9670,7 +9446,7 @@
           <a:bodyPr wrap="square" rtlCol="0" anchor="ctr"/>
           <a:lstStyle/>
           <a:p>
-            <a:pPr indent="0" marL="0">
+            <a:pPr marL="0" indent="0">
               <a:buNone/>
             </a:pPr>
             <a:r>
@@ -9709,7 +9485,7 @@
           <a:bodyPr wrap="square" rtlCol="0" anchor="ctr"/>
           <a:lstStyle/>
           <a:p>
-            <a:pPr algn="r" indent="0" marL="0">
+            <a:pPr marL="0" indent="0" algn="r">
               <a:buNone/>
             </a:pPr>
             <a:r>
@@ -9724,45 +9500,6 @@
               <a:t>Day 2 · Section 5  ·  9/11</a:t>
             </a:r>
             <a:endParaRPr lang="en-US" sz="900" dirty="0"/>
-          </a:p>
-        </p:txBody>
-      </p:sp>
-      <p:sp>
-        <p:nvSpPr>
-          <p:cNvPr id="21" name="Text 15"/>
-          <p:cNvSpPr/>
-          <p:nvPr/>
-        </p:nvSpPr>
-        <p:spPr>
-          <a:xfrm>
-            <a:off x="548640" y="4462272"/>
-            <a:ext cx="8046720" cy="274320"/>
-          </a:xfrm>
-          <a:prstGeom prst="rect">
-            <a:avLst/>
-          </a:prstGeom>
-          <a:noFill/>
-          <a:ln/>
-        </p:spPr>
-        <p:txBody>
-          <a:bodyPr wrap="square" lIns="0" tIns="0" rIns="0" bIns="0" rtlCol="0" anchor="ctr"/>
-          <a:lstStyle/>
-          <a:p>
-            <a:pPr indent="0" marL="0">
-              <a:buNone/>
-            </a:pPr>
-            <a:r>
-              <a:rPr lang="en-US" sz="1000" i="1" dirty="0">
-                <a:solidFill>
-                  <a:srgbClr val="615C52"/>
-                </a:solidFill>
-                <a:latin typeface="Inter" pitchFamily="34" charset="0"/>
-                <a:ea typeface="Inter" pitchFamily="34" charset="-122"/>
-                <a:cs typeface="Inter" pitchFamily="34" charset="-120"/>
-              </a:rPr>
-              <a:t>▸ Two payoffs in one demo — generated tests, then a hands-free CI review.</a:t>
-            </a:r>
-            <a:endParaRPr lang="en-US" sz="1000" dirty="0"/>
           </a:p>
         </p:txBody>
       </p:sp>

--- a/decks/Day 2/Day2-Section5-AI-Testing-CICD.pptx
+++ b/decks/Day 2/Day2-Section5-AI-Testing-CICD.pptx
@@ -662,45 +662,6 @@
           <a:lstStyle/>
           <a:p>
             <a:endParaRPr lang="en-US"/>
-          </a:p>
-        </p:txBody>
-      </p:sp>
-      <p:sp>
-        <p:nvSpPr>
-          <p:cNvPr id="8" name="Text 5"/>
-          <p:cNvSpPr/>
-          <p:nvPr/>
-        </p:nvSpPr>
-        <p:spPr>
-          <a:xfrm>
-            <a:off x="640080" y="3611880"/>
-            <a:ext cx="7315200" cy="365760"/>
-          </a:xfrm>
-          <a:prstGeom prst="rect">
-            <a:avLst/>
-          </a:prstGeom>
-          <a:noFill/>
-          <a:ln/>
-        </p:spPr>
-        <p:txBody>
-          <a:bodyPr wrap="square" lIns="0" tIns="0" rIns="0" bIns="0" rtlCol="0" anchor="ctr"/>
-          <a:lstStyle/>
-          <a:p>
-            <a:pPr marL="0" indent="0">
-              <a:buNone/>
-            </a:pPr>
-            <a:r>
-              <a:rPr lang="en-US" sz="1600" dirty="0">
-                <a:solidFill>
-                  <a:srgbClr val="615C52"/>
-                </a:solidFill>
-                <a:latin typeface="Inter" pitchFamily="34" charset="0"/>
-                <a:ea typeface="Inter" pitchFamily="34" charset="-122"/>
-                <a:cs typeface="Inter" pitchFamily="34" charset="-120"/>
-              </a:rPr>
-              <a:t>45 min  ·  20 lecture / demo  +  25 lab</a:t>
-            </a:r>
-            <a:endParaRPr lang="en-US" sz="1600" dirty="0"/>
           </a:p>
         </p:txBody>
       </p:sp>
